--- a/output/Dooley_Creative_Teardown_Findings.pptx
+++ b/output/Dooley_Creative_Teardown_Findings.pptx
@@ -760,7 +760,7 @@
           <a:lstStyle/>
           <a:p>
             <a:r>
-              <a:t>Ten minutes. Open on the finding, not an agenda. Twelve fitness apparel brands, what they are actually saying in Google search right now.</a:t>
+              <a:t>Ten minutes. Open on the finding, not an agenda. Twelve fitness apparel brands, what they are actually saying in Google search.</a:t>
             </a:r>
           </a:p>
         </p:txBody>
@@ -900,7 +900,7 @@
           <a:lstStyle/>
           <a:p>
             <a:r>
-              <a:t>Thirty seconds. The point is the data is real and current, not that the method is clever.</a:t>
+              <a:t>Thirty seconds. If asked: no date filter was applied, so this is every text ad the Transparency Center listed that day, not a verified set of live ads. Does not change the finding.</a:t>
             </a:r>
           </a:p>
         </p:txBody>
@@ -4498,7 +4498,7 @@
                 </a:solidFill>
                 <a:latin typeface="Calibri"/>
               </a:rPr>
-              <a:t>101 live ads   ·   12 brands   ·   collected 12 August 2026</a:t>
+              <a:t>101 text ads   ·   12 brands   ·   listed 12 August 2026</a:t>
             </a:r>
           </a:p>
         </p:txBody>
@@ -5322,7 +5322,7 @@
                 </a:solidFill>
                 <a:latin typeface="Cambria"/>
               </a:rPr>
-              <a:t>101 live ads, twelve brands, one grid</a:t>
+              <a:t>101 text ads, twelve brands, one grid</a:t>
             </a:r>
           </a:p>
         </p:txBody>
@@ -5471,7 +5471,7 @@
                 </a:solidFill>
                 <a:latin typeface="Calibri"/>
               </a:rPr>
-              <a:t>Every current search text ad for each brand, pulled by hand from the Google Ads Transparency Center. Public source, no login, no scraping.</a:t>
+              <a:t>Every search text ad the Google Ads Transparency Center listed for each brand on 12 August, transcribed by hand. Public source, no login, no scraping.</a:t>
             </a:r>
           </a:p>
         </p:txBody>

--- a/output/Dooley_Creative_Teardown_Findings.pptx
+++ b/output/Dooley_Creative_Teardown_Findings.pptx
@@ -14,6 +14,7 @@
     <p:sldId id="262" r:id="rId14"/>
     <p:sldId id="263" r:id="rId15"/>
     <p:sldId id="264" r:id="rId16"/>
+    <p:sldId id="265" r:id="rId17"/>
   </p:sldIdLst>
   <p:sldSz cx="12191695" cy="6858000" type="screen4x3"/>
   <p:notesSz cx="6858000" cy="9144000"/>
@@ -142,7 +143,7 @@
             <c:idx val="0"/>
             <c:spPr>
               <a:solidFill>
-                <a:srgbClr val="E8562A"/>
+                <a:srgbClr val="C2410C"/>
               </a:solidFill>
             </c:spPr>
           </c:dPt>
@@ -150,7 +151,7 @@
             <c:idx val="1"/>
             <c:spPr>
               <a:solidFill>
-                <a:srgbClr val="6B7280"/>
+                <a:srgbClr val="697482"/>
               </a:solidFill>
             </c:spPr>
           </c:dPt>
@@ -158,7 +159,7 @@
             <c:idx val="2"/>
             <c:spPr>
               <a:solidFill>
-                <a:srgbClr val="6B7280"/>
+                <a:srgbClr val="697482"/>
               </a:solidFill>
             </c:spPr>
           </c:dPt>
@@ -166,7 +167,7 @@
             <c:idx val="3"/>
             <c:spPr>
               <a:solidFill>
-                <a:srgbClr val="6B7280"/>
+                <a:srgbClr val="697482"/>
               </a:solidFill>
             </c:spPr>
           </c:dPt>
@@ -174,7 +175,7 @@
             <c:idx val="4"/>
             <c:spPr>
               <a:solidFill>
-                <a:srgbClr val="14181C"/>
+                <a:srgbClr val="1F2933"/>
               </a:solidFill>
             </c:spPr>
           </c:dPt>
@@ -182,7 +183,7 @@
             <c:idx val="5"/>
             <c:spPr>
               <a:solidFill>
-                <a:srgbClr val="14181C"/>
+                <a:srgbClr val="1F2933"/>
               </a:solidFill>
             </c:spPr>
           </c:dPt>
@@ -190,7 +191,7 @@
             <c:idx val="6"/>
             <c:spPr>
               <a:solidFill>
-                <a:srgbClr val="14181C"/>
+                <a:srgbClr val="1F2933"/>
               </a:solidFill>
             </c:spPr>
           </c:dPt>
@@ -198,7 +199,7 @@
             <c:idx val="7"/>
             <c:spPr>
               <a:solidFill>
-                <a:srgbClr val="14181C"/>
+                <a:srgbClr val="1F2933"/>
               </a:solidFill>
             </c:spPr>
           </c:dPt>
@@ -277,7 +278,7 @@
               <a:pPr>
                 <a:defRPr sz="1200" b="1">
                   <a:solidFill>
-                    <a:srgbClr val="14181C"/>
+                    <a:srgbClr val="1F2933"/>
                   </a:solidFill>
                   <a:latin typeface="Calibri"/>
                 </a:defRPr>
@@ -310,7 +311,7 @@
         <c:spPr>
           <a:ln>
             <a:solidFill>
-              <a:srgbClr val="D8DBE0"/>
+              <a:srgbClr val="D5DDE4"/>
             </a:solidFill>
           </a:ln>
         </c:spPr>
@@ -321,7 +322,7 @@
             <a:pPr>
               <a:defRPr sz="1300">
                 <a:solidFill>
-                  <a:srgbClr val="14181C"/>
+                  <a:srgbClr val="1F2933"/>
                 </a:solidFill>
                 <a:latin typeface="Calibri"/>
               </a:defRPr>
@@ -785,6 +786,76 @@
 </p:notes>
 </file>
 
+<file path=ppt/notesSlides/notesSlide10.xml><?xml version="1.0" encoding="utf-8"?>
+<p:notes xmlns:a="http://schemas.openxmlformats.org/drawingml/2006/main" xmlns:p="http://schemas.openxmlformats.org/presentationml/2006/main" xmlns:r="http://schemas.openxmlformats.org/officeDocument/2006/relationships">
+  <p:cSld>
+    <p:spTree>
+      <p:nvGrpSpPr>
+        <p:cNvPr id="1" name=""/>
+        <p:cNvGrpSpPr/>
+        <p:nvPr/>
+      </p:nvGrpSpPr>
+      <p:grpSpPr>
+        <a:xfrm>
+          <a:off x="0" y="0"/>
+          <a:ext cx="0" cy="0"/>
+          <a:chOff x="0" y="0"/>
+          <a:chExt cx="0" cy="0"/>
+        </a:xfrm>
+      </p:grpSpPr>
+      <p:sp>
+        <p:nvSpPr>
+          <p:cNvPr id="2" name="Slide Image Placeholder 1"/>
+          <p:cNvSpPr>
+            <a:spLocks noGrp="1"/>
+          </p:cNvSpPr>
+          <p:nvPr>
+            <p:ph type="sldImg" idx="2"/>
+          </p:nvPr>
+        </p:nvSpPr>
+        <p:spPr/>
+      </p:sp>
+      <p:sp>
+        <p:nvSpPr>
+          <p:cNvPr id="3" name="Notes Placeholder 2"/>
+          <p:cNvSpPr>
+            <a:spLocks noGrp="1"/>
+          </p:cNvSpPr>
+          <p:nvPr>
+            <p:ph type="body" idx="3" sz="quarter"/>
+          </p:nvPr>
+        </p:nvSpPr>
+        <p:spPr/>
+        <p:txBody>
+          <a:bodyPr/>
+          <a:lstStyle/>
+          <a:p>
+            <a:r>
+              <a:t>Land on the lane, then take questions. Ready answers: how do you know the tags are right; why only Google search; why is Patagonia only three ads; isn't community just Gymshark's brand voice.</a:t>
+            </a:r>
+          </a:p>
+        </p:txBody>
+      </p:sp>
+      <p:sp>
+        <p:nvSpPr>
+          <p:cNvPr id="4" name="Slide Number Placeholder 3"/>
+          <p:cNvSpPr>
+            <a:spLocks noGrp="1"/>
+          </p:cNvSpPr>
+          <p:nvPr>
+            <p:ph type="sldNum" idx="5" sz="quarter"/>
+          </p:nvPr>
+        </p:nvSpPr>
+        <p:spPr/>
+      </p:sp>
+    </p:spTree>
+  </p:cSld>
+  <p:clrMapOvr>
+    <a:masterClrMapping/>
+  </p:clrMapOvr>
+</p:notes>
+</file>
+
 <file path=ppt/notesSlides/notesSlide2.xml><?xml version="1.0" encoding="utf-8"?>
 <p:notes xmlns:a="http://schemas.openxmlformats.org/drawingml/2006/main" xmlns:p="http://schemas.openxmlformats.org/presentationml/2006/main" xmlns:r="http://schemas.openxmlformats.org/officeDocument/2006/relationships">
   <p:cSld>
@@ -970,7 +1041,7 @@
           <a:lstStyle/>
           <a:p>
             <a:r>
-              <a:t>The shape is the argument. Four crowded claims, then a cliff. Community in orange is where the deck is heading.</a:t>
+              <a:t>The shape is the argument. Four crowded claims, then a cliff. Community in orange at the bottom is where the deck is heading.</a:t>
             </a:r>
           </a:p>
         </p:txBody>
@@ -1040,7 +1111,7 @@
           <a:lstStyle/>
           <a:p>
             <a:r>
-              <a:t>Arguably the stronger finding. Ratings are the category default proof, which makes review volume a competitive asset rather than hygiene.</a:t>
+              <a:t>This is the answer to 'is that just your sample?'. Two independent collections agree. Do not claim a trend from the second set: it is year-stratified, so its brand mix swings between years.</a:t>
             </a:r>
           </a:p>
         </p:txBody>
@@ -1110,7 +1181,7 @@
           <a:lstStyle/>
           <a:p>
             <a:r>
-              <a:t>Hostile question to expect: why has Gymshark not already won this? Answer: they treat it as voice, not proof. Nobody publishes numbers.</a:t>
+              <a:t>Arguably the stronger finding. Ratings are the category default proof, which makes review volume a competitive asset rather than hygiene.</a:t>
             </a:r>
           </a:p>
         </p:txBody>
@@ -1180,7 +1251,7 @@
           <a:lstStyle/>
           <a:p>
             <a:r>
-              <a:t>Do not skip this. Showing you caught your own false finding is the most credible thing in the deck and it inoculates you against anyone who checks the source.</a:t>
+              <a:t>Hostile question to expect: why has Gymshark not already won this? Answer: they treat it as voice, not proof. Nobody publishes numbers.</a:t>
             </a:r>
           </a:p>
         </p:txBody>
@@ -1250,7 +1321,7 @@
           <a:lstStyle/>
           <a:p>
             <a:r>
-              <a:t>Close the analytical section. These transfer to any competitive research, which is the point for the class.</a:t>
+              <a:t>Do not skip this. Showing you caught your own false finding is the most credible thing in the deck and it inoculates you against anyone who checks the source.</a:t>
             </a:r>
           </a:p>
         </p:txBody>
@@ -1320,7 +1391,7 @@
           <a:lstStyle/>
           <a:p>
             <a:r>
-              <a:t>Land on the lane, then take questions. Ready answers: how do you know the tags are right; why only Google search; why is Patagonia only three ads; isn't community just Gymshark's brand voice.</a:t>
+              <a:t>Close the analytical section. These transfer to any competitive research, which is the point for the class.</a:t>
             </a:r>
           </a:p>
         </p:txBody>
@@ -4322,7 +4393,7 @@
     <p:bg>
       <p:bgPr>
         <a:solidFill>
-          <a:srgbClr val="14181C"/>
+          <a:srgbClr val="ECF1F6"/>
         </a:solidFill>
         <a:effectLst/>
       </p:bgPr>
@@ -4342,8 +4413,8 @@
         </p:nvSpPr>
         <p:spPr>
           <a:xfrm>
-            <a:off x="640080" y="1325880"/>
-            <a:ext cx="8229600" cy="2377440"/>
+            <a:off x="640080" y="1371600"/>
+            <a:ext cx="8595360" cy="2377440"/>
           </a:xfrm>
           <a:prstGeom prst="rect">
             <a:avLst/>
@@ -4364,7 +4435,7 @@
             <a:r>
               <a:rPr sz="5400" b="1" i="0">
                 <a:solidFill>
-                  <a:srgbClr val="FFFFFF"/>
+                  <a:srgbClr val="1F2933"/>
                 </a:solidFill>
                 <a:latin typeface="Cambria"/>
               </a:rPr>
@@ -4380,7 +4451,7 @@
             <a:r>
               <a:rPr sz="5400" b="1" i="0">
                 <a:solidFill>
-                  <a:srgbClr val="FFFFFF"/>
+                  <a:srgbClr val="1F2933"/>
                 </a:solidFill>
                 <a:latin typeface="Cambria"/>
               </a:rPr>
@@ -4397,8 +4468,8 @@
         </p:nvSpPr>
         <p:spPr>
           <a:xfrm>
-            <a:off x="640080" y="3794760"/>
-            <a:ext cx="8412480" cy="457200"/>
+            <a:off x="640080" y="3840480"/>
+            <a:ext cx="8595360" cy="457200"/>
           </a:xfrm>
           <a:prstGeom prst="rect">
             <a:avLst/>
@@ -4415,7 +4486,7 @@
             <a:r>
               <a:rPr sz="1700" b="0" i="0">
                 <a:solidFill>
-                  <a:srgbClr val="AAB0B8"/>
+                  <a:srgbClr val="44515F"/>
                 </a:solidFill>
                 <a:latin typeface="Calibri"/>
               </a:rPr>
@@ -4432,14 +4503,14 @@
         </p:nvSpPr>
         <p:spPr>
           <a:xfrm>
-            <a:off x="640080" y="4572000"/>
-            <a:ext cx="1371600" cy="36576"/>
+            <a:off x="640080" y="4617720"/>
+            <a:ext cx="1371600" cy="41148"/>
           </a:xfrm>
           <a:prstGeom prst="rect">
             <a:avLst/>
           </a:prstGeom>
           <a:solidFill>
-            <a:srgbClr val="E8562A"/>
+            <a:srgbClr val="C2410C"/>
           </a:solidFill>
           <a:ln>
             <a:noFill/>
@@ -4476,8 +4547,8 @@
         </p:nvSpPr>
         <p:spPr>
           <a:xfrm>
-            <a:off x="640080" y="4828032"/>
-            <a:ext cx="8412480" cy="320040"/>
+            <a:off x="640080" y="4873752"/>
+            <a:ext cx="10424160" cy="320040"/>
           </a:xfrm>
           <a:prstGeom prst="rect">
             <a:avLst/>
@@ -4494,11 +4565,11 @@
             <a:r>
               <a:rPr sz="1300" b="0" i="0">
                 <a:solidFill>
-                  <a:srgbClr val="FF7A4D"/>
-                </a:solidFill>
-                <a:latin typeface="Calibri"/>
-              </a:rPr>
-              <a:t>101 text ads   ·   12 brands   ·   listed 12 August 2026</a:t>
+                  <a:srgbClr val="C2410C"/>
+                </a:solidFill>
+                <a:latin typeface="Calibri"/>
+              </a:rPr>
+              <a:t>101 text ads   ·   12 brands   ·   listed 12 August 2026   ·   replicated on a second 1,786-ad set</a:t>
             </a:r>
           </a:p>
         </p:txBody>
@@ -4511,7 +4582,7 @@
         </p:nvSpPr>
         <p:spPr>
           <a:xfrm>
-            <a:off x="640080" y="5623560"/>
+            <a:off x="640080" y="5669280"/>
             <a:ext cx="5486400" cy="274320"/>
           </a:xfrm>
           <a:prstGeom prst="rect">
@@ -4529,7 +4600,7 @@
             <a:r>
               <a:rPr sz="1400" b="1" i="0">
                 <a:solidFill>
-                  <a:srgbClr val="FFFFFF"/>
+                  <a:srgbClr val="1F2933"/>
                 </a:solidFill>
                 <a:latin typeface="Calibri"/>
               </a:rPr>
@@ -4546,7 +4617,7 @@
         </p:nvSpPr>
         <p:spPr>
           <a:xfrm>
-            <a:off x="640080" y="5943600"/>
+            <a:off x="640080" y="5989320"/>
             <a:ext cx="10515600" cy="274320"/>
           </a:xfrm>
           <a:prstGeom prst="rect">
@@ -4564,11 +4635,276 @@
             <a:r>
               <a:rPr sz="1150" b="0" i="0">
                 <a:solidFill>
-                  <a:srgbClr val="8A9099"/>
+                  <a:srgbClr val="697482"/>
                 </a:solidFill>
                 <a:latin typeface="Calibri"/>
               </a:rPr>
               <a:t>with Andrew Silver, Catherine Chambers, Jessica Smith, Jesse Padilla and William Levine</a:t>
+            </a:r>
+          </a:p>
+        </p:txBody>
+      </p:sp>
+    </p:spTree>
+  </p:cSld>
+  <p:clrMapOvr>
+    <a:masterClrMapping/>
+  </p:clrMapOvr>
+</p:sld>
+</file>
+
+<file path=ppt/slides/slide10.xml><?xml version="1.0" encoding="utf-8"?>
+<p:sld xmlns:a="http://schemas.openxmlformats.org/drawingml/2006/main" xmlns:p="http://schemas.openxmlformats.org/presentationml/2006/main" xmlns:r="http://schemas.openxmlformats.org/officeDocument/2006/relationships">
+  <p:cSld>
+    <p:bg>
+      <p:bgPr>
+        <a:solidFill>
+          <a:srgbClr val="ECF1F6"/>
+        </a:solidFill>
+        <a:effectLst/>
+      </p:bgPr>
+    </p:bg>
+    <p:spTree>
+      <p:nvGrpSpPr>
+        <p:cNvPr id="1" name=""/>
+        <p:cNvGrpSpPr/>
+        <p:nvPr/>
+      </p:nvGrpSpPr>
+      <p:grpSpPr/>
+      <p:sp>
+        <p:nvSpPr>
+          <p:cNvPr id="2" name="TextBox 1"/>
+          <p:cNvSpPr txBox="1"/>
+          <p:nvPr/>
+        </p:nvSpPr>
+        <p:spPr>
+          <a:xfrm>
+            <a:off x="640080" y="1828800"/>
+            <a:ext cx="10607040" cy="1920240"/>
+          </a:xfrm>
+          <a:prstGeom prst="rect">
+            <a:avLst/>
+          </a:prstGeom>
+          <a:noFill/>
+        </p:spPr>
+        <p:txBody>
+          <a:bodyPr wrap="square" lIns="0" rIns="0" tIns="0" bIns="0" anchor="t">
+            <a:spAutoFit/>
+          </a:bodyPr>
+          <a:lstStyle/>
+          <a:p>
+            <a:pPr algn="l">
+              <a:lnSpc>
+                <a:spcPts val="4600"/>
+              </a:lnSpc>
+            </a:pPr>
+            <a:r>
+              <a:rPr sz="3800" b="1" i="0">
+                <a:solidFill>
+                  <a:srgbClr val="1F2933"/>
+                </a:solidFill>
+                <a:latin typeface="Cambria"/>
+              </a:rPr>
+              <a:t>Everyone is selling the same fabric.</a:t>
+            </a:r>
+          </a:p>
+          <a:p>
+            <a:pPr algn="l">
+              <a:lnSpc>
+                <a:spcPts val="4600"/>
+              </a:lnSpc>
+            </a:pPr>
+            <a:r>
+              <a:rPr sz="3800" b="1" i="0">
+                <a:solidFill>
+                  <a:srgbClr val="1F2933"/>
+                </a:solidFill>
+                <a:latin typeface="Cambria"/>
+              </a:rPr>
+              <a:t>Nobody is selling belonging with proof.</a:t>
+            </a:r>
+          </a:p>
+        </p:txBody>
+      </p:sp>
+      <p:sp>
+        <p:nvSpPr>
+          <p:cNvPr id="3" name="Rectangle 2"/>
+          <p:cNvSpPr/>
+          <p:nvPr/>
+        </p:nvSpPr>
+        <p:spPr>
+          <a:xfrm>
+            <a:off x="640080" y="3886200"/>
+            <a:ext cx="1371600" cy="41148"/>
+          </a:xfrm>
+          <a:prstGeom prst="rect">
+            <a:avLst/>
+          </a:prstGeom>
+          <a:solidFill>
+            <a:srgbClr val="C2410C"/>
+          </a:solidFill>
+          <a:ln>
+            <a:noFill/>
+          </a:ln>
+          <a:effectLst/>
+        </p:spPr>
+        <p:style>
+          <a:lnRef idx="1">
+            <a:schemeClr val="accent1"/>
+          </a:lnRef>
+          <a:fillRef idx="3">
+            <a:schemeClr val="accent1"/>
+          </a:fillRef>
+          <a:effectRef idx="2">
+            <a:schemeClr val="accent1"/>
+          </a:effectRef>
+          <a:fontRef idx="minor">
+            <a:schemeClr val="lt1"/>
+          </a:fontRef>
+        </p:style>
+        <p:txBody>
+          <a:bodyPr rtlCol="0" anchor="ctr"/>
+          <a:lstStyle/>
+          <a:p>
+            <a:pPr algn="ctr"/>
+          </a:p>
+        </p:txBody>
+      </p:sp>
+      <p:sp>
+        <p:nvSpPr>
+          <p:cNvPr id="4" name="TextBox 3"/>
+          <p:cNvSpPr txBox="1"/>
+          <p:nvPr/>
+        </p:nvSpPr>
+        <p:spPr>
+          <a:xfrm>
+            <a:off x="640080" y="4160520"/>
+            <a:ext cx="7315200" cy="457200"/>
+          </a:xfrm>
+          <a:prstGeom prst="rect">
+            <a:avLst/>
+          </a:prstGeom>
+          <a:noFill/>
+        </p:spPr>
+        <p:txBody>
+          <a:bodyPr wrap="square" lIns="0" rIns="0" tIns="0" bIns="0" anchor="t">
+            <a:spAutoFit/>
+          </a:bodyPr>
+          <a:lstStyle/>
+          <a:p>
+            <a:pPr algn="l"/>
+            <a:r>
+              <a:rPr sz="2000" b="1" i="0">
+                <a:solidFill>
+                  <a:srgbClr val="C2410C"/>
+                </a:solidFill>
+                <a:latin typeface="Calibri"/>
+              </a:rPr>
+              <a:t>That is the lane.</a:t>
+            </a:r>
+          </a:p>
+        </p:txBody>
+      </p:sp>
+      <p:sp>
+        <p:nvSpPr>
+          <p:cNvPr id="5" name="TextBox 4"/>
+          <p:cNvSpPr txBox="1"/>
+          <p:nvPr/>
+        </p:nvSpPr>
+        <p:spPr>
+          <a:xfrm>
+            <a:off x="640080" y="5120640"/>
+            <a:ext cx="8229600" cy="274320"/>
+          </a:xfrm>
+          <a:prstGeom prst="rect">
+            <a:avLst/>
+          </a:prstGeom>
+          <a:noFill/>
+        </p:spPr>
+        <p:txBody>
+          <a:bodyPr wrap="square" lIns="0" rIns="0" tIns="0" bIns="0" anchor="t">
+            <a:spAutoFit/>
+          </a:bodyPr>
+          <a:lstStyle/>
+          <a:p>
+            <a:pPr algn="l"/>
+            <a:r>
+              <a:rPr sz="1200" b="0" i="0">
+                <a:solidFill>
+                  <a:srgbClr val="697482"/>
+                </a:solidFill>
+                <a:latin typeface="Calibri"/>
+              </a:rPr>
+              <a:t>Workbook, data, tagging and full write-up:</a:t>
+            </a:r>
+          </a:p>
+        </p:txBody>
+      </p:sp>
+      <p:sp>
+        <p:nvSpPr>
+          <p:cNvPr id="6" name="TextBox 5"/>
+          <p:cNvSpPr txBox="1"/>
+          <p:nvPr/>
+        </p:nvSpPr>
+        <p:spPr>
+          <a:xfrm>
+            <a:off x="640080" y="5413248"/>
+            <a:ext cx="8686800" cy="320040"/>
+          </a:xfrm>
+          <a:prstGeom prst="rect">
+            <a:avLst/>
+          </a:prstGeom>
+          <a:noFill/>
+        </p:spPr>
+        <p:txBody>
+          <a:bodyPr wrap="square" lIns="0" rIns="0" tIns="0" bIns="0" anchor="t">
+            <a:spAutoFit/>
+          </a:bodyPr>
+          <a:lstStyle/>
+          <a:p>
+            <a:pPr algn="l"/>
+            <a:r>
+              <a:rPr sz="1400" b="1" i="0">
+                <a:solidFill>
+                  <a:srgbClr val="1F2933"/>
+                </a:solidFill>
+                <a:latin typeface="Calibri"/>
+              </a:rPr>
+              <a:t>github.com/spdooley5949/Creative-Teardown-Marketing</a:t>
+            </a:r>
+          </a:p>
+        </p:txBody>
+      </p:sp>
+      <p:sp>
+        <p:nvSpPr>
+          <p:cNvPr id="7" name="TextBox 6"/>
+          <p:cNvSpPr txBox="1"/>
+          <p:nvPr/>
+        </p:nvSpPr>
+        <p:spPr>
+          <a:xfrm>
+            <a:off x="640080" y="6053328"/>
+            <a:ext cx="10607040" cy="274320"/>
+          </a:xfrm>
+          <a:prstGeom prst="rect">
+            <a:avLst/>
+          </a:prstGeom>
+          <a:noFill/>
+        </p:spPr>
+        <p:txBody>
+          <a:bodyPr wrap="square" lIns="0" rIns="0" tIns="0" bIns="0" anchor="t">
+            <a:spAutoFit/>
+          </a:bodyPr>
+          <a:lstStyle/>
+          <a:p>
+            <a:pPr algn="l"/>
+            <a:r>
+              <a:rPr sz="1100" b="0" i="0">
+                <a:solidFill>
+                  <a:srgbClr val="697482"/>
+                </a:solidFill>
+                <a:latin typeface="Calibri"/>
+              </a:rPr>
+              <a:t>Shane Dooley   ·   with Andrew Silver, Catherine Chambers, Jessica Smith, Jesse Padilla and William Levine</a:t>
             </a:r>
           </a:p>
         </p:txBody>
@@ -4625,7 +4961,7 @@
             <a:r>
               <a:rPr sz="1100" b="1" i="0">
                 <a:solidFill>
-                  <a:srgbClr val="E8562A"/>
+                  <a:srgbClr val="C2410C"/>
                 </a:solidFill>
                 <a:latin typeface="Calibri"/>
               </a:rPr>
@@ -4660,7 +4996,7 @@
             <a:r>
               <a:rPr sz="3600" b="1" i="0">
                 <a:solidFill>
-                  <a:srgbClr val="14181C"/>
+                  <a:srgbClr val="1F2933"/>
                 </a:solidFill>
                 <a:latin typeface="Cambria"/>
               </a:rPr>
@@ -4684,7 +5020,7 @@
             <a:avLst/>
           </a:prstGeom>
           <a:solidFill>
-            <a:srgbClr val="F2F3F5"/>
+            <a:srgbClr val="F4F6F8"/>
           </a:solidFill>
           <a:ln>
             <a:noFill/>
@@ -4739,7 +5075,7 @@
             <a:r>
               <a:rPr sz="5200" b="1" i="0">
                 <a:solidFill>
-                  <a:srgbClr val="14181C"/>
+                  <a:srgbClr val="1F2933"/>
                 </a:solidFill>
                 <a:latin typeface="Cambria"/>
               </a:rPr>
@@ -4774,7 +5110,7 @@
             <a:r>
               <a:rPr sz="1300" b="0" i="0">
                 <a:solidFill>
-                  <a:srgbClr val="6B7280"/>
+                  <a:srgbClr val="44515F"/>
                 </a:solidFill>
                 <a:latin typeface="Calibri"/>
               </a:rPr>
@@ -4786,7 +5122,7 @@
             <a:r>
               <a:rPr sz="1300" b="0" i="0">
                 <a:solidFill>
-                  <a:srgbClr val="6B7280"/>
+                  <a:srgbClr val="44515F"/>
                 </a:solidFill>
                 <a:latin typeface="Calibri"/>
               </a:rPr>
@@ -4810,7 +5146,7 @@
             <a:avLst/>
           </a:prstGeom>
           <a:solidFill>
-            <a:srgbClr val="F2F3F5"/>
+            <a:srgbClr val="F4F6F8"/>
           </a:solidFill>
           <a:ln>
             <a:noFill/>
@@ -4865,7 +5201,7 @@
             <a:r>
               <a:rPr sz="5200" b="1" i="0">
                 <a:solidFill>
-                  <a:srgbClr val="14181C"/>
+                  <a:srgbClr val="1F2933"/>
                 </a:solidFill>
                 <a:latin typeface="Cambria"/>
               </a:rPr>
@@ -4900,7 +5236,7 @@
             <a:r>
               <a:rPr sz="1300" b="0" i="0">
                 <a:solidFill>
-                  <a:srgbClr val="6B7280"/>
+                  <a:srgbClr val="44515F"/>
                 </a:solidFill>
                 <a:latin typeface="Calibri"/>
               </a:rPr>
@@ -4924,7 +5260,7 @@
             <a:avLst/>
           </a:prstGeom>
           <a:solidFill>
-            <a:srgbClr val="F2F3F5"/>
+            <a:srgbClr val="F4F6F8"/>
           </a:solidFill>
           <a:ln>
             <a:noFill/>
@@ -4979,7 +5315,7 @@
             <a:r>
               <a:rPr sz="5200" b="1" i="0">
                 <a:solidFill>
-                  <a:srgbClr val="14181C"/>
+                  <a:srgbClr val="1F2933"/>
                 </a:solidFill>
                 <a:latin typeface="Cambria"/>
               </a:rPr>
@@ -5014,7 +5350,7 @@
             <a:r>
               <a:rPr sz="1300" b="0" i="0">
                 <a:solidFill>
-                  <a:srgbClr val="6B7280"/>
+                  <a:srgbClr val="44515F"/>
                 </a:solidFill>
                 <a:latin typeface="Calibri"/>
               </a:rPr>
@@ -5026,7 +5362,7 @@
             <a:r>
               <a:rPr sz="1300" b="0" i="0">
                 <a:solidFill>
-                  <a:srgbClr val="6B7280"/>
+                  <a:srgbClr val="44515F"/>
                 </a:solidFill>
                 <a:latin typeface="Calibri"/>
               </a:rPr>
@@ -5050,7 +5386,7 @@
             <a:avLst/>
           </a:prstGeom>
           <a:solidFill>
-            <a:srgbClr val="FDEEE8"/>
+            <a:srgbClr val="FDECE2"/>
           </a:solidFill>
           <a:ln>
             <a:noFill/>
@@ -5105,7 +5441,7 @@
             <a:r>
               <a:rPr sz="5200" b="1" i="0">
                 <a:solidFill>
-                  <a:srgbClr val="E8562A"/>
+                  <a:srgbClr val="C2410C"/>
                 </a:solidFill>
                 <a:latin typeface="Cambria"/>
               </a:rPr>
@@ -5140,7 +5476,7 @@
             <a:r>
               <a:rPr sz="1300" b="0" i="0">
                 <a:solidFill>
-                  <a:srgbClr val="E8562A"/>
+                  <a:srgbClr val="C2410C"/>
                 </a:solidFill>
                 <a:latin typeface="Calibri"/>
               </a:rPr>
@@ -5152,7 +5488,7 @@
             <a:r>
               <a:rPr sz="1300" b="0" i="0">
                 <a:solidFill>
-                  <a:srgbClr val="E8562A"/>
+                  <a:srgbClr val="C2410C"/>
                 </a:solidFill>
                 <a:latin typeface="Calibri"/>
               </a:rPr>
@@ -5187,7 +5523,7 @@
             <a:r>
               <a:rPr sz="1500" b="0" i="0">
                 <a:solidFill>
-                  <a:srgbClr val="14181C"/>
+                  <a:srgbClr val="44515F"/>
                 </a:solidFill>
                 <a:latin typeface="Calibri"/>
               </a:rPr>
@@ -5222,7 +5558,7 @@
             <a:r>
               <a:rPr sz="1500" b="1" i="0">
                 <a:solidFill>
-                  <a:srgbClr val="E8562A"/>
+                  <a:srgbClr val="C2410C"/>
                 </a:solidFill>
                 <a:latin typeface="Calibri"/>
               </a:rPr>
@@ -5283,7 +5619,7 @@
             <a:r>
               <a:rPr sz="1100" b="1" i="0">
                 <a:solidFill>
-                  <a:srgbClr val="E8562A"/>
+                  <a:srgbClr val="C2410C"/>
                 </a:solidFill>
                 <a:latin typeface="Calibri"/>
               </a:rPr>
@@ -5318,7 +5654,7 @@
             <a:r>
               <a:rPr sz="3600" b="1" i="0">
                 <a:solidFill>
-                  <a:srgbClr val="14181C"/>
+                  <a:srgbClr val="1F2933"/>
                 </a:solidFill>
                 <a:latin typeface="Cambria"/>
               </a:rPr>
@@ -5342,7 +5678,7 @@
             <a:avLst/>
           </a:prstGeom>
           <a:solidFill>
-            <a:srgbClr val="14181C"/>
+            <a:srgbClr val="1F2933"/>
           </a:solidFill>
           <a:ln>
             <a:noFill/>
@@ -5432,7 +5768,7 @@
             <a:r>
               <a:rPr sz="1600" b="1" i="0">
                 <a:solidFill>
-                  <a:srgbClr val="14181C"/>
+                  <a:srgbClr val="1F2933"/>
                 </a:solidFill>
                 <a:latin typeface="Calibri"/>
               </a:rPr>
@@ -5467,7 +5803,7 @@
             <a:r>
               <a:rPr sz="1300" b="0" i="0">
                 <a:solidFill>
-                  <a:srgbClr val="6B7280"/>
+                  <a:srgbClr val="44515F"/>
                 </a:solidFill>
                 <a:latin typeface="Calibri"/>
               </a:rPr>
@@ -5491,7 +5827,7 @@
             <a:avLst/>
           </a:prstGeom>
           <a:solidFill>
-            <a:srgbClr val="14181C"/>
+            <a:srgbClr val="1F2933"/>
           </a:solidFill>
           <a:ln>
             <a:noFill/>
@@ -5581,7 +5917,7 @@
             <a:r>
               <a:rPr sz="1600" b="1" i="0">
                 <a:solidFill>
-                  <a:srgbClr val="14181C"/>
+                  <a:srgbClr val="1F2933"/>
                 </a:solidFill>
                 <a:latin typeface="Calibri"/>
               </a:rPr>
@@ -5616,7 +5952,7 @@
             <a:r>
               <a:rPr sz="1300" b="0" i="0">
                 <a:solidFill>
-                  <a:srgbClr val="6B7280"/>
+                  <a:srgbClr val="44515F"/>
                 </a:solidFill>
                 <a:latin typeface="Calibri"/>
               </a:rPr>
@@ -5640,7 +5976,7 @@
             <a:avLst/>
           </a:prstGeom>
           <a:solidFill>
-            <a:srgbClr val="14181C"/>
+            <a:srgbClr val="1F2933"/>
           </a:solidFill>
           <a:ln>
             <a:noFill/>
@@ -5730,7 +6066,7 @@
             <a:r>
               <a:rPr sz="1600" b="1" i="0">
                 <a:solidFill>
-                  <a:srgbClr val="14181C"/>
+                  <a:srgbClr val="1F2933"/>
                 </a:solidFill>
                 <a:latin typeface="Calibri"/>
               </a:rPr>
@@ -5765,7 +6101,7 @@
             <a:r>
               <a:rPr sz="1300" b="0" i="0">
                 <a:solidFill>
-                  <a:srgbClr val="6B7280"/>
+                  <a:srgbClr val="44515F"/>
                 </a:solidFill>
                 <a:latin typeface="Calibri"/>
               </a:rPr>
@@ -5789,7 +6125,7 @@
             <a:avLst/>
           </a:prstGeom>
           <a:solidFill>
-            <a:srgbClr val="F2F3F5"/>
+            <a:srgbClr val="F4F6F8"/>
           </a:solidFill>
           <a:ln>
             <a:noFill/>
@@ -5844,7 +6180,7 @@
             <a:r>
               <a:rPr sz="1100" b="0" i="0">
                 <a:solidFill>
-                  <a:srgbClr val="6B7280"/>
+                  <a:srgbClr val="697482"/>
                 </a:solidFill>
                 <a:latin typeface="Calibri"/>
               </a:rPr>
@@ -5905,7 +6241,7 @@
             <a:r>
               <a:rPr sz="1100" b="1" i="0">
                 <a:solidFill>
-                  <a:srgbClr val="E8562A"/>
+                  <a:srgbClr val="C2410C"/>
                 </a:solidFill>
                 <a:latin typeface="Calibri"/>
               </a:rPr>
@@ -5940,7 +6276,7 @@
             <a:r>
               <a:rPr sz="3600" b="1" i="0">
                 <a:solidFill>
-                  <a:srgbClr val="14181C"/>
+                  <a:srgbClr val="1F2933"/>
                 </a:solidFill>
                 <a:latin typeface="Cambria"/>
               </a:rPr>
@@ -5993,7 +6329,7 @@
             <a:r>
               <a:rPr sz="1100" b="0" i="0">
                 <a:solidFill>
-                  <a:srgbClr val="6B7280"/>
+                  <a:srgbClr val="697482"/>
                 </a:solidFill>
                 <a:latin typeface="Calibri"/>
               </a:rPr>
@@ -6054,11 +6390,11 @@
             <a:r>
               <a:rPr sz="1100" b="1" i="0">
                 <a:solidFill>
-                  <a:srgbClr val="E8562A"/>
-                </a:solidFill>
-                <a:latin typeface="Calibri"/>
-              </a:rPr>
-              <a:t>THE SECOND FINDING</a:t>
+                  <a:srgbClr val="C2410C"/>
+                </a:solidFill>
+                <a:latin typeface="Calibri"/>
+              </a:rPr>
+              <a:t>INDEPENDENT CHECK</a:t>
             </a:r>
           </a:p>
         </p:txBody>
@@ -6089,31 +6425,241 @@
             <a:r>
               <a:rPr sz="3600" b="1" i="0">
                 <a:solidFill>
-                  <a:srgbClr val="14181C"/>
+                  <a:srgbClr val="1F2933"/>
                 </a:solidFill>
                 <a:latin typeface="Cambria"/>
               </a:rPr>
-              <a:t>Six in ten ads make a claim and prove nothing</a:t>
-            </a:r>
-          </a:p>
-        </p:txBody>
-      </p:sp>
-      <p:sp>
-        <p:nvSpPr>
-          <p:cNvPr id="4" name="Rectangle 3"/>
+              <a:t>The finding holds on data we did not collect</a:t>
+            </a:r>
+          </a:p>
+        </p:txBody>
+      </p:sp>
+      <p:sp>
+        <p:nvSpPr>
+          <p:cNvPr id="4" name="TextBox 3"/>
+          <p:cNvSpPr txBox="1"/>
+          <p:nvPr/>
+        </p:nvSpPr>
+        <p:spPr>
+          <a:xfrm>
+            <a:off x="640080" y="1938528"/>
+            <a:ext cx="10607040" cy="640080"/>
+          </a:xfrm>
+          <a:prstGeom prst="rect">
+            <a:avLst/>
+          </a:prstGeom>
+          <a:noFill/>
+        </p:spPr>
+        <p:txBody>
+          <a:bodyPr wrap="square" lIns="0" rIns="0" tIns="0" bIns="0" anchor="t">
+            <a:spAutoFit/>
+          </a:bodyPr>
+          <a:lstStyle/>
+          <a:p>
+            <a:pPr algn="l"/>
+            <a:r>
+              <a:rPr sz="1400" b="0" i="0">
+                <a:solidFill>
+                  <a:srgbClr val="44515F"/>
+                </a:solidFill>
+                <a:latin typeface="Calibri"/>
+              </a:rPr>
+              <a:t>A teammate contributed 1,786 ads across eight brands, 2021 to 2026, gathered a different way. Four brands appear in both sets. Neither collector saw the other’s work.</a:t>
+            </a:r>
+          </a:p>
+        </p:txBody>
+      </p:sp>
+      <p:sp>
+        <p:nvSpPr>
+          <p:cNvPr id="5" name="TextBox 4"/>
+          <p:cNvSpPr txBox="1"/>
+          <p:nvPr/>
+        </p:nvSpPr>
+        <p:spPr>
+          <a:xfrm>
+            <a:off x="640080" y="2788920"/>
+            <a:ext cx="1920240" cy="274320"/>
+          </a:xfrm>
+          <a:prstGeom prst="rect">
+            <a:avLst/>
+          </a:prstGeom>
+          <a:noFill/>
+        </p:spPr>
+        <p:txBody>
+          <a:bodyPr wrap="square" lIns="0" rIns="0" tIns="0" bIns="0" anchor="t">
+            <a:spAutoFit/>
+          </a:bodyPr>
+          <a:lstStyle/>
+          <a:p>
+            <a:pPr algn="l"/>
+            <a:r>
+              <a:rPr sz="1000" b="1" i="0">
+                <a:solidFill>
+                  <a:srgbClr val="697482"/>
+                </a:solidFill>
+                <a:latin typeface="Calibri"/>
+              </a:rPr>
+              <a:t>BRAND</a:t>
+            </a:r>
+          </a:p>
+        </p:txBody>
+      </p:sp>
+      <p:sp>
+        <p:nvSpPr>
+          <p:cNvPr id="6" name="TextBox 5"/>
+          <p:cNvSpPr txBox="1"/>
+          <p:nvPr/>
+        </p:nvSpPr>
+        <p:spPr>
+          <a:xfrm>
+            <a:off x="3931920" y="2788920"/>
+            <a:ext cx="1920240" cy="274320"/>
+          </a:xfrm>
+          <a:prstGeom prst="rect">
+            <a:avLst/>
+          </a:prstGeom>
+          <a:noFill/>
+        </p:spPr>
+        <p:txBody>
+          <a:bodyPr wrap="square" lIns="0" rIns="0" tIns="0" bIns="0" anchor="t">
+            <a:spAutoFit/>
+          </a:bodyPr>
+          <a:lstStyle/>
+          <a:p>
+            <a:pPr algn="l"/>
+            <a:r>
+              <a:rPr sz="1000" b="1" i="0">
+                <a:solidFill>
+                  <a:srgbClr val="697482"/>
+                </a:solidFill>
+                <a:latin typeface="Calibri"/>
+              </a:rPr>
+              <a:t>ADS, BY HAND</a:t>
+            </a:r>
+          </a:p>
+        </p:txBody>
+      </p:sp>
+      <p:sp>
+        <p:nvSpPr>
+          <p:cNvPr id="7" name="TextBox 6"/>
+          <p:cNvSpPr txBox="1"/>
+          <p:nvPr/>
+        </p:nvSpPr>
+        <p:spPr>
+          <a:xfrm>
+            <a:off x="5943600" y="2788920"/>
+            <a:ext cx="1920240" cy="274320"/>
+          </a:xfrm>
+          <a:prstGeom prst="rect">
+            <a:avLst/>
+          </a:prstGeom>
+          <a:noFill/>
+        </p:spPr>
+        <p:txBody>
+          <a:bodyPr wrap="square" lIns="0" rIns="0" tIns="0" bIns="0" anchor="t">
+            <a:spAutoFit/>
+          </a:bodyPr>
+          <a:lstStyle/>
+          <a:p>
+            <a:pPr algn="l"/>
+            <a:r>
+              <a:rPr sz="1000" b="1" i="0">
+                <a:solidFill>
+                  <a:srgbClr val="697482"/>
+                </a:solidFill>
+                <a:latin typeface="Calibri"/>
+              </a:rPr>
+              <a:t>ADS, HARVESTED</a:t>
+            </a:r>
+          </a:p>
+        </p:txBody>
+      </p:sp>
+      <p:sp>
+        <p:nvSpPr>
+          <p:cNvPr id="8" name="TextBox 7"/>
+          <p:cNvSpPr txBox="1"/>
+          <p:nvPr/>
+        </p:nvSpPr>
+        <p:spPr>
+          <a:xfrm>
+            <a:off x="7955279" y="2788920"/>
+            <a:ext cx="1920240" cy="274320"/>
+          </a:xfrm>
+          <a:prstGeom prst="rect">
+            <a:avLst/>
+          </a:prstGeom>
+          <a:noFill/>
+        </p:spPr>
+        <p:txBody>
+          <a:bodyPr wrap="square" lIns="0" rIns="0" tIns="0" bIns="0" anchor="t">
+            <a:spAutoFit/>
+          </a:bodyPr>
+          <a:lstStyle/>
+          <a:p>
+            <a:pPr algn="l"/>
+            <a:r>
+              <a:rPr sz="1000" b="1" i="0">
+                <a:solidFill>
+                  <a:srgbClr val="697482"/>
+                </a:solidFill>
+                <a:latin typeface="Calibri"/>
+              </a:rPr>
+              <a:t>GAP, ALL THEMES</a:t>
+            </a:r>
+          </a:p>
+        </p:txBody>
+      </p:sp>
+      <p:sp>
+        <p:nvSpPr>
+          <p:cNvPr id="9" name="TextBox 8"/>
+          <p:cNvSpPr txBox="1"/>
+          <p:nvPr/>
+        </p:nvSpPr>
+        <p:spPr>
+          <a:xfrm>
+            <a:off x="10058400" y="2788920"/>
+            <a:ext cx="1920240" cy="274320"/>
+          </a:xfrm>
+          <a:prstGeom prst="rect">
+            <a:avLst/>
+          </a:prstGeom>
+          <a:noFill/>
+        </p:spPr>
+        <p:txBody>
+          <a:bodyPr wrap="square" lIns="0" rIns="0" tIns="0" bIns="0" anchor="t">
+            <a:spAutoFit/>
+          </a:bodyPr>
+          <a:lstStyle/>
+          <a:p>
+            <a:pPr algn="l"/>
+            <a:r>
+              <a:rPr sz="1000" b="1" i="0">
+                <a:solidFill>
+                  <a:srgbClr val="C2410C"/>
+                </a:solidFill>
+                <a:latin typeface="Calibri"/>
+              </a:rPr>
+              <a:t>COMMUNITY</a:t>
+            </a:r>
+          </a:p>
+        </p:txBody>
+      </p:sp>
+      <p:sp>
+        <p:nvSpPr>
+          <p:cNvPr id="10" name="Rectangle 9"/>
           <p:cNvSpPr/>
           <p:nvPr/>
         </p:nvSpPr>
         <p:spPr>
           <a:xfrm>
-            <a:off x="640080" y="2103120"/>
-            <a:ext cx="5029200" cy="2697480"/>
+            <a:off x="640080" y="3090672"/>
+            <a:ext cx="10911535" cy="10972"/>
           </a:xfrm>
           <a:prstGeom prst="rect">
             <a:avLst/>
           </a:prstGeom>
           <a:solidFill>
-            <a:srgbClr val="F2F3F5"/>
+            <a:srgbClr val="D5DDE4"/>
           </a:solidFill>
           <a:ln>
             <a:noFill/>
@@ -6144,119 +6690,49 @@
       </p:sp>
       <p:sp>
         <p:nvSpPr>
-          <p:cNvPr id="5" name="TextBox 4"/>
-          <p:cNvSpPr txBox="1"/>
-          <p:nvPr/>
-        </p:nvSpPr>
-        <p:spPr>
-          <a:xfrm>
-            <a:off x="1005840" y="2331720"/>
-            <a:ext cx="4297680" cy="1280160"/>
-          </a:xfrm>
-          <a:prstGeom prst="rect">
-            <a:avLst/>
-          </a:prstGeom>
-          <a:noFill/>
-        </p:spPr>
-        <p:txBody>
-          <a:bodyPr wrap="square" lIns="0" rIns="0" tIns="0" bIns="0" anchor="t">
-            <a:spAutoFit/>
-          </a:bodyPr>
-          <a:lstStyle/>
-          <a:p>
-            <a:pPr algn="l"/>
-            <a:r>
-              <a:rPr sz="7200" b="1" i="0">
-                <a:solidFill>
-                  <a:srgbClr val="E8562A"/>
-                </a:solidFill>
-                <a:latin typeface="Cambria"/>
-              </a:rPr>
-              <a:t>61%</a:t>
-            </a:r>
-          </a:p>
-        </p:txBody>
-      </p:sp>
-      <p:sp>
-        <p:nvSpPr>
-          <p:cNvPr id="6" name="TextBox 5"/>
-          <p:cNvSpPr txBox="1"/>
-          <p:nvPr/>
-        </p:nvSpPr>
-        <p:spPr>
-          <a:xfrm>
-            <a:off x="1005840" y="3611880"/>
-            <a:ext cx="4297680" cy="914400"/>
-          </a:xfrm>
-          <a:prstGeom prst="rect">
-            <a:avLst/>
-          </a:prstGeom>
-          <a:noFill/>
-        </p:spPr>
-        <p:txBody>
-          <a:bodyPr wrap="square" lIns="0" rIns="0" tIns="0" bIns="0" anchor="t">
-            <a:spAutoFit/>
-          </a:bodyPr>
-          <a:lstStyle/>
-          <a:p>
-            <a:pPr algn="l"/>
-            <a:r>
-              <a:rPr sz="1500" b="0" i="0">
-                <a:solidFill>
-                  <a:srgbClr val="14181C"/>
-                </a:solidFill>
-                <a:latin typeface="Calibri"/>
-              </a:rPr>
-              <a:t>of ads cite no rating, guarantee, statistic or offer of any kind</a:t>
-            </a:r>
-          </a:p>
-        </p:txBody>
-      </p:sp>
-      <p:sp>
-        <p:nvSpPr>
-          <p:cNvPr id="7" name="TextBox 6"/>
-          <p:cNvSpPr txBox="1"/>
-          <p:nvPr/>
-        </p:nvSpPr>
-        <p:spPr>
-          <a:xfrm>
-            <a:off x="6400800" y="2103120"/>
-            <a:ext cx="5120640" cy="365760"/>
-          </a:xfrm>
-          <a:prstGeom prst="rect">
-            <a:avLst/>
-          </a:prstGeom>
-          <a:noFill/>
-        </p:spPr>
-        <p:txBody>
-          <a:bodyPr wrap="square" lIns="0" rIns="0" tIns="0" bIns="0" anchor="t">
-            <a:spAutoFit/>
-          </a:bodyPr>
-          <a:lstStyle/>
-          <a:p>
-            <a:pPr algn="l"/>
-            <a:r>
-              <a:rPr sz="1500" b="1" i="0">
-                <a:solidFill>
-                  <a:srgbClr val="14181C"/>
-                </a:solidFill>
-                <a:latin typeface="Calibri"/>
-              </a:rPr>
-              <a:t>Where proof does appear, it is wildly uneven</a:t>
-            </a:r>
-          </a:p>
-        </p:txBody>
-      </p:sp>
-      <p:sp>
-        <p:nvSpPr>
-          <p:cNvPr id="8" name="TextBox 7"/>
-          <p:cNvSpPr txBox="1"/>
-          <p:nvPr/>
-        </p:nvSpPr>
-        <p:spPr>
-          <a:xfrm>
-            <a:off x="6400800" y="2606040"/>
-            <a:ext cx="2468880" cy="292608"/>
+          <p:cNvPr id="11" name="TextBox 10"/>
+          <p:cNvSpPr txBox="1"/>
+          <p:nvPr/>
+        </p:nvSpPr>
+        <p:spPr>
+          <a:xfrm>
+            <a:off x="640080" y="3218688"/>
+            <a:ext cx="1920240" cy="320040"/>
+          </a:xfrm>
+          <a:prstGeom prst="rect">
+            <a:avLst/>
+          </a:prstGeom>
+          <a:noFill/>
+        </p:spPr>
+        <p:txBody>
+          <a:bodyPr wrap="square" lIns="0" rIns="0" tIns="0" bIns="0" anchor="t">
+            <a:spAutoFit/>
+          </a:bodyPr>
+          <a:lstStyle/>
+          <a:p>
+            <a:pPr algn="l"/>
+            <a:r>
+              <a:rPr sz="1300" b="1" i="0">
+                <a:solidFill>
+                  <a:srgbClr val="1F2933"/>
+                </a:solidFill>
+                <a:latin typeface="Calibri"/>
+              </a:rPr>
+              <a:t>lululemon</a:t>
+            </a:r>
+          </a:p>
+        </p:txBody>
+      </p:sp>
+      <p:sp>
+        <p:nvSpPr>
+          <p:cNvPr id="12" name="TextBox 11"/>
+          <p:cNvSpPr txBox="1"/>
+          <p:nvPr/>
+        </p:nvSpPr>
+        <p:spPr>
+          <a:xfrm>
+            <a:off x="3931920" y="3218688"/>
+            <a:ext cx="1920240" cy="320040"/>
           </a:xfrm>
           <a:prstGeom prst="rect">
             <a:avLst/>
@@ -6273,66 +6749,136 @@
             <a:r>
               <a:rPr sz="1300" b="0" i="0">
                 <a:solidFill>
-                  <a:srgbClr val="14181C"/>
-                </a:solidFill>
-                <a:latin typeface="Calibri"/>
-              </a:rPr>
-              <a:t>Alo Yoga</a:t>
-            </a:r>
-          </a:p>
-        </p:txBody>
-      </p:sp>
-      <p:sp>
-        <p:nvSpPr>
-          <p:cNvPr id="9" name="TextBox 8"/>
-          <p:cNvSpPr txBox="1"/>
-          <p:nvPr/>
-        </p:nvSpPr>
-        <p:spPr>
-          <a:xfrm>
-            <a:off x="8778240" y="2606040"/>
-            <a:ext cx="2743200" cy="292608"/>
-          </a:xfrm>
-          <a:prstGeom prst="rect">
-            <a:avLst/>
-          </a:prstGeom>
-          <a:noFill/>
-        </p:spPr>
-        <p:txBody>
-          <a:bodyPr wrap="square" lIns="0" rIns="0" tIns="0" bIns="0" anchor="t">
-            <a:spAutoFit/>
-          </a:bodyPr>
-          <a:lstStyle/>
-          <a:p>
-            <a:pPr algn="r"/>
+                  <a:srgbClr val="1F2933"/>
+                </a:solidFill>
+                <a:latin typeface="Calibri"/>
+              </a:rPr>
+              <a:t>18</a:t>
+            </a:r>
+          </a:p>
+        </p:txBody>
+      </p:sp>
+      <p:sp>
+        <p:nvSpPr>
+          <p:cNvPr id="13" name="TextBox 12"/>
+          <p:cNvSpPr txBox="1"/>
+          <p:nvPr/>
+        </p:nvSpPr>
+        <p:spPr>
+          <a:xfrm>
+            <a:off x="5943600" y="3218688"/>
+            <a:ext cx="1920240" cy="320040"/>
+          </a:xfrm>
+          <a:prstGeom prst="rect">
+            <a:avLst/>
+          </a:prstGeom>
+          <a:noFill/>
+        </p:spPr>
+        <p:txBody>
+          <a:bodyPr wrap="square" lIns="0" rIns="0" tIns="0" bIns="0" anchor="t">
+            <a:spAutoFit/>
+          </a:bodyPr>
+          <a:lstStyle/>
+          <a:p>
+            <a:pPr algn="l"/>
             <a:r>
               <a:rPr sz="1300" b="0" i="0">
                 <a:solidFill>
-                  <a:srgbClr val="6B7280"/>
-                </a:solidFill>
-                <a:latin typeface="Calibri"/>
-              </a:rPr>
-              <a:t>21,615 reviews</a:t>
-            </a:r>
-          </a:p>
-        </p:txBody>
-      </p:sp>
-      <p:sp>
-        <p:nvSpPr>
-          <p:cNvPr id="10" name="Rectangle 9"/>
+                  <a:srgbClr val="1F2933"/>
+                </a:solidFill>
+                <a:latin typeface="Calibri"/>
+              </a:rPr>
+              <a:t>244</a:t>
+            </a:r>
+          </a:p>
+        </p:txBody>
+      </p:sp>
+      <p:sp>
+        <p:nvSpPr>
+          <p:cNvPr id="14" name="TextBox 13"/>
+          <p:cNvSpPr txBox="1"/>
+          <p:nvPr/>
+        </p:nvSpPr>
+        <p:spPr>
+          <a:xfrm>
+            <a:off x="7955279" y="3218688"/>
+            <a:ext cx="1920240" cy="320040"/>
+          </a:xfrm>
+          <a:prstGeom prst="rect">
+            <a:avLst/>
+          </a:prstGeom>
+          <a:noFill/>
+        </p:spPr>
+        <p:txBody>
+          <a:bodyPr wrap="square" lIns="0" rIns="0" tIns="0" bIns="0" anchor="t">
+            <a:spAutoFit/>
+          </a:bodyPr>
+          <a:lstStyle/>
+          <a:p>
+            <a:pPr algn="l"/>
+            <a:r>
+              <a:rPr sz="1300" b="0" i="0">
+                <a:solidFill>
+                  <a:srgbClr val="1F2933"/>
+                </a:solidFill>
+                <a:latin typeface="Calibri"/>
+              </a:rPr>
+              <a:t>6 pts</a:t>
+            </a:r>
+          </a:p>
+        </p:txBody>
+      </p:sp>
+      <p:sp>
+        <p:nvSpPr>
+          <p:cNvPr id="15" name="TextBox 14"/>
+          <p:cNvSpPr txBox="1"/>
+          <p:nvPr/>
+        </p:nvSpPr>
+        <p:spPr>
+          <a:xfrm>
+            <a:off x="10058400" y="3218688"/>
+            <a:ext cx="1920240" cy="320040"/>
+          </a:xfrm>
+          <a:prstGeom prst="rect">
+            <a:avLst/>
+          </a:prstGeom>
+          <a:noFill/>
+        </p:spPr>
+        <p:txBody>
+          <a:bodyPr wrap="square" lIns="0" rIns="0" tIns="0" bIns="0" anchor="t">
+            <a:spAutoFit/>
+          </a:bodyPr>
+          <a:lstStyle/>
+          <a:p>
+            <a:pPr algn="l"/>
+            <a:r>
+              <a:rPr sz="1300" b="1" i="0">
+                <a:solidFill>
+                  <a:srgbClr val="C2410C"/>
+                </a:solidFill>
+                <a:latin typeface="Calibri"/>
+              </a:rPr>
+              <a:t>0% vs 1%</a:t>
+            </a:r>
+          </a:p>
+        </p:txBody>
+      </p:sp>
+      <p:sp>
+        <p:nvSpPr>
+          <p:cNvPr id="16" name="Rectangle 15"/>
           <p:cNvSpPr/>
           <p:nvPr/>
         </p:nvSpPr>
         <p:spPr>
           <a:xfrm>
-            <a:off x="6400800" y="2907792"/>
-            <a:ext cx="5120640" cy="9144"/>
+            <a:off x="640080" y="3584448"/>
+            <a:ext cx="10911535" cy="7315"/>
           </a:xfrm>
           <a:prstGeom prst="rect">
             <a:avLst/>
           </a:prstGeom>
           <a:solidFill>
-            <a:srgbClr val="D8DBE0"/>
+            <a:srgbClr val="D5DDE4"/>
           </a:solidFill>
           <a:ln>
             <a:noFill/>
@@ -6363,14 +6909,49 @@
       </p:sp>
       <p:sp>
         <p:nvSpPr>
-          <p:cNvPr id="11" name="TextBox 10"/>
-          <p:cNvSpPr txBox="1"/>
-          <p:nvPr/>
-        </p:nvSpPr>
-        <p:spPr>
-          <a:xfrm>
-            <a:off x="6400800" y="2971800"/>
-            <a:ext cx="2468880" cy="292608"/>
+          <p:cNvPr id="17" name="TextBox 16"/>
+          <p:cNvSpPr txBox="1"/>
+          <p:nvPr/>
+        </p:nvSpPr>
+        <p:spPr>
+          <a:xfrm>
+            <a:off x="640080" y="3694176"/>
+            <a:ext cx="1920240" cy="320040"/>
+          </a:xfrm>
+          <a:prstGeom prst="rect">
+            <a:avLst/>
+          </a:prstGeom>
+          <a:noFill/>
+        </p:spPr>
+        <p:txBody>
+          <a:bodyPr wrap="square" lIns="0" rIns="0" tIns="0" bIns="0" anchor="t">
+            <a:spAutoFit/>
+          </a:bodyPr>
+          <a:lstStyle/>
+          <a:p>
+            <a:pPr algn="l"/>
+            <a:r>
+              <a:rPr sz="1300" b="1" i="0">
+                <a:solidFill>
+                  <a:srgbClr val="1F2933"/>
+                </a:solidFill>
+                <a:latin typeface="Calibri"/>
+              </a:rPr>
+              <a:t>New Balance</a:t>
+            </a:r>
+          </a:p>
+        </p:txBody>
+      </p:sp>
+      <p:sp>
+        <p:nvSpPr>
+          <p:cNvPr id="18" name="TextBox 17"/>
+          <p:cNvSpPr txBox="1"/>
+          <p:nvPr/>
+        </p:nvSpPr>
+        <p:spPr>
+          <a:xfrm>
+            <a:off x="3931920" y="3694176"/>
+            <a:ext cx="1920240" cy="320040"/>
           </a:xfrm>
           <a:prstGeom prst="rect">
             <a:avLst/>
@@ -6387,66 +6968,136 @@
             <a:r>
               <a:rPr sz="1300" b="0" i="0">
                 <a:solidFill>
-                  <a:srgbClr val="14181C"/>
-                </a:solidFill>
-                <a:latin typeface="Calibri"/>
-              </a:rPr>
-              <a:t>Vuori</a:t>
-            </a:r>
-          </a:p>
-        </p:txBody>
-      </p:sp>
-      <p:sp>
-        <p:nvSpPr>
-          <p:cNvPr id="12" name="TextBox 11"/>
-          <p:cNvSpPr txBox="1"/>
-          <p:nvPr/>
-        </p:nvSpPr>
-        <p:spPr>
-          <a:xfrm>
-            <a:off x="8778240" y="2971800"/>
-            <a:ext cx="2743200" cy="292608"/>
-          </a:xfrm>
-          <a:prstGeom prst="rect">
-            <a:avLst/>
-          </a:prstGeom>
-          <a:noFill/>
-        </p:spPr>
-        <p:txBody>
-          <a:bodyPr wrap="square" lIns="0" rIns="0" tIns="0" bIns="0" anchor="t">
-            <a:spAutoFit/>
-          </a:bodyPr>
-          <a:lstStyle/>
-          <a:p>
-            <a:pPr algn="r"/>
+                  <a:srgbClr val="1F2933"/>
+                </a:solidFill>
+                <a:latin typeface="Calibri"/>
+              </a:rPr>
+              <a:t>4</a:t>
+            </a:r>
+          </a:p>
+        </p:txBody>
+      </p:sp>
+      <p:sp>
+        <p:nvSpPr>
+          <p:cNvPr id="19" name="TextBox 18"/>
+          <p:cNvSpPr txBox="1"/>
+          <p:nvPr/>
+        </p:nvSpPr>
+        <p:spPr>
+          <a:xfrm>
+            <a:off x="5943600" y="3694176"/>
+            <a:ext cx="1920240" cy="320040"/>
+          </a:xfrm>
+          <a:prstGeom prst="rect">
+            <a:avLst/>
+          </a:prstGeom>
+          <a:noFill/>
+        </p:spPr>
+        <p:txBody>
+          <a:bodyPr wrap="square" lIns="0" rIns="0" tIns="0" bIns="0" anchor="t">
+            <a:spAutoFit/>
+          </a:bodyPr>
+          <a:lstStyle/>
+          <a:p>
+            <a:pPr algn="l"/>
             <a:r>
               <a:rPr sz="1300" b="0" i="0">
                 <a:solidFill>
-                  <a:srgbClr val="6B7280"/>
-                </a:solidFill>
-                <a:latin typeface="Calibri"/>
-              </a:rPr>
-              <a:t>13,593 reviews</a:t>
-            </a:r>
-          </a:p>
-        </p:txBody>
-      </p:sp>
-      <p:sp>
-        <p:nvSpPr>
-          <p:cNvPr id="13" name="Rectangle 12"/>
+                  <a:srgbClr val="1F2933"/>
+                </a:solidFill>
+                <a:latin typeface="Calibri"/>
+              </a:rPr>
+              <a:t>246</a:t>
+            </a:r>
+          </a:p>
+        </p:txBody>
+      </p:sp>
+      <p:sp>
+        <p:nvSpPr>
+          <p:cNvPr id="20" name="TextBox 19"/>
+          <p:cNvSpPr txBox="1"/>
+          <p:nvPr/>
+        </p:nvSpPr>
+        <p:spPr>
+          <a:xfrm>
+            <a:off x="7955279" y="3694176"/>
+            <a:ext cx="1920240" cy="320040"/>
+          </a:xfrm>
+          <a:prstGeom prst="rect">
+            <a:avLst/>
+          </a:prstGeom>
+          <a:noFill/>
+        </p:spPr>
+        <p:txBody>
+          <a:bodyPr wrap="square" lIns="0" rIns="0" tIns="0" bIns="0" anchor="t">
+            <a:spAutoFit/>
+          </a:bodyPr>
+          <a:lstStyle/>
+          <a:p>
+            <a:pPr algn="l"/>
+            <a:r>
+              <a:rPr sz="1300" b="0" i="0">
+                <a:solidFill>
+                  <a:srgbClr val="1F2933"/>
+                </a:solidFill>
+                <a:latin typeface="Calibri"/>
+              </a:rPr>
+              <a:t>6 pts</a:t>
+            </a:r>
+          </a:p>
+        </p:txBody>
+      </p:sp>
+      <p:sp>
+        <p:nvSpPr>
+          <p:cNvPr id="21" name="TextBox 20"/>
+          <p:cNvSpPr txBox="1"/>
+          <p:nvPr/>
+        </p:nvSpPr>
+        <p:spPr>
+          <a:xfrm>
+            <a:off x="10058400" y="3694176"/>
+            <a:ext cx="1920240" cy="320040"/>
+          </a:xfrm>
+          <a:prstGeom prst="rect">
+            <a:avLst/>
+          </a:prstGeom>
+          <a:noFill/>
+        </p:spPr>
+        <p:txBody>
+          <a:bodyPr wrap="square" lIns="0" rIns="0" tIns="0" bIns="0" anchor="t">
+            <a:spAutoFit/>
+          </a:bodyPr>
+          <a:lstStyle/>
+          <a:p>
+            <a:pPr algn="l"/>
+            <a:r>
+              <a:rPr sz="1300" b="1" i="0">
+                <a:solidFill>
+                  <a:srgbClr val="C2410C"/>
+                </a:solidFill>
+                <a:latin typeface="Calibri"/>
+              </a:rPr>
+              <a:t>0% vs 0%</a:t>
+            </a:r>
+          </a:p>
+        </p:txBody>
+      </p:sp>
+      <p:sp>
+        <p:nvSpPr>
+          <p:cNvPr id="22" name="Rectangle 21"/>
           <p:cNvSpPr/>
           <p:nvPr/>
         </p:nvSpPr>
         <p:spPr>
           <a:xfrm>
-            <a:off x="6400800" y="3273552"/>
-            <a:ext cx="5120640" cy="9144"/>
+            <a:off x="640080" y="4059936"/>
+            <a:ext cx="10911535" cy="7315"/>
           </a:xfrm>
           <a:prstGeom prst="rect">
             <a:avLst/>
           </a:prstGeom>
           <a:solidFill>
-            <a:srgbClr val="D8DBE0"/>
+            <a:srgbClr val="D5DDE4"/>
           </a:solidFill>
           <a:ln>
             <a:noFill/>
@@ -6477,14 +7128,49 @@
       </p:sp>
       <p:sp>
         <p:nvSpPr>
-          <p:cNvPr id="14" name="TextBox 13"/>
-          <p:cNvSpPr txBox="1"/>
-          <p:nvPr/>
-        </p:nvSpPr>
-        <p:spPr>
-          <a:xfrm>
-            <a:off x="6400800" y="3337560"/>
-            <a:ext cx="2468880" cy="292608"/>
+          <p:cNvPr id="23" name="TextBox 22"/>
+          <p:cNvSpPr txBox="1"/>
+          <p:nvPr/>
+        </p:nvSpPr>
+        <p:spPr>
+          <a:xfrm>
+            <a:off x="640080" y="4169664"/>
+            <a:ext cx="1920240" cy="320040"/>
+          </a:xfrm>
+          <a:prstGeom prst="rect">
+            <a:avLst/>
+          </a:prstGeom>
+          <a:noFill/>
+        </p:spPr>
+        <p:txBody>
+          <a:bodyPr wrap="square" lIns="0" rIns="0" tIns="0" bIns="0" anchor="t">
+            <a:spAutoFit/>
+          </a:bodyPr>
+          <a:lstStyle/>
+          <a:p>
+            <a:pPr algn="l"/>
+            <a:r>
+              <a:rPr sz="1300" b="1" i="0">
+                <a:solidFill>
+                  <a:srgbClr val="1F2933"/>
+                </a:solidFill>
+                <a:latin typeface="Calibri"/>
+              </a:rPr>
+              <a:t>Nike</a:t>
+            </a:r>
+          </a:p>
+        </p:txBody>
+      </p:sp>
+      <p:sp>
+        <p:nvSpPr>
+          <p:cNvPr id="24" name="TextBox 23"/>
+          <p:cNvSpPr txBox="1"/>
+          <p:nvPr/>
+        </p:nvSpPr>
+        <p:spPr>
+          <a:xfrm>
+            <a:off x="3931920" y="4169664"/>
+            <a:ext cx="1920240" cy="320040"/>
           </a:xfrm>
           <a:prstGeom prst="rect">
             <a:avLst/>
@@ -6501,66 +7187,136 @@
             <a:r>
               <a:rPr sz="1300" b="0" i="0">
                 <a:solidFill>
-                  <a:srgbClr val="14181C"/>
-                </a:solidFill>
-                <a:latin typeface="Calibri"/>
-              </a:rPr>
-              <a:t>Nike</a:t>
-            </a:r>
-          </a:p>
-        </p:txBody>
-      </p:sp>
-      <p:sp>
-        <p:nvSpPr>
-          <p:cNvPr id="15" name="TextBox 14"/>
-          <p:cNvSpPr txBox="1"/>
-          <p:nvPr/>
-        </p:nvSpPr>
-        <p:spPr>
-          <a:xfrm>
-            <a:off x="8778240" y="3337560"/>
-            <a:ext cx="2743200" cy="292608"/>
-          </a:xfrm>
-          <a:prstGeom prst="rect">
-            <a:avLst/>
-          </a:prstGeom>
-          <a:noFill/>
-        </p:spPr>
-        <p:txBody>
-          <a:bodyPr wrap="square" lIns="0" rIns="0" tIns="0" bIns="0" anchor="t">
-            <a:spAutoFit/>
-          </a:bodyPr>
-          <a:lstStyle/>
-          <a:p>
-            <a:pPr algn="r"/>
+                  <a:srgbClr val="1F2933"/>
+                </a:solidFill>
+                <a:latin typeface="Calibri"/>
+              </a:rPr>
+              <a:t>8</a:t>
+            </a:r>
+          </a:p>
+        </p:txBody>
+      </p:sp>
+      <p:sp>
+        <p:nvSpPr>
+          <p:cNvPr id="25" name="TextBox 24"/>
+          <p:cNvSpPr txBox="1"/>
+          <p:nvPr/>
+        </p:nvSpPr>
+        <p:spPr>
+          <a:xfrm>
+            <a:off x="5943600" y="4169664"/>
+            <a:ext cx="1920240" cy="320040"/>
+          </a:xfrm>
+          <a:prstGeom prst="rect">
+            <a:avLst/>
+          </a:prstGeom>
+          <a:noFill/>
+        </p:spPr>
+        <p:txBody>
+          <a:bodyPr wrap="square" lIns="0" rIns="0" tIns="0" bIns="0" anchor="t">
+            <a:spAutoFit/>
+          </a:bodyPr>
+          <a:lstStyle/>
+          <a:p>
+            <a:pPr algn="l"/>
             <a:r>
               <a:rPr sz="1300" b="0" i="0">
                 <a:solidFill>
-                  <a:srgbClr val="6B7280"/>
-                </a:solidFill>
-                <a:latin typeface="Calibri"/>
-              </a:rPr>
-              <a:t>6,660 reviews</a:t>
-            </a:r>
-          </a:p>
-        </p:txBody>
-      </p:sp>
-      <p:sp>
-        <p:nvSpPr>
-          <p:cNvPr id="16" name="Rectangle 15"/>
+                  <a:srgbClr val="1F2933"/>
+                </a:solidFill>
+                <a:latin typeface="Calibri"/>
+              </a:rPr>
+              <a:t>227</a:t>
+            </a:r>
+          </a:p>
+        </p:txBody>
+      </p:sp>
+      <p:sp>
+        <p:nvSpPr>
+          <p:cNvPr id="26" name="TextBox 25"/>
+          <p:cNvSpPr txBox="1"/>
+          <p:nvPr/>
+        </p:nvSpPr>
+        <p:spPr>
+          <a:xfrm>
+            <a:off x="7955279" y="4169664"/>
+            <a:ext cx="1920240" cy="320040"/>
+          </a:xfrm>
+          <a:prstGeom prst="rect">
+            <a:avLst/>
+          </a:prstGeom>
+          <a:noFill/>
+        </p:spPr>
+        <p:txBody>
+          <a:bodyPr wrap="square" lIns="0" rIns="0" tIns="0" bIns="0" anchor="t">
+            <a:spAutoFit/>
+          </a:bodyPr>
+          <a:lstStyle/>
+          <a:p>
+            <a:pPr algn="l"/>
+            <a:r>
+              <a:rPr sz="1300" b="0" i="0">
+                <a:solidFill>
+                  <a:srgbClr val="1F2933"/>
+                </a:solidFill>
+                <a:latin typeface="Calibri"/>
+              </a:rPr>
+              <a:t>10 pts</a:t>
+            </a:r>
+          </a:p>
+        </p:txBody>
+      </p:sp>
+      <p:sp>
+        <p:nvSpPr>
+          <p:cNvPr id="27" name="TextBox 26"/>
+          <p:cNvSpPr txBox="1"/>
+          <p:nvPr/>
+        </p:nvSpPr>
+        <p:spPr>
+          <a:xfrm>
+            <a:off x="10058400" y="4169664"/>
+            <a:ext cx="1920240" cy="320040"/>
+          </a:xfrm>
+          <a:prstGeom prst="rect">
+            <a:avLst/>
+          </a:prstGeom>
+          <a:noFill/>
+        </p:spPr>
+        <p:txBody>
+          <a:bodyPr wrap="square" lIns="0" rIns="0" tIns="0" bIns="0" anchor="t">
+            <a:spAutoFit/>
+          </a:bodyPr>
+          <a:lstStyle/>
+          <a:p>
+            <a:pPr algn="l"/>
+            <a:r>
+              <a:rPr sz="1300" b="1" i="0">
+                <a:solidFill>
+                  <a:srgbClr val="C2410C"/>
+                </a:solidFill>
+                <a:latin typeface="Calibri"/>
+              </a:rPr>
+              <a:t>0% vs 3%</a:t>
+            </a:r>
+          </a:p>
+        </p:txBody>
+      </p:sp>
+      <p:sp>
+        <p:nvSpPr>
+          <p:cNvPr id="28" name="Rectangle 27"/>
           <p:cNvSpPr/>
           <p:nvPr/>
         </p:nvSpPr>
         <p:spPr>
           <a:xfrm>
-            <a:off x="6400800" y="3639312"/>
-            <a:ext cx="5120640" cy="9144"/>
+            <a:off x="640080" y="4535424"/>
+            <a:ext cx="10911535" cy="7315"/>
           </a:xfrm>
           <a:prstGeom prst="rect">
             <a:avLst/>
           </a:prstGeom>
           <a:solidFill>
-            <a:srgbClr val="D8DBE0"/>
+            <a:srgbClr val="D5DDE4"/>
           </a:solidFill>
           <a:ln>
             <a:noFill/>
@@ -6591,14 +7347,49 @@
       </p:sp>
       <p:sp>
         <p:nvSpPr>
-          <p:cNvPr id="17" name="TextBox 16"/>
-          <p:cNvSpPr txBox="1"/>
-          <p:nvPr/>
-        </p:nvSpPr>
-        <p:spPr>
-          <a:xfrm>
-            <a:off x="6400800" y="3703320"/>
-            <a:ext cx="2468880" cy="292608"/>
+          <p:cNvPr id="29" name="TextBox 28"/>
+          <p:cNvSpPr txBox="1"/>
+          <p:nvPr/>
+        </p:nvSpPr>
+        <p:spPr>
+          <a:xfrm>
+            <a:off x="640080" y="4645152"/>
+            <a:ext cx="1920240" cy="320040"/>
+          </a:xfrm>
+          <a:prstGeom prst="rect">
+            <a:avLst/>
+          </a:prstGeom>
+          <a:noFill/>
+        </p:spPr>
+        <p:txBody>
+          <a:bodyPr wrap="square" lIns="0" rIns="0" tIns="0" bIns="0" anchor="t">
+            <a:spAutoFit/>
+          </a:bodyPr>
+          <a:lstStyle/>
+          <a:p>
+            <a:pPr algn="l"/>
+            <a:r>
+              <a:rPr sz="1300" b="1" i="0">
+                <a:solidFill>
+                  <a:srgbClr val="1F2933"/>
+                </a:solidFill>
+                <a:latin typeface="Calibri"/>
+              </a:rPr>
+              <a:t>Under Armour</a:t>
+            </a:r>
+          </a:p>
+        </p:txBody>
+      </p:sp>
+      <p:sp>
+        <p:nvSpPr>
+          <p:cNvPr id="30" name="TextBox 29"/>
+          <p:cNvSpPr txBox="1"/>
+          <p:nvPr/>
+        </p:nvSpPr>
+        <p:spPr>
+          <a:xfrm>
+            <a:off x="3931920" y="4645152"/>
+            <a:ext cx="1920240" cy="320040"/>
           </a:xfrm>
           <a:prstGeom prst="rect">
             <a:avLst/>
@@ -6615,66 +7406,136 @@
             <a:r>
               <a:rPr sz="1300" b="0" i="0">
                 <a:solidFill>
-                  <a:srgbClr val="14181C"/>
-                </a:solidFill>
-                <a:latin typeface="Calibri"/>
-              </a:rPr>
-              <a:t>Under Armour</a:t>
-            </a:r>
-          </a:p>
-        </p:txBody>
-      </p:sp>
-      <p:sp>
-        <p:nvSpPr>
-          <p:cNvPr id="18" name="TextBox 17"/>
-          <p:cNvSpPr txBox="1"/>
-          <p:nvPr/>
-        </p:nvSpPr>
-        <p:spPr>
-          <a:xfrm>
-            <a:off x="8778240" y="3703320"/>
-            <a:ext cx="2743200" cy="292608"/>
-          </a:xfrm>
-          <a:prstGeom prst="rect">
-            <a:avLst/>
-          </a:prstGeom>
-          <a:noFill/>
-        </p:spPr>
-        <p:txBody>
-          <a:bodyPr wrap="square" lIns="0" rIns="0" tIns="0" bIns="0" anchor="t">
-            <a:spAutoFit/>
-          </a:bodyPr>
-          <a:lstStyle/>
-          <a:p>
-            <a:pPr algn="r"/>
+                  <a:srgbClr val="1F2933"/>
+                </a:solidFill>
+                <a:latin typeface="Calibri"/>
+              </a:rPr>
+              <a:t>7</a:t>
+            </a:r>
+          </a:p>
+        </p:txBody>
+      </p:sp>
+      <p:sp>
+        <p:nvSpPr>
+          <p:cNvPr id="31" name="TextBox 30"/>
+          <p:cNvSpPr txBox="1"/>
+          <p:nvPr/>
+        </p:nvSpPr>
+        <p:spPr>
+          <a:xfrm>
+            <a:off x="5943600" y="4645152"/>
+            <a:ext cx="1920240" cy="320040"/>
+          </a:xfrm>
+          <a:prstGeom prst="rect">
+            <a:avLst/>
+          </a:prstGeom>
+          <a:noFill/>
+        </p:spPr>
+        <p:txBody>
+          <a:bodyPr wrap="square" lIns="0" rIns="0" tIns="0" bIns="0" anchor="t">
+            <a:spAutoFit/>
+          </a:bodyPr>
+          <a:lstStyle/>
+          <a:p>
+            <a:pPr algn="l"/>
             <a:r>
               <a:rPr sz="1300" b="0" i="0">
                 <a:solidFill>
-                  <a:srgbClr val="6B7280"/>
-                </a:solidFill>
-                <a:latin typeface="Calibri"/>
-              </a:rPr>
-              <a:t>305 reviews</a:t>
-            </a:r>
-          </a:p>
-        </p:txBody>
-      </p:sp>
-      <p:sp>
-        <p:nvSpPr>
-          <p:cNvPr id="19" name="Rectangle 18"/>
+                  <a:srgbClr val="1F2933"/>
+                </a:solidFill>
+                <a:latin typeface="Calibri"/>
+              </a:rPr>
+              <a:t>153</a:t>
+            </a:r>
+          </a:p>
+        </p:txBody>
+      </p:sp>
+      <p:sp>
+        <p:nvSpPr>
+          <p:cNvPr id="32" name="TextBox 31"/>
+          <p:cNvSpPr txBox="1"/>
+          <p:nvPr/>
+        </p:nvSpPr>
+        <p:spPr>
+          <a:xfrm>
+            <a:off x="7955279" y="4645152"/>
+            <a:ext cx="1920240" cy="320040"/>
+          </a:xfrm>
+          <a:prstGeom prst="rect">
+            <a:avLst/>
+          </a:prstGeom>
+          <a:noFill/>
+        </p:spPr>
+        <p:txBody>
+          <a:bodyPr wrap="square" lIns="0" rIns="0" tIns="0" bIns="0" anchor="t">
+            <a:spAutoFit/>
+          </a:bodyPr>
+          <a:lstStyle/>
+          <a:p>
+            <a:pPr algn="l"/>
+            <a:r>
+              <a:rPr sz="1300" b="0" i="0">
+                <a:solidFill>
+                  <a:srgbClr val="1F2933"/>
+                </a:solidFill>
+                <a:latin typeface="Calibri"/>
+              </a:rPr>
+              <a:t>10 pts</a:t>
+            </a:r>
+          </a:p>
+        </p:txBody>
+      </p:sp>
+      <p:sp>
+        <p:nvSpPr>
+          <p:cNvPr id="33" name="TextBox 32"/>
+          <p:cNvSpPr txBox="1"/>
+          <p:nvPr/>
+        </p:nvSpPr>
+        <p:spPr>
+          <a:xfrm>
+            <a:off x="10058400" y="4645152"/>
+            <a:ext cx="1920240" cy="320040"/>
+          </a:xfrm>
+          <a:prstGeom prst="rect">
+            <a:avLst/>
+          </a:prstGeom>
+          <a:noFill/>
+        </p:spPr>
+        <p:txBody>
+          <a:bodyPr wrap="square" lIns="0" rIns="0" tIns="0" bIns="0" anchor="t">
+            <a:spAutoFit/>
+          </a:bodyPr>
+          <a:lstStyle/>
+          <a:p>
+            <a:pPr algn="l"/>
+            <a:r>
+              <a:rPr sz="1300" b="1" i="0">
+                <a:solidFill>
+                  <a:srgbClr val="C2410C"/>
+                </a:solidFill>
+                <a:latin typeface="Calibri"/>
+              </a:rPr>
+              <a:t>0% vs 4%</a:t>
+            </a:r>
+          </a:p>
+        </p:txBody>
+      </p:sp>
+      <p:sp>
+        <p:nvSpPr>
+          <p:cNvPr id="34" name="Rectangle 33"/>
           <p:cNvSpPr/>
           <p:nvPr/>
         </p:nvSpPr>
         <p:spPr>
           <a:xfrm>
-            <a:off x="6400800" y="4005072"/>
-            <a:ext cx="5120640" cy="9144"/>
+            <a:off x="640080" y="5010912"/>
+            <a:ext cx="10911535" cy="7315"/>
           </a:xfrm>
           <a:prstGeom prst="rect">
             <a:avLst/>
           </a:prstGeom>
           <a:solidFill>
-            <a:srgbClr val="D8DBE0"/>
+            <a:srgbClr val="D5DDE4"/>
           </a:solidFill>
           <a:ln>
             <a:noFill/>
@@ -6705,90 +7566,20 @@
       </p:sp>
       <p:sp>
         <p:nvSpPr>
-          <p:cNvPr id="20" name="TextBox 19"/>
-          <p:cNvSpPr txBox="1"/>
-          <p:nvPr/>
-        </p:nvSpPr>
-        <p:spPr>
-          <a:xfrm>
-            <a:off x="6400800" y="4069080"/>
-            <a:ext cx="2468880" cy="292608"/>
-          </a:xfrm>
-          <a:prstGeom prst="rect">
-            <a:avLst/>
-          </a:prstGeom>
-          <a:noFill/>
-        </p:spPr>
-        <p:txBody>
-          <a:bodyPr wrap="square" lIns="0" rIns="0" tIns="0" bIns="0" anchor="t">
-            <a:spAutoFit/>
-          </a:bodyPr>
-          <a:lstStyle/>
-          <a:p>
-            <a:pPr algn="l"/>
-            <a:r>
-              <a:rPr sz="1300" b="1" i="0">
-                <a:solidFill>
-                  <a:srgbClr val="E8562A"/>
-                </a:solidFill>
-                <a:latin typeface="Calibri"/>
-              </a:rPr>
-              <a:t>Arc’teryx</a:t>
-            </a:r>
-          </a:p>
-        </p:txBody>
-      </p:sp>
-      <p:sp>
-        <p:nvSpPr>
-          <p:cNvPr id="21" name="TextBox 20"/>
-          <p:cNvSpPr txBox="1"/>
-          <p:nvPr/>
-        </p:nvSpPr>
-        <p:spPr>
-          <a:xfrm>
-            <a:off x="8778240" y="4069080"/>
-            <a:ext cx="2743200" cy="292608"/>
-          </a:xfrm>
-          <a:prstGeom prst="rect">
-            <a:avLst/>
-          </a:prstGeom>
-          <a:noFill/>
-        </p:spPr>
-        <p:txBody>
-          <a:bodyPr wrap="square" lIns="0" rIns="0" tIns="0" bIns="0" anchor="t">
-            <a:spAutoFit/>
-          </a:bodyPr>
-          <a:lstStyle/>
-          <a:p>
-            <a:pPr algn="r"/>
-            <a:r>
-              <a:rPr sz="1300" b="1" i="0">
-                <a:solidFill>
-                  <a:srgbClr val="E8562A"/>
-                </a:solidFill>
-                <a:latin typeface="Calibri"/>
-              </a:rPr>
-              <a:t>24 reviews</a:t>
-            </a:r>
-          </a:p>
-        </p:txBody>
-      </p:sp>
-      <p:sp>
-        <p:nvSpPr>
-          <p:cNvPr id="22" name="Rectangle 21"/>
+          <p:cNvPr id="35" name="Rectangle 34"/>
           <p:cNvSpPr/>
           <p:nvPr/>
         </p:nvSpPr>
         <p:spPr>
           <a:xfrm>
-            <a:off x="6400800" y="4370832"/>
-            <a:ext cx="5120640" cy="9144"/>
+            <a:off x="640080" y="5257800"/>
+            <a:ext cx="5120640" cy="960120"/>
           </a:xfrm>
           <a:prstGeom prst="rect">
             <a:avLst/>
           </a:prstGeom>
           <a:solidFill>
-            <a:srgbClr val="D8DBE0"/>
+            <a:srgbClr val="FDECE2"/>
           </a:solidFill>
           <a:ln>
             <a:noFill/>
@@ -6819,149 +7610,125 @@
       </p:sp>
       <p:sp>
         <p:nvSpPr>
-          <p:cNvPr id="23" name="TextBox 22"/>
-          <p:cNvSpPr txBox="1"/>
-          <p:nvPr/>
-        </p:nvSpPr>
-        <p:spPr>
-          <a:xfrm>
-            <a:off x="6400800" y="4434840"/>
-            <a:ext cx="2468880" cy="292608"/>
-          </a:xfrm>
-          <a:prstGeom prst="rect">
-            <a:avLst/>
-          </a:prstGeom>
-          <a:noFill/>
-        </p:spPr>
-        <p:txBody>
-          <a:bodyPr wrap="square" lIns="0" rIns="0" tIns="0" bIns="0" anchor="t">
-            <a:spAutoFit/>
-          </a:bodyPr>
-          <a:lstStyle/>
-          <a:p>
-            <a:pPr algn="l"/>
-            <a:r>
-              <a:rPr sz="1300" b="1" i="0">
-                <a:solidFill>
-                  <a:srgbClr val="E8562A"/>
-                </a:solidFill>
-                <a:latin typeface="Calibri"/>
-              </a:rPr>
-              <a:t>Tracksmith</a:t>
-            </a:r>
-          </a:p>
-        </p:txBody>
-      </p:sp>
-      <p:sp>
-        <p:nvSpPr>
-          <p:cNvPr id="24" name="TextBox 23"/>
-          <p:cNvSpPr txBox="1"/>
-          <p:nvPr/>
-        </p:nvSpPr>
-        <p:spPr>
-          <a:xfrm>
-            <a:off x="8778240" y="4434840"/>
-            <a:ext cx="2743200" cy="292608"/>
-          </a:xfrm>
-          <a:prstGeom prst="rect">
-            <a:avLst/>
-          </a:prstGeom>
-          <a:noFill/>
-        </p:spPr>
-        <p:txBody>
-          <a:bodyPr wrap="square" lIns="0" rIns="0" tIns="0" bIns="0" anchor="t">
-            <a:spAutoFit/>
-          </a:bodyPr>
-          <a:lstStyle/>
-          <a:p>
-            <a:pPr algn="r"/>
-            <a:r>
-              <a:rPr sz="1300" b="1" i="0">
-                <a:solidFill>
-                  <a:srgbClr val="E8562A"/>
-                </a:solidFill>
-                <a:latin typeface="Calibri"/>
-              </a:rPr>
-              <a:t>22 reviews</a:t>
-            </a:r>
-          </a:p>
-        </p:txBody>
-      </p:sp>
-      <p:sp>
-        <p:nvSpPr>
-          <p:cNvPr id="25" name="Rectangle 24"/>
-          <p:cNvSpPr/>
-          <p:nvPr/>
-        </p:nvSpPr>
-        <p:spPr>
-          <a:xfrm>
-            <a:off x="6400800" y="4736592"/>
-            <a:ext cx="5120640" cy="9144"/>
-          </a:xfrm>
-          <a:prstGeom prst="rect">
-            <a:avLst/>
-          </a:prstGeom>
-          <a:solidFill>
-            <a:srgbClr val="D8DBE0"/>
-          </a:solidFill>
-          <a:ln>
-            <a:noFill/>
-          </a:ln>
-          <a:effectLst/>
-        </p:spPr>
-        <p:style>
-          <a:lnRef idx="1">
-            <a:schemeClr val="accent1"/>
-          </a:lnRef>
-          <a:fillRef idx="3">
-            <a:schemeClr val="accent1"/>
-          </a:fillRef>
-          <a:effectRef idx="2">
-            <a:schemeClr val="accent1"/>
-          </a:effectRef>
-          <a:fontRef idx="minor">
-            <a:schemeClr val="lt1"/>
-          </a:fontRef>
-        </p:style>
-        <p:txBody>
-          <a:bodyPr rtlCol="0" anchor="ctr"/>
-          <a:lstStyle/>
-          <a:p>
-            <a:pPr algn="ctr"/>
-          </a:p>
-        </p:txBody>
-      </p:sp>
-      <p:sp>
-        <p:nvSpPr>
-          <p:cNvPr id="26" name="TextBox 25"/>
-          <p:cNvSpPr txBox="1"/>
-          <p:nvPr/>
-        </p:nvSpPr>
-        <p:spPr>
-          <a:xfrm>
-            <a:off x="640080" y="5120640"/>
-            <a:ext cx="10911535" cy="365760"/>
-          </a:xfrm>
-          <a:prstGeom prst="rect">
-            <a:avLst/>
-          </a:prstGeom>
-          <a:noFill/>
-        </p:spPr>
-        <p:txBody>
-          <a:bodyPr wrap="square" lIns="0" rIns="0" tIns="0" bIns="0" anchor="t">
-            <a:spAutoFit/>
-          </a:bodyPr>
-          <a:lstStyle/>
-          <a:p>
-            <a:pPr algn="l"/>
+          <p:cNvPr id="36" name="TextBox 35"/>
+          <p:cNvSpPr txBox="1"/>
+          <p:nvPr/>
+        </p:nvSpPr>
+        <p:spPr>
+          <a:xfrm>
+            <a:off x="914400" y="5413248"/>
+            <a:ext cx="4572000" cy="365760"/>
+          </a:xfrm>
+          <a:prstGeom prst="rect">
+            <a:avLst/>
+          </a:prstGeom>
+          <a:noFill/>
+        </p:spPr>
+        <p:txBody>
+          <a:bodyPr wrap="square" lIns="0" rIns="0" tIns="0" bIns="0" anchor="t">
+            <a:spAutoFit/>
+          </a:bodyPr>
+          <a:lstStyle/>
+          <a:p>
+            <a:pPr algn="l"/>
+            <a:r>
+              <a:rPr sz="2000" b="1" i="0">
+                <a:solidFill>
+                  <a:srgbClr val="C2410C"/>
+                </a:solidFill>
+                <a:latin typeface="Cambria"/>
+              </a:rPr>
+              <a:t>0 to 4 points</a:t>
+            </a:r>
+          </a:p>
+        </p:txBody>
+      </p:sp>
+      <p:sp>
+        <p:nvSpPr>
+          <p:cNvPr id="37" name="TextBox 36"/>
+          <p:cNvSpPr txBox="1"/>
+          <p:nvPr/>
+        </p:nvSpPr>
+        <p:spPr>
+          <a:xfrm>
+            <a:off x="914400" y="5806440"/>
+            <a:ext cx="4572000" cy="274320"/>
+          </a:xfrm>
+          <a:prstGeom prst="rect">
+            <a:avLst/>
+          </a:prstGeom>
+          <a:noFill/>
+        </p:spPr>
+        <p:txBody>
+          <a:bodyPr wrap="square" lIns="0" rIns="0" tIns="0" bIns="0" anchor="t">
+            <a:spAutoFit/>
+          </a:bodyPr>
+          <a:lstStyle/>
+          <a:p>
+            <a:pPr algn="l"/>
+            <a:r>
+              <a:rPr sz="1200" b="0" i="0">
+                <a:solidFill>
+                  <a:srgbClr val="C2410C"/>
+                </a:solidFill>
+                <a:latin typeface="Calibri"/>
+              </a:rPr>
+              <a:t>agreement on community, all four brands</a:t>
+            </a:r>
+          </a:p>
+        </p:txBody>
+      </p:sp>
+      <p:sp>
+        <p:nvSpPr>
+          <p:cNvPr id="38" name="TextBox 37"/>
+          <p:cNvSpPr txBox="1"/>
+          <p:nvPr/>
+        </p:nvSpPr>
+        <p:spPr>
+          <a:xfrm>
+            <a:off x="6400800" y="5349240"/>
+            <a:ext cx="4937760" cy="822960"/>
+          </a:xfrm>
+          <a:prstGeom prst="rect">
+            <a:avLst/>
+          </a:prstGeom>
+          <a:noFill/>
+        </p:spPr>
+        <p:txBody>
+          <a:bodyPr wrap="square" lIns="0" rIns="0" tIns="0" bIns="0" anchor="t">
+            <a:spAutoFit/>
+          </a:bodyPr>
+          <a:lstStyle/>
+          <a:p>
+            <a:pPr algn="l">
+              <a:lnSpc>
+                <a:spcPts val="2200"/>
+              </a:lnSpc>
+            </a:pPr>
             <a:r>
               <a:rPr sz="1500" b="1" i="0">
                 <a:solidFill>
-                  <a:srgbClr val="14181C"/>
-                </a:solidFill>
-                <a:latin typeface="Calibri"/>
-              </a:rPr>
-              <a:t>A premium brand advertising on 22 reviews is not using proof. It is exposing itself.</a:t>
+                  <a:srgbClr val="1F2933"/>
+                </a:solidFill>
+                <a:latin typeface="Calibri"/>
+              </a:rPr>
+              <a:t>Different collector. Different method. Different brands.</a:t>
+            </a:r>
+          </a:p>
+          <a:p>
+            <a:pPr algn="l">
+              <a:lnSpc>
+                <a:spcPts val="2200"/>
+              </a:lnSpc>
+            </a:pPr>
+            <a:r>
+              <a:rPr sz="1500" b="1" i="0">
+                <a:solidFill>
+                  <a:srgbClr val="1F2933"/>
+                </a:solidFill>
+                <a:latin typeface="Calibri"/>
+              </a:rPr>
+              <a:t>Different years. Same answer.</a:t>
             </a:r>
           </a:p>
         </p:txBody>
@@ -7018,11 +7785,11 @@
             <a:r>
               <a:rPr sz="1100" b="1" i="0">
                 <a:solidFill>
-                  <a:srgbClr val="E8562A"/>
-                </a:solidFill>
-                <a:latin typeface="Calibri"/>
-              </a:rPr>
-              <a:t>THE OPENING</a:t>
+                  <a:srgbClr val="C2410C"/>
+                </a:solidFill>
+                <a:latin typeface="Calibri"/>
+              </a:rPr>
+              <a:t>THE SECOND FINDING</a:t>
             </a:r>
           </a:p>
         </p:txBody>
@@ -7053,66 +7820,31 @@
             <a:r>
               <a:rPr sz="3600" b="1" i="0">
                 <a:solidFill>
-                  <a:srgbClr val="14181C"/>
+                  <a:srgbClr val="1F2933"/>
                 </a:solidFill>
                 <a:latin typeface="Cambria"/>
               </a:rPr>
-              <a:t>Nobody has made belonging measurable</a:t>
-            </a:r>
-          </a:p>
-        </p:txBody>
-      </p:sp>
-      <p:sp>
-        <p:nvSpPr>
-          <p:cNvPr id="4" name="TextBox 3"/>
-          <p:cNvSpPr txBox="1"/>
-          <p:nvPr/>
-        </p:nvSpPr>
-        <p:spPr>
-          <a:xfrm>
-            <a:off x="640080" y="1938528"/>
-            <a:ext cx="10911535" cy="411480"/>
-          </a:xfrm>
-          <a:prstGeom prst="rect">
-            <a:avLst/>
-          </a:prstGeom>
-          <a:noFill/>
-        </p:spPr>
-        <p:txBody>
-          <a:bodyPr wrap="square" lIns="0" rIns="0" tIns="0" bIns="0" anchor="t">
-            <a:spAutoFit/>
-          </a:bodyPr>
-          <a:lstStyle/>
-          <a:p>
-            <a:pPr algn="l"/>
-            <a:r>
-              <a:rPr sz="1700" b="1" i="0">
-                <a:solidFill>
-                  <a:srgbClr val="E8562A"/>
-                </a:solidFill>
-                <a:latin typeface="Calibri"/>
-              </a:rPr>
-              <a:t>Community is not unclaimed. It is unproven.</a:t>
-            </a:r>
-          </a:p>
-        </p:txBody>
-      </p:sp>
-      <p:sp>
-        <p:nvSpPr>
-          <p:cNvPr id="5" name="Rectangle 4"/>
+              <a:t>Six in ten ads make a claim and prove nothing</a:t>
+            </a:r>
+          </a:p>
+        </p:txBody>
+      </p:sp>
+      <p:sp>
+        <p:nvSpPr>
+          <p:cNvPr id="4" name="Rectangle 3"/>
           <p:cNvSpPr/>
           <p:nvPr/>
         </p:nvSpPr>
         <p:spPr>
           <a:xfrm>
-            <a:off x="640080" y="2578608"/>
-            <a:ext cx="3429000" cy="2560320"/>
+            <a:off x="640080" y="2103120"/>
+            <a:ext cx="5029200" cy="2697480"/>
           </a:xfrm>
           <a:prstGeom prst="rect">
             <a:avLst/>
           </a:prstGeom>
           <a:solidFill>
-            <a:srgbClr val="F2F3F5"/>
+            <a:srgbClr val="FDECE2"/>
           </a:solidFill>
           <a:ln>
             <a:noFill/>
@@ -7143,14 +7875,84 @@
       </p:sp>
       <p:sp>
         <p:nvSpPr>
+          <p:cNvPr id="5" name="TextBox 4"/>
+          <p:cNvSpPr txBox="1"/>
+          <p:nvPr/>
+        </p:nvSpPr>
+        <p:spPr>
+          <a:xfrm>
+            <a:off x="1005840" y="2331720"/>
+            <a:ext cx="4297680" cy="1280160"/>
+          </a:xfrm>
+          <a:prstGeom prst="rect">
+            <a:avLst/>
+          </a:prstGeom>
+          <a:noFill/>
+        </p:spPr>
+        <p:txBody>
+          <a:bodyPr wrap="square" lIns="0" rIns="0" tIns="0" bIns="0" anchor="t">
+            <a:spAutoFit/>
+          </a:bodyPr>
+          <a:lstStyle/>
+          <a:p>
+            <a:pPr algn="l"/>
+            <a:r>
+              <a:rPr sz="7200" b="1" i="0">
+                <a:solidFill>
+                  <a:srgbClr val="C2410C"/>
+                </a:solidFill>
+                <a:latin typeface="Cambria"/>
+              </a:rPr>
+              <a:t>61%</a:t>
+            </a:r>
+          </a:p>
+        </p:txBody>
+      </p:sp>
+      <p:sp>
+        <p:nvSpPr>
           <p:cNvPr id="6" name="TextBox 5"/>
           <p:cNvSpPr txBox="1"/>
           <p:nvPr/>
         </p:nvSpPr>
         <p:spPr>
           <a:xfrm>
-            <a:off x="914400" y="2816352"/>
-            <a:ext cx="2880360" cy="365760"/>
+            <a:off x="1005840" y="3611880"/>
+            <a:ext cx="4297680" cy="914400"/>
+          </a:xfrm>
+          <a:prstGeom prst="rect">
+            <a:avLst/>
+          </a:prstGeom>
+          <a:noFill/>
+        </p:spPr>
+        <p:txBody>
+          <a:bodyPr wrap="square" lIns="0" rIns="0" tIns="0" bIns="0" anchor="t">
+            <a:spAutoFit/>
+          </a:bodyPr>
+          <a:lstStyle/>
+          <a:p>
+            <a:pPr algn="l"/>
+            <a:r>
+              <a:rPr sz="1500" b="0" i="0">
+                <a:solidFill>
+                  <a:srgbClr val="1F2933"/>
+                </a:solidFill>
+                <a:latin typeface="Calibri"/>
+              </a:rPr>
+              <a:t>of ads cite no rating, guarantee, statistic or offer of any kind</a:t>
+            </a:r>
+          </a:p>
+        </p:txBody>
+      </p:sp>
+      <p:sp>
+        <p:nvSpPr>
+          <p:cNvPr id="7" name="TextBox 6"/>
+          <p:cNvSpPr txBox="1"/>
+          <p:nvPr/>
+        </p:nvSpPr>
+        <p:spPr>
+          <a:xfrm>
+            <a:off x="6400800" y="2103120"/>
+            <a:ext cx="5120640" cy="365760"/>
           </a:xfrm>
           <a:prstGeom prst="rect">
             <a:avLst/>
@@ -7167,66 +7969,101 @@
             <a:r>
               <a:rPr sz="1500" b="1" i="0">
                 <a:solidFill>
-                  <a:srgbClr val="14181C"/>
-                </a:solidFill>
-                <a:latin typeface="Calibri"/>
-              </a:rPr>
-              <a:t>What exists</a:t>
-            </a:r>
-          </a:p>
-        </p:txBody>
-      </p:sp>
-      <p:sp>
-        <p:nvSpPr>
-          <p:cNvPr id="7" name="TextBox 6"/>
-          <p:cNvSpPr txBox="1"/>
-          <p:nvPr/>
-        </p:nvSpPr>
-        <p:spPr>
-          <a:xfrm>
-            <a:off x="914400" y="3273552"/>
-            <a:ext cx="2880360" cy="1737360"/>
-          </a:xfrm>
-          <a:prstGeom prst="rect">
-            <a:avLst/>
-          </a:prstGeom>
-          <a:noFill/>
-        </p:spPr>
-        <p:txBody>
-          <a:bodyPr wrap="square" lIns="0" rIns="0" tIns="0" bIns="0" anchor="t">
-            <a:spAutoFit/>
-          </a:bodyPr>
-          <a:lstStyle/>
-          <a:p>
-            <a:pPr algn="l"/>
-            <a:r>
-              <a:rPr sz="1250" b="0" i="0">
-                <a:solidFill>
-                  <a:srgbClr val="6B7280"/>
-                </a:solidFill>
-                <a:latin typeface="Calibri"/>
-              </a:rPr>
-              <a:t>Gymshark runs couch-to-5K and half-marathon coaching. Alo has a membership tier. Tracksmith sells Boston running heritage.</a:t>
-            </a:r>
-          </a:p>
-        </p:txBody>
-      </p:sp>
-      <p:sp>
-        <p:nvSpPr>
-          <p:cNvPr id="8" name="Rectangle 7"/>
+                  <a:srgbClr val="1F2933"/>
+                </a:solidFill>
+                <a:latin typeface="Calibri"/>
+              </a:rPr>
+              <a:t>Where proof does appear, it is wildly uneven</a:t>
+            </a:r>
+          </a:p>
+        </p:txBody>
+      </p:sp>
+      <p:sp>
+        <p:nvSpPr>
+          <p:cNvPr id="8" name="TextBox 7"/>
+          <p:cNvSpPr txBox="1"/>
+          <p:nvPr/>
+        </p:nvSpPr>
+        <p:spPr>
+          <a:xfrm>
+            <a:off x="6400800" y="2606040"/>
+            <a:ext cx="2468880" cy="292608"/>
+          </a:xfrm>
+          <a:prstGeom prst="rect">
+            <a:avLst/>
+          </a:prstGeom>
+          <a:noFill/>
+        </p:spPr>
+        <p:txBody>
+          <a:bodyPr wrap="square" lIns="0" rIns="0" tIns="0" bIns="0" anchor="t">
+            <a:spAutoFit/>
+          </a:bodyPr>
+          <a:lstStyle/>
+          <a:p>
+            <a:pPr algn="l"/>
+            <a:r>
+              <a:rPr sz="1300" b="0" i="0">
+                <a:solidFill>
+                  <a:srgbClr val="1F2933"/>
+                </a:solidFill>
+                <a:latin typeface="Calibri"/>
+              </a:rPr>
+              <a:t>Alo Yoga</a:t>
+            </a:r>
+          </a:p>
+        </p:txBody>
+      </p:sp>
+      <p:sp>
+        <p:nvSpPr>
+          <p:cNvPr id="9" name="TextBox 8"/>
+          <p:cNvSpPr txBox="1"/>
+          <p:nvPr/>
+        </p:nvSpPr>
+        <p:spPr>
+          <a:xfrm>
+            <a:off x="8778240" y="2606040"/>
+            <a:ext cx="2743200" cy="292608"/>
+          </a:xfrm>
+          <a:prstGeom prst="rect">
+            <a:avLst/>
+          </a:prstGeom>
+          <a:noFill/>
+        </p:spPr>
+        <p:txBody>
+          <a:bodyPr wrap="square" lIns="0" rIns="0" tIns="0" bIns="0" anchor="t">
+            <a:spAutoFit/>
+          </a:bodyPr>
+          <a:lstStyle/>
+          <a:p>
+            <a:pPr algn="r"/>
+            <a:r>
+              <a:rPr sz="1300" b="0" i="0">
+                <a:solidFill>
+                  <a:srgbClr val="44515F"/>
+                </a:solidFill>
+                <a:latin typeface="Calibri"/>
+              </a:rPr>
+              <a:t>21,615 reviews</a:t>
+            </a:r>
+          </a:p>
+        </p:txBody>
+      </p:sp>
+      <p:sp>
+        <p:nvSpPr>
+          <p:cNvPr id="10" name="Rectangle 9"/>
           <p:cNvSpPr/>
           <p:nvPr/>
         </p:nvSpPr>
         <p:spPr>
           <a:xfrm>
-            <a:off x="4315968" y="2578608"/>
-            <a:ext cx="3429000" cy="2560320"/>
+            <a:off x="6400800" y="2907792"/>
+            <a:ext cx="5120640" cy="7315"/>
           </a:xfrm>
           <a:prstGeom prst="rect">
             <a:avLst/>
           </a:prstGeom>
           <a:solidFill>
-            <a:srgbClr val="F2F3F5"/>
+            <a:srgbClr val="D5DDE4"/>
           </a:solidFill>
           <a:ln>
             <a:noFill/>
@@ -7257,90 +8094,90 @@
       </p:sp>
       <p:sp>
         <p:nvSpPr>
-          <p:cNvPr id="9" name="TextBox 8"/>
-          <p:cNvSpPr txBox="1"/>
-          <p:nvPr/>
-        </p:nvSpPr>
-        <p:spPr>
-          <a:xfrm>
-            <a:off x="4590288" y="2816352"/>
-            <a:ext cx="2880360" cy="365760"/>
-          </a:xfrm>
-          <a:prstGeom prst="rect">
-            <a:avLst/>
-          </a:prstGeom>
-          <a:noFill/>
-        </p:spPr>
-        <p:txBody>
-          <a:bodyPr wrap="square" lIns="0" rIns="0" tIns="0" bIns="0" anchor="t">
-            <a:spAutoFit/>
-          </a:bodyPr>
-          <a:lstStyle/>
-          <a:p>
-            <a:pPr algn="l"/>
-            <a:r>
-              <a:rPr sz="1500" b="1" i="0">
-                <a:solidFill>
-                  <a:srgbClr val="14181C"/>
-                </a:solidFill>
-                <a:latin typeface="Calibri"/>
-              </a:rPr>
-              <a:t>What is missing</a:t>
-            </a:r>
-          </a:p>
-        </p:txBody>
-      </p:sp>
-      <p:sp>
-        <p:nvSpPr>
-          <p:cNvPr id="10" name="TextBox 9"/>
-          <p:cNvSpPr txBox="1"/>
-          <p:nvPr/>
-        </p:nvSpPr>
-        <p:spPr>
-          <a:xfrm>
-            <a:off x="4590288" y="3273552"/>
-            <a:ext cx="2880360" cy="1737360"/>
-          </a:xfrm>
-          <a:prstGeom prst="rect">
-            <a:avLst/>
-          </a:prstGeom>
-          <a:noFill/>
-        </p:spPr>
-        <p:txBody>
-          <a:bodyPr wrap="square" lIns="0" rIns="0" tIns="0" bIns="0" anchor="t">
-            <a:spAutoFit/>
-          </a:bodyPr>
-          <a:lstStyle/>
-          <a:p>
-            <a:pPr algn="l"/>
-            <a:r>
-              <a:rPr sz="1250" b="0" i="0">
-                <a:solidFill>
-                  <a:srgbClr val="6B7280"/>
-                </a:solidFill>
-                <a:latin typeface="Calibri"/>
-              </a:rPr>
-              <a:t>Not one publishes a participation number, a completion rate or a member count. Belonging is tone of voice, not evidence.</a:t>
-            </a:r>
-          </a:p>
-        </p:txBody>
-      </p:sp>
-      <p:sp>
-        <p:nvSpPr>
-          <p:cNvPr id="11" name="Rectangle 10"/>
+          <p:cNvPr id="11" name="TextBox 10"/>
+          <p:cNvSpPr txBox="1"/>
+          <p:nvPr/>
+        </p:nvSpPr>
+        <p:spPr>
+          <a:xfrm>
+            <a:off x="6400800" y="2971800"/>
+            <a:ext cx="2468880" cy="292608"/>
+          </a:xfrm>
+          <a:prstGeom prst="rect">
+            <a:avLst/>
+          </a:prstGeom>
+          <a:noFill/>
+        </p:spPr>
+        <p:txBody>
+          <a:bodyPr wrap="square" lIns="0" rIns="0" tIns="0" bIns="0" anchor="t">
+            <a:spAutoFit/>
+          </a:bodyPr>
+          <a:lstStyle/>
+          <a:p>
+            <a:pPr algn="l"/>
+            <a:r>
+              <a:rPr sz="1300" b="0" i="0">
+                <a:solidFill>
+                  <a:srgbClr val="1F2933"/>
+                </a:solidFill>
+                <a:latin typeface="Calibri"/>
+              </a:rPr>
+              <a:t>Vuori</a:t>
+            </a:r>
+          </a:p>
+        </p:txBody>
+      </p:sp>
+      <p:sp>
+        <p:nvSpPr>
+          <p:cNvPr id="12" name="TextBox 11"/>
+          <p:cNvSpPr txBox="1"/>
+          <p:nvPr/>
+        </p:nvSpPr>
+        <p:spPr>
+          <a:xfrm>
+            <a:off x="8778240" y="2971800"/>
+            <a:ext cx="2743200" cy="292608"/>
+          </a:xfrm>
+          <a:prstGeom prst="rect">
+            <a:avLst/>
+          </a:prstGeom>
+          <a:noFill/>
+        </p:spPr>
+        <p:txBody>
+          <a:bodyPr wrap="square" lIns="0" rIns="0" tIns="0" bIns="0" anchor="t">
+            <a:spAutoFit/>
+          </a:bodyPr>
+          <a:lstStyle/>
+          <a:p>
+            <a:pPr algn="r"/>
+            <a:r>
+              <a:rPr sz="1300" b="0" i="0">
+                <a:solidFill>
+                  <a:srgbClr val="44515F"/>
+                </a:solidFill>
+                <a:latin typeface="Calibri"/>
+              </a:rPr>
+              <a:t>13,593 reviews</a:t>
+            </a:r>
+          </a:p>
+        </p:txBody>
+      </p:sp>
+      <p:sp>
+        <p:nvSpPr>
+          <p:cNvPr id="13" name="Rectangle 12"/>
           <p:cNvSpPr/>
           <p:nvPr/>
         </p:nvSpPr>
         <p:spPr>
           <a:xfrm>
-            <a:off x="7991855" y="2578608"/>
-            <a:ext cx="3429000" cy="2560320"/>
+            <a:off x="6400800" y="3273552"/>
+            <a:ext cx="5120640" cy="7315"/>
           </a:xfrm>
           <a:prstGeom prst="rect">
             <a:avLst/>
           </a:prstGeom>
           <a:solidFill>
-            <a:srgbClr val="FDEEE8"/>
+            <a:srgbClr val="D5DDE4"/>
           </a:solidFill>
           <a:ln>
             <a:noFill/>
@@ -7371,466 +8208,90 @@
       </p:sp>
       <p:sp>
         <p:nvSpPr>
-          <p:cNvPr id="12" name="TextBox 11"/>
-          <p:cNvSpPr txBox="1"/>
-          <p:nvPr/>
-        </p:nvSpPr>
-        <p:spPr>
-          <a:xfrm>
-            <a:off x="8266175" y="2816352"/>
-            <a:ext cx="2880360" cy="365760"/>
-          </a:xfrm>
-          <a:prstGeom prst="rect">
-            <a:avLst/>
-          </a:prstGeom>
-          <a:noFill/>
-        </p:spPr>
-        <p:txBody>
-          <a:bodyPr wrap="square" lIns="0" rIns="0" tIns="0" bIns="0" anchor="t">
-            <a:spAutoFit/>
-          </a:bodyPr>
-          <a:lstStyle/>
-          <a:p>
-            <a:pPr algn="l"/>
-            <a:r>
-              <a:rPr sz="1500" b="1" i="0">
-                <a:solidFill>
-                  <a:srgbClr val="E8562A"/>
-                </a:solidFill>
-                <a:latin typeface="Calibri"/>
-              </a:rPr>
-              <a:t>The move</a:t>
-            </a:r>
-          </a:p>
-        </p:txBody>
-      </p:sp>
-      <p:sp>
-        <p:nvSpPr>
-          <p:cNvPr id="13" name="TextBox 12"/>
-          <p:cNvSpPr txBox="1"/>
-          <p:nvPr/>
-        </p:nvSpPr>
-        <p:spPr>
-          <a:xfrm>
-            <a:off x="8266175" y="3273552"/>
-            <a:ext cx="2880360" cy="1737360"/>
-          </a:xfrm>
-          <a:prstGeom prst="rect">
-            <a:avLst/>
-          </a:prstGeom>
-          <a:noFill/>
-        </p:spPr>
-        <p:txBody>
-          <a:bodyPr wrap="square" lIns="0" rIns="0" tIns="0" bIns="0" anchor="t">
-            <a:spAutoFit/>
-          </a:bodyPr>
-          <a:lstStyle/>
-          <a:p>
-            <a:pPr algn="l"/>
-            <a:r>
-              <a:rPr sz="1250" b="0" i="0">
-                <a:solidFill>
-                  <a:srgbClr val="8C3A1B"/>
-                </a:solidFill>
-                <a:latin typeface="Calibri"/>
-              </a:rPr>
-              <a:t>A named programme with published numbers, placed where competitors put discount percentages. The one claim a rival cannot copy by reformulating a fabric.</a:t>
-            </a:r>
-          </a:p>
-        </p:txBody>
-      </p:sp>
-      <p:sp>
-        <p:nvSpPr>
           <p:cNvPr id="14" name="TextBox 13"/>
           <p:cNvSpPr txBox="1"/>
           <p:nvPr/>
         </p:nvSpPr>
         <p:spPr>
           <a:xfrm>
-            <a:off x="640080" y="5440680"/>
-            <a:ext cx="10911535" cy="457200"/>
-          </a:xfrm>
-          <a:prstGeom prst="rect">
-            <a:avLst/>
-          </a:prstGeom>
-          <a:noFill/>
-        </p:spPr>
-        <p:txBody>
-          <a:bodyPr wrap="square" lIns="0" rIns="0" tIns="0" bIns="0" anchor="t">
-            <a:spAutoFit/>
-          </a:bodyPr>
-          <a:lstStyle/>
-          <a:p>
-            <a:pPr algn="l"/>
-            <a:r>
-              <a:rPr sz="1400" b="0" i="0">
-                <a:solidFill>
-                  <a:srgbClr val="14181C"/>
-                </a:solidFill>
-                <a:latin typeface="Calibri"/>
-              </a:rPr>
-              <a:t>Spend against runners and gym training, not the everyday athleisure block where lululemon, Vuori and Fabletics are stacked.</a:t>
-            </a:r>
-          </a:p>
-        </p:txBody>
-      </p:sp>
-    </p:spTree>
-  </p:cSld>
-  <p:clrMapOvr>
-    <a:masterClrMapping/>
-  </p:clrMapOvr>
-</p:sld>
-</file>
-
-<file path=ppt/slides/slide7.xml><?xml version="1.0" encoding="utf-8"?>
-<p:sld xmlns:a="http://schemas.openxmlformats.org/drawingml/2006/main" xmlns:p="http://schemas.openxmlformats.org/presentationml/2006/main" xmlns:r="http://schemas.openxmlformats.org/officeDocument/2006/relationships">
-  <p:cSld>
-    <p:bg>
-      <p:bgPr>
-        <a:solidFill>
-          <a:srgbClr val="14181C"/>
-        </a:solidFill>
-        <a:effectLst/>
-      </p:bgPr>
-    </p:bg>
-    <p:spTree>
-      <p:nvGrpSpPr>
-        <p:cNvPr id="1" name=""/>
-        <p:cNvGrpSpPr/>
-        <p:nvPr/>
-      </p:nvGrpSpPr>
-      <p:grpSpPr/>
-      <p:sp>
-        <p:nvSpPr>
-          <p:cNvPr id="2" name="TextBox 1"/>
-          <p:cNvSpPr txBox="1"/>
-          <p:nvPr/>
-        </p:nvSpPr>
-        <p:spPr>
-          <a:xfrm>
-            <a:off x="640080" y="310896"/>
-            <a:ext cx="10911535" cy="256032"/>
-          </a:xfrm>
-          <a:prstGeom prst="rect">
-            <a:avLst/>
-          </a:prstGeom>
-          <a:noFill/>
-        </p:spPr>
-        <p:txBody>
-          <a:bodyPr wrap="square" lIns="0" rIns="0" tIns="0" bIns="0" anchor="t">
-            <a:spAutoFit/>
-          </a:bodyPr>
-          <a:lstStyle/>
-          <a:p>
-            <a:pPr algn="l"/>
-            <a:r>
-              <a:rPr sz="1100" b="1" i="0">
-                <a:solidFill>
-                  <a:srgbClr val="FF7A4D"/>
-                </a:solidFill>
-                <a:latin typeface="Calibri"/>
-              </a:rPr>
-              <a:t>WHAT WE GOT WRONG</a:t>
-            </a:r>
-          </a:p>
-        </p:txBody>
-      </p:sp>
-      <p:sp>
-        <p:nvSpPr>
-          <p:cNvPr id="3" name="TextBox 2"/>
-          <p:cNvSpPr txBox="1"/>
-          <p:nvPr/>
-        </p:nvSpPr>
-        <p:spPr>
-          <a:xfrm>
-            <a:off x="640080" y="566928"/>
-            <a:ext cx="10911535" cy="960120"/>
-          </a:xfrm>
-          <a:prstGeom prst="rect">
-            <a:avLst/>
-          </a:prstGeom>
-          <a:noFill/>
-        </p:spPr>
-        <p:txBody>
-          <a:bodyPr wrap="square" lIns="0" rIns="0" tIns="0" bIns="0" anchor="t">
-            <a:spAutoFit/>
-          </a:bodyPr>
-          <a:lstStyle/>
-          <a:p>
-            <a:pPr algn="l"/>
-            <a:r>
-              <a:rPr sz="3600" b="1" i="0">
-                <a:solidFill>
-                  <a:srgbClr val="FFFFFF"/>
-                </a:solidFill>
-                <a:latin typeface="Cambria"/>
-              </a:rPr>
-              <a:t>Our first answer was confident and false</a:t>
-            </a:r>
-          </a:p>
-        </p:txBody>
-      </p:sp>
-      <p:sp>
-        <p:nvSpPr>
-          <p:cNvPr id="4" name="TextBox 3"/>
-          <p:cNvSpPr txBox="1"/>
-          <p:nvPr/>
-        </p:nvSpPr>
-        <p:spPr>
-          <a:xfrm>
-            <a:off x="640080" y="1920240"/>
-            <a:ext cx="10911535" cy="411480"/>
-          </a:xfrm>
-          <a:prstGeom prst="rect">
-            <a:avLst/>
-          </a:prstGeom>
-          <a:noFill/>
-        </p:spPr>
-        <p:txBody>
-          <a:bodyPr wrap="square" lIns="0" rIns="0" tIns="0" bIns="0" anchor="t">
-            <a:spAutoFit/>
-          </a:bodyPr>
-          <a:lstStyle/>
-          <a:p>
-            <a:pPr algn="l"/>
-            <a:r>
-              <a:rPr sz="1700" b="0" i="0">
-                <a:solidFill>
-                  <a:srgbClr val="FF7A4D"/>
-                </a:solidFill>
-                <a:latin typeface="Calibri"/>
-              </a:rPr>
-              <a:t>At 42 ads we concluded three brands cited no proof at all. That was wrong.</a:t>
-            </a:r>
-          </a:p>
-        </p:txBody>
-      </p:sp>
-      <p:sp>
-        <p:nvSpPr>
-          <p:cNvPr id="5" name="TextBox 4"/>
-          <p:cNvSpPr txBox="1"/>
-          <p:nvPr/>
-        </p:nvSpPr>
-        <p:spPr>
-          <a:xfrm>
-            <a:off x="640080" y="2633472"/>
-            <a:ext cx="2011680" cy="274320"/>
-          </a:xfrm>
-          <a:prstGeom prst="rect">
-            <a:avLst/>
-          </a:prstGeom>
-          <a:noFill/>
-        </p:spPr>
-        <p:txBody>
-          <a:bodyPr wrap="square" lIns="0" rIns="0" tIns="0" bIns="0" anchor="t">
-            <a:spAutoFit/>
-          </a:bodyPr>
-          <a:lstStyle/>
-          <a:p>
-            <a:pPr algn="l"/>
-            <a:r>
-              <a:rPr sz="1100" b="1" i="0">
-                <a:solidFill>
-                  <a:srgbClr val="7A828C"/>
-                </a:solidFill>
-                <a:latin typeface="Calibri"/>
-              </a:rPr>
-              <a:t>Brand</a:t>
-            </a:r>
-          </a:p>
-        </p:txBody>
-      </p:sp>
-      <p:sp>
-        <p:nvSpPr>
-          <p:cNvPr id="6" name="TextBox 5"/>
-          <p:cNvSpPr txBox="1"/>
-          <p:nvPr/>
-        </p:nvSpPr>
-        <p:spPr>
-          <a:xfrm>
-            <a:off x="2743200" y="2633472"/>
-            <a:ext cx="4023360" cy="274320"/>
-          </a:xfrm>
-          <a:prstGeom prst="rect">
-            <a:avLst/>
-          </a:prstGeom>
-          <a:noFill/>
-        </p:spPr>
-        <p:txBody>
-          <a:bodyPr wrap="square" lIns="0" rIns="0" tIns="0" bIns="0" anchor="t">
-            <a:spAutoFit/>
-          </a:bodyPr>
-          <a:lstStyle/>
-          <a:p>
-            <a:pPr algn="l"/>
-            <a:r>
-              <a:rPr sz="1100" b="1" i="0">
-                <a:solidFill>
-                  <a:srgbClr val="7A828C"/>
-                </a:solidFill>
-                <a:latin typeface="Calibri"/>
-              </a:rPr>
-              <a:t>What we said</a:t>
-            </a:r>
-          </a:p>
-        </p:txBody>
-      </p:sp>
-      <p:sp>
-        <p:nvSpPr>
-          <p:cNvPr id="7" name="TextBox 6"/>
-          <p:cNvSpPr txBox="1"/>
-          <p:nvPr/>
-        </p:nvSpPr>
-        <p:spPr>
-          <a:xfrm>
-            <a:off x="7040880" y="2633472"/>
-            <a:ext cx="4206240" cy="274320"/>
-          </a:xfrm>
-          <a:prstGeom prst="rect">
-            <a:avLst/>
-          </a:prstGeom>
-          <a:noFill/>
-        </p:spPr>
-        <p:txBody>
-          <a:bodyPr wrap="square" lIns="0" rIns="0" tIns="0" bIns="0" anchor="t">
-            <a:spAutoFit/>
-          </a:bodyPr>
-          <a:lstStyle/>
-          <a:p>
-            <a:pPr algn="l"/>
-            <a:r>
-              <a:rPr sz="1100" b="1" i="0">
-                <a:solidFill>
-                  <a:srgbClr val="7A828C"/>
-                </a:solidFill>
-                <a:latin typeface="Calibri"/>
-              </a:rPr>
-              <a:t>What they actually run</a:t>
-            </a:r>
-          </a:p>
-        </p:txBody>
-      </p:sp>
-      <p:sp>
-        <p:nvSpPr>
-          <p:cNvPr id="8" name="TextBox 7"/>
-          <p:cNvSpPr txBox="1"/>
-          <p:nvPr/>
-        </p:nvSpPr>
-        <p:spPr>
-          <a:xfrm>
-            <a:off x="640080" y="3035808"/>
-            <a:ext cx="2011680" cy="411480"/>
-          </a:xfrm>
-          <a:prstGeom prst="rect">
-            <a:avLst/>
-          </a:prstGeom>
-          <a:noFill/>
-        </p:spPr>
-        <p:txBody>
-          <a:bodyPr wrap="square" lIns="0" rIns="0" tIns="0" bIns="0" anchor="t">
-            <a:spAutoFit/>
-          </a:bodyPr>
-          <a:lstStyle/>
-          <a:p>
-            <a:pPr algn="l"/>
-            <a:r>
-              <a:rPr sz="1400" b="1" i="0">
-                <a:solidFill>
-                  <a:srgbClr val="FFFFFF"/>
-                </a:solidFill>
-                <a:latin typeface="Calibri"/>
-              </a:rPr>
-              <a:t>Vuori</a:t>
-            </a:r>
-          </a:p>
-        </p:txBody>
-      </p:sp>
-      <p:sp>
-        <p:nvSpPr>
-          <p:cNvPr id="9" name="TextBox 8"/>
-          <p:cNvSpPr txBox="1"/>
-          <p:nvPr/>
-        </p:nvSpPr>
-        <p:spPr>
-          <a:xfrm>
-            <a:off x="2743200" y="3035808"/>
-            <a:ext cx="4023360" cy="548640"/>
-          </a:xfrm>
-          <a:prstGeom prst="rect">
-            <a:avLst/>
-          </a:prstGeom>
-          <a:noFill/>
-        </p:spPr>
-        <p:txBody>
-          <a:bodyPr wrap="square" lIns="0" rIns="0" tIns="0" bIns="0" anchor="t">
-            <a:spAutoFit/>
-          </a:bodyPr>
-          <a:lstStyle/>
-          <a:p>
-            <a:pPr algn="l"/>
-            <a:r>
-              <a:rPr sz="1250" b="0" i="1">
-                <a:solidFill>
-                  <a:srgbClr val="9BA3AD"/>
-                </a:solidFill>
-                <a:latin typeface="Calibri"/>
-              </a:rPr>
-              <a:t>“The biggest proof gap in the group”</a:t>
-            </a:r>
-          </a:p>
-        </p:txBody>
-      </p:sp>
-      <p:sp>
-        <p:nvSpPr>
-          <p:cNvPr id="10" name="TextBox 9"/>
-          <p:cNvSpPr txBox="1"/>
-          <p:nvPr/>
-        </p:nvSpPr>
-        <p:spPr>
-          <a:xfrm>
-            <a:off x="7040880" y="3035808"/>
-            <a:ext cx="4206240" cy="640080"/>
-          </a:xfrm>
-          <a:prstGeom prst="rect">
-            <a:avLst/>
-          </a:prstGeom>
-          <a:noFill/>
-        </p:spPr>
-        <p:txBody>
-          <a:bodyPr wrap="square" lIns="0" rIns="0" tIns="0" bIns="0" anchor="t">
-            <a:spAutoFit/>
-          </a:bodyPr>
-          <a:lstStyle/>
-          <a:p>
-            <a:pPr algn="l"/>
-            <a:r>
-              <a:rPr sz="1250" b="0" i="0">
-                <a:solidFill>
-                  <a:srgbClr val="FF7A4D"/>
-                </a:solidFill>
-                <a:latin typeface="Calibri"/>
-              </a:rPr>
-              <a:t>4.6 from 13,593 reviews, 100% product guarantee</a:t>
-            </a:r>
-          </a:p>
-        </p:txBody>
-      </p:sp>
-      <p:sp>
-        <p:nvSpPr>
-          <p:cNvPr id="11" name="Rectangle 10"/>
+            <a:off x="6400800" y="3337560"/>
+            <a:ext cx="2468880" cy="292608"/>
+          </a:xfrm>
+          <a:prstGeom prst="rect">
+            <a:avLst/>
+          </a:prstGeom>
+          <a:noFill/>
+        </p:spPr>
+        <p:txBody>
+          <a:bodyPr wrap="square" lIns="0" rIns="0" tIns="0" bIns="0" anchor="t">
+            <a:spAutoFit/>
+          </a:bodyPr>
+          <a:lstStyle/>
+          <a:p>
+            <a:pPr algn="l"/>
+            <a:r>
+              <a:rPr sz="1300" b="0" i="0">
+                <a:solidFill>
+                  <a:srgbClr val="1F2933"/>
+                </a:solidFill>
+                <a:latin typeface="Calibri"/>
+              </a:rPr>
+              <a:t>Nike</a:t>
+            </a:r>
+          </a:p>
+        </p:txBody>
+      </p:sp>
+      <p:sp>
+        <p:nvSpPr>
+          <p:cNvPr id="15" name="TextBox 14"/>
+          <p:cNvSpPr txBox="1"/>
+          <p:nvPr/>
+        </p:nvSpPr>
+        <p:spPr>
+          <a:xfrm>
+            <a:off x="8778240" y="3337560"/>
+            <a:ext cx="2743200" cy="292608"/>
+          </a:xfrm>
+          <a:prstGeom prst="rect">
+            <a:avLst/>
+          </a:prstGeom>
+          <a:noFill/>
+        </p:spPr>
+        <p:txBody>
+          <a:bodyPr wrap="square" lIns="0" rIns="0" tIns="0" bIns="0" anchor="t">
+            <a:spAutoFit/>
+          </a:bodyPr>
+          <a:lstStyle/>
+          <a:p>
+            <a:pPr algn="r"/>
+            <a:r>
+              <a:rPr sz="1300" b="0" i="0">
+                <a:solidFill>
+                  <a:srgbClr val="44515F"/>
+                </a:solidFill>
+                <a:latin typeface="Calibri"/>
+              </a:rPr>
+              <a:t>6,660 reviews</a:t>
+            </a:r>
+          </a:p>
+        </p:txBody>
+      </p:sp>
+      <p:sp>
+        <p:nvSpPr>
+          <p:cNvPr id="16" name="Rectangle 15"/>
           <p:cNvSpPr/>
           <p:nvPr/>
         </p:nvSpPr>
         <p:spPr>
           <a:xfrm>
-            <a:off x="640080" y="3675887"/>
-            <a:ext cx="10911535" cy="9144"/>
+            <a:off x="6400800" y="3639312"/>
+            <a:ext cx="5120640" cy="7315"/>
           </a:xfrm>
           <a:prstGeom prst="rect">
             <a:avLst/>
           </a:prstGeom>
           <a:solidFill>
-            <a:srgbClr val="2C333B"/>
+            <a:srgbClr val="D5DDE4"/>
           </a:solidFill>
           <a:ln>
             <a:noFill/>
@@ -7861,125 +8322,90 @@
       </p:sp>
       <p:sp>
         <p:nvSpPr>
-          <p:cNvPr id="12" name="TextBox 11"/>
-          <p:cNvSpPr txBox="1"/>
-          <p:nvPr/>
-        </p:nvSpPr>
-        <p:spPr>
-          <a:xfrm>
-            <a:off x="640080" y="3822191"/>
-            <a:ext cx="2011680" cy="411480"/>
-          </a:xfrm>
-          <a:prstGeom prst="rect">
-            <a:avLst/>
-          </a:prstGeom>
-          <a:noFill/>
-        </p:spPr>
-        <p:txBody>
-          <a:bodyPr wrap="square" lIns="0" rIns="0" tIns="0" bIns="0" anchor="t">
-            <a:spAutoFit/>
-          </a:bodyPr>
-          <a:lstStyle/>
-          <a:p>
-            <a:pPr algn="l"/>
-            <a:r>
-              <a:rPr sz="1400" b="1" i="0">
-                <a:solidFill>
-                  <a:srgbClr val="FFFFFF"/>
-                </a:solidFill>
-                <a:latin typeface="Calibri"/>
-              </a:rPr>
-              <a:t>Gymshark</a:t>
-            </a:r>
-          </a:p>
-        </p:txBody>
-      </p:sp>
-      <p:sp>
-        <p:nvSpPr>
-          <p:cNvPr id="13" name="TextBox 12"/>
-          <p:cNvSpPr txBox="1"/>
-          <p:nvPr/>
-        </p:nvSpPr>
-        <p:spPr>
-          <a:xfrm>
-            <a:off x="2743200" y="3822191"/>
-            <a:ext cx="4023360" cy="548640"/>
-          </a:xfrm>
-          <a:prstGeom prst="rect">
-            <a:avLst/>
-          </a:prstGeom>
-          <a:noFill/>
-        </p:spPr>
-        <p:txBody>
-          <a:bodyPr wrap="square" lIns="0" rIns="0" tIns="0" bIns="0" anchor="t">
-            <a:spAutoFit/>
-          </a:bodyPr>
-          <a:lstStyle/>
-          <a:p>
-            <a:pPr algn="l"/>
-            <a:r>
-              <a:rPr sz="1250" b="0" i="1">
-                <a:solidFill>
-                  <a:srgbClr val="9BA3AD"/>
-                </a:solidFill>
-                <a:latin typeface="Calibri"/>
-              </a:rPr>
-              <a:t>“Free returns only”</a:t>
-            </a:r>
-          </a:p>
-        </p:txBody>
-      </p:sp>
-      <p:sp>
-        <p:nvSpPr>
-          <p:cNvPr id="14" name="TextBox 13"/>
-          <p:cNvSpPr txBox="1"/>
-          <p:nvPr/>
-        </p:nvSpPr>
-        <p:spPr>
-          <a:xfrm>
-            <a:off x="7040880" y="3822191"/>
-            <a:ext cx="4206240" cy="640080"/>
-          </a:xfrm>
-          <a:prstGeom prst="rect">
-            <a:avLst/>
-          </a:prstGeom>
-          <a:noFill/>
-        </p:spPr>
-        <p:txBody>
-          <a:bodyPr wrap="square" lIns="0" rIns="0" tIns="0" bIns="0" anchor="t">
-            <a:spAutoFit/>
-          </a:bodyPr>
-          <a:lstStyle/>
-          <a:p>
-            <a:pPr algn="l"/>
-            <a:r>
-              <a:rPr sz="1250" b="0" i="0">
-                <a:solidFill>
-                  <a:srgbClr val="FF7A4D"/>
-                </a:solidFill>
-                <a:latin typeface="Calibri"/>
-              </a:rPr>
-              <a:t>4.6 from 200 reviews</a:t>
-            </a:r>
-          </a:p>
-        </p:txBody>
-      </p:sp>
-      <p:sp>
-        <p:nvSpPr>
-          <p:cNvPr id="15" name="Rectangle 14"/>
+          <p:cNvPr id="17" name="TextBox 16"/>
+          <p:cNvSpPr txBox="1"/>
+          <p:nvPr/>
+        </p:nvSpPr>
+        <p:spPr>
+          <a:xfrm>
+            <a:off x="6400800" y="3703320"/>
+            <a:ext cx="2468880" cy="292608"/>
+          </a:xfrm>
+          <a:prstGeom prst="rect">
+            <a:avLst/>
+          </a:prstGeom>
+          <a:noFill/>
+        </p:spPr>
+        <p:txBody>
+          <a:bodyPr wrap="square" lIns="0" rIns="0" tIns="0" bIns="0" anchor="t">
+            <a:spAutoFit/>
+          </a:bodyPr>
+          <a:lstStyle/>
+          <a:p>
+            <a:pPr algn="l"/>
+            <a:r>
+              <a:rPr sz="1300" b="0" i="0">
+                <a:solidFill>
+                  <a:srgbClr val="1F2933"/>
+                </a:solidFill>
+                <a:latin typeface="Calibri"/>
+              </a:rPr>
+              <a:t>Under Armour</a:t>
+            </a:r>
+          </a:p>
+        </p:txBody>
+      </p:sp>
+      <p:sp>
+        <p:nvSpPr>
+          <p:cNvPr id="18" name="TextBox 17"/>
+          <p:cNvSpPr txBox="1"/>
+          <p:nvPr/>
+        </p:nvSpPr>
+        <p:spPr>
+          <a:xfrm>
+            <a:off x="8778240" y="3703320"/>
+            <a:ext cx="2743200" cy="292608"/>
+          </a:xfrm>
+          <a:prstGeom prst="rect">
+            <a:avLst/>
+          </a:prstGeom>
+          <a:noFill/>
+        </p:spPr>
+        <p:txBody>
+          <a:bodyPr wrap="square" lIns="0" rIns="0" tIns="0" bIns="0" anchor="t">
+            <a:spAutoFit/>
+          </a:bodyPr>
+          <a:lstStyle/>
+          <a:p>
+            <a:pPr algn="r"/>
+            <a:r>
+              <a:rPr sz="1300" b="0" i="0">
+                <a:solidFill>
+                  <a:srgbClr val="44515F"/>
+                </a:solidFill>
+                <a:latin typeface="Calibri"/>
+              </a:rPr>
+              <a:t>305 reviews</a:t>
+            </a:r>
+          </a:p>
+        </p:txBody>
+      </p:sp>
+      <p:sp>
+        <p:nvSpPr>
+          <p:cNvPr id="19" name="Rectangle 18"/>
           <p:cNvSpPr/>
           <p:nvPr/>
         </p:nvSpPr>
         <p:spPr>
           <a:xfrm>
-            <a:off x="640080" y="4462272"/>
-            <a:ext cx="10911535" cy="9144"/>
+            <a:off x="6400800" y="4005072"/>
+            <a:ext cx="5120640" cy="7315"/>
           </a:xfrm>
           <a:prstGeom prst="rect">
             <a:avLst/>
           </a:prstGeom>
           <a:solidFill>
-            <a:srgbClr val="2C333B"/>
+            <a:srgbClr val="D5DDE4"/>
           </a:solidFill>
           <a:ln>
             <a:noFill/>
@@ -8010,125 +8436,90 @@
       </p:sp>
       <p:sp>
         <p:nvSpPr>
-          <p:cNvPr id="16" name="TextBox 15"/>
-          <p:cNvSpPr txBox="1"/>
-          <p:nvPr/>
-        </p:nvSpPr>
-        <p:spPr>
-          <a:xfrm>
-            <a:off x="640080" y="4608576"/>
-            <a:ext cx="2011680" cy="411480"/>
-          </a:xfrm>
-          <a:prstGeom prst="rect">
-            <a:avLst/>
-          </a:prstGeom>
-          <a:noFill/>
-        </p:spPr>
-        <p:txBody>
-          <a:bodyPr wrap="square" lIns="0" rIns="0" tIns="0" bIns="0" anchor="t">
-            <a:spAutoFit/>
-          </a:bodyPr>
-          <a:lstStyle/>
-          <a:p>
-            <a:pPr algn="l"/>
-            <a:r>
-              <a:rPr sz="1400" b="1" i="0">
-                <a:solidFill>
-                  <a:srgbClr val="FFFFFF"/>
-                </a:solidFill>
-                <a:latin typeface="Calibri"/>
-              </a:rPr>
-              <a:t>lululemon</a:t>
-            </a:r>
-          </a:p>
-        </p:txBody>
-      </p:sp>
-      <p:sp>
-        <p:nvSpPr>
-          <p:cNvPr id="17" name="TextBox 16"/>
-          <p:cNvSpPr txBox="1"/>
-          <p:nvPr/>
-        </p:nvSpPr>
-        <p:spPr>
-          <a:xfrm>
-            <a:off x="2743200" y="4608576"/>
-            <a:ext cx="4023360" cy="548640"/>
-          </a:xfrm>
-          <a:prstGeom prst="rect">
-            <a:avLst/>
-          </a:prstGeom>
-          <a:noFill/>
-        </p:spPr>
-        <p:txBody>
-          <a:bodyPr wrap="square" lIns="0" rIns="0" tIns="0" bIns="0" anchor="t">
-            <a:spAutoFit/>
-          </a:bodyPr>
-          <a:lstStyle/>
-          <a:p>
-            <a:pPr algn="l"/>
-            <a:r>
-              <a:rPr sz="1250" b="0" i="1">
-                <a:solidFill>
-                  <a:srgbClr val="9BA3AD"/>
-                </a:solidFill>
-                <a:latin typeface="Calibri"/>
-              </a:rPr>
-              <a:t>“Fabric adjectives only”</a:t>
-            </a:r>
-          </a:p>
-        </p:txBody>
-      </p:sp>
-      <p:sp>
-        <p:nvSpPr>
-          <p:cNvPr id="18" name="TextBox 17"/>
-          <p:cNvSpPr txBox="1"/>
-          <p:nvPr/>
-        </p:nvSpPr>
-        <p:spPr>
-          <a:xfrm>
-            <a:off x="7040880" y="4608576"/>
-            <a:ext cx="4206240" cy="640080"/>
-          </a:xfrm>
-          <a:prstGeom prst="rect">
-            <a:avLst/>
-          </a:prstGeom>
-          <a:noFill/>
-        </p:spPr>
-        <p:txBody>
-          <a:bodyPr wrap="square" lIns="0" rIns="0" tIns="0" bIns="0" anchor="t">
-            <a:spAutoFit/>
-          </a:bodyPr>
-          <a:lstStyle/>
-          <a:p>
-            <a:pPr algn="l"/>
-            <a:r>
-              <a:rPr sz="1250" b="0" i="0">
-                <a:solidFill>
-                  <a:srgbClr val="FF7A4D"/>
-                </a:solidFill>
-                <a:latin typeface="Calibri"/>
-              </a:rPr>
-              <a:t>Three separate ratings</a:t>
-            </a:r>
-          </a:p>
-        </p:txBody>
-      </p:sp>
-      <p:sp>
-        <p:nvSpPr>
-          <p:cNvPr id="19" name="Rectangle 18"/>
+          <p:cNvPr id="20" name="TextBox 19"/>
+          <p:cNvSpPr txBox="1"/>
+          <p:nvPr/>
+        </p:nvSpPr>
+        <p:spPr>
+          <a:xfrm>
+            <a:off x="6400800" y="4069080"/>
+            <a:ext cx="2468880" cy="292608"/>
+          </a:xfrm>
+          <a:prstGeom prst="rect">
+            <a:avLst/>
+          </a:prstGeom>
+          <a:noFill/>
+        </p:spPr>
+        <p:txBody>
+          <a:bodyPr wrap="square" lIns="0" rIns="0" tIns="0" bIns="0" anchor="t">
+            <a:spAutoFit/>
+          </a:bodyPr>
+          <a:lstStyle/>
+          <a:p>
+            <a:pPr algn="l"/>
+            <a:r>
+              <a:rPr sz="1300" b="1" i="0">
+                <a:solidFill>
+                  <a:srgbClr val="C2410C"/>
+                </a:solidFill>
+                <a:latin typeface="Calibri"/>
+              </a:rPr>
+              <a:t>Arc’teryx</a:t>
+            </a:r>
+          </a:p>
+        </p:txBody>
+      </p:sp>
+      <p:sp>
+        <p:nvSpPr>
+          <p:cNvPr id="21" name="TextBox 20"/>
+          <p:cNvSpPr txBox="1"/>
+          <p:nvPr/>
+        </p:nvSpPr>
+        <p:spPr>
+          <a:xfrm>
+            <a:off x="8778240" y="4069080"/>
+            <a:ext cx="2743200" cy="292608"/>
+          </a:xfrm>
+          <a:prstGeom prst="rect">
+            <a:avLst/>
+          </a:prstGeom>
+          <a:noFill/>
+        </p:spPr>
+        <p:txBody>
+          <a:bodyPr wrap="square" lIns="0" rIns="0" tIns="0" bIns="0" anchor="t">
+            <a:spAutoFit/>
+          </a:bodyPr>
+          <a:lstStyle/>
+          <a:p>
+            <a:pPr algn="r"/>
+            <a:r>
+              <a:rPr sz="1300" b="1" i="0">
+                <a:solidFill>
+                  <a:srgbClr val="C2410C"/>
+                </a:solidFill>
+                <a:latin typeface="Calibri"/>
+              </a:rPr>
+              <a:t>24 reviews</a:t>
+            </a:r>
+          </a:p>
+        </p:txBody>
+      </p:sp>
+      <p:sp>
+        <p:nvSpPr>
+          <p:cNvPr id="22" name="Rectangle 21"/>
           <p:cNvSpPr/>
           <p:nvPr/>
         </p:nvSpPr>
         <p:spPr>
           <a:xfrm>
-            <a:off x="640080" y="5248656"/>
-            <a:ext cx="10911535" cy="9144"/>
+            <a:off x="6400800" y="4370832"/>
+            <a:ext cx="5120640" cy="7315"/>
           </a:xfrm>
           <a:prstGeom prst="rect">
             <a:avLst/>
           </a:prstGeom>
           <a:solidFill>
-            <a:srgbClr val="2C333B"/>
+            <a:srgbClr val="D5DDE4"/>
           </a:solidFill>
           <a:ln>
             <a:noFill/>
@@ -8159,35 +8550,149 @@
       </p:sp>
       <p:sp>
         <p:nvSpPr>
-          <p:cNvPr id="20" name="TextBox 19"/>
-          <p:cNvSpPr txBox="1"/>
-          <p:nvPr/>
-        </p:nvSpPr>
-        <p:spPr>
-          <a:xfrm>
-            <a:off x="640080" y="5623560"/>
-            <a:ext cx="10911535" cy="640080"/>
-          </a:xfrm>
-          <a:prstGeom prst="rect">
-            <a:avLst/>
-          </a:prstGeom>
-          <a:noFill/>
-        </p:spPr>
-        <p:txBody>
-          <a:bodyPr wrap="square" lIns="0" rIns="0" tIns="0" bIns="0" anchor="t">
-            <a:spAutoFit/>
-          </a:bodyPr>
-          <a:lstStyle/>
-          <a:p>
-            <a:pPr algn="l"/>
-            <a:r>
-              <a:rPr sz="1300" b="0" i="0">
-                <a:solidFill>
-                  <a:srgbClr val="9BA3AD"/>
-                </a:solidFill>
-                <a:latin typeface="Calibri"/>
-              </a:rPr>
-              <a:t>The Transparency Center shows four ads until you click “See all ads.” Those four skew to product listings, which carry no ratings. We went back and collected the full lists.</a:t>
+          <p:cNvPr id="23" name="TextBox 22"/>
+          <p:cNvSpPr txBox="1"/>
+          <p:nvPr/>
+        </p:nvSpPr>
+        <p:spPr>
+          <a:xfrm>
+            <a:off x="6400800" y="4434840"/>
+            <a:ext cx="2468880" cy="292608"/>
+          </a:xfrm>
+          <a:prstGeom prst="rect">
+            <a:avLst/>
+          </a:prstGeom>
+          <a:noFill/>
+        </p:spPr>
+        <p:txBody>
+          <a:bodyPr wrap="square" lIns="0" rIns="0" tIns="0" bIns="0" anchor="t">
+            <a:spAutoFit/>
+          </a:bodyPr>
+          <a:lstStyle/>
+          <a:p>
+            <a:pPr algn="l"/>
+            <a:r>
+              <a:rPr sz="1300" b="1" i="0">
+                <a:solidFill>
+                  <a:srgbClr val="C2410C"/>
+                </a:solidFill>
+                <a:latin typeface="Calibri"/>
+              </a:rPr>
+              <a:t>Tracksmith</a:t>
+            </a:r>
+          </a:p>
+        </p:txBody>
+      </p:sp>
+      <p:sp>
+        <p:nvSpPr>
+          <p:cNvPr id="24" name="TextBox 23"/>
+          <p:cNvSpPr txBox="1"/>
+          <p:nvPr/>
+        </p:nvSpPr>
+        <p:spPr>
+          <a:xfrm>
+            <a:off x="8778240" y="4434840"/>
+            <a:ext cx="2743200" cy="292608"/>
+          </a:xfrm>
+          <a:prstGeom prst="rect">
+            <a:avLst/>
+          </a:prstGeom>
+          <a:noFill/>
+        </p:spPr>
+        <p:txBody>
+          <a:bodyPr wrap="square" lIns="0" rIns="0" tIns="0" bIns="0" anchor="t">
+            <a:spAutoFit/>
+          </a:bodyPr>
+          <a:lstStyle/>
+          <a:p>
+            <a:pPr algn="r"/>
+            <a:r>
+              <a:rPr sz="1300" b="1" i="0">
+                <a:solidFill>
+                  <a:srgbClr val="C2410C"/>
+                </a:solidFill>
+                <a:latin typeface="Calibri"/>
+              </a:rPr>
+              <a:t>22 reviews</a:t>
+            </a:r>
+          </a:p>
+        </p:txBody>
+      </p:sp>
+      <p:sp>
+        <p:nvSpPr>
+          <p:cNvPr id="25" name="Rectangle 24"/>
+          <p:cNvSpPr/>
+          <p:nvPr/>
+        </p:nvSpPr>
+        <p:spPr>
+          <a:xfrm>
+            <a:off x="6400800" y="4736592"/>
+            <a:ext cx="5120640" cy="7315"/>
+          </a:xfrm>
+          <a:prstGeom prst="rect">
+            <a:avLst/>
+          </a:prstGeom>
+          <a:solidFill>
+            <a:srgbClr val="D5DDE4"/>
+          </a:solidFill>
+          <a:ln>
+            <a:noFill/>
+          </a:ln>
+          <a:effectLst/>
+        </p:spPr>
+        <p:style>
+          <a:lnRef idx="1">
+            <a:schemeClr val="accent1"/>
+          </a:lnRef>
+          <a:fillRef idx="3">
+            <a:schemeClr val="accent1"/>
+          </a:fillRef>
+          <a:effectRef idx="2">
+            <a:schemeClr val="accent1"/>
+          </a:effectRef>
+          <a:fontRef idx="minor">
+            <a:schemeClr val="lt1"/>
+          </a:fontRef>
+        </p:style>
+        <p:txBody>
+          <a:bodyPr rtlCol="0" anchor="ctr"/>
+          <a:lstStyle/>
+          <a:p>
+            <a:pPr algn="ctr"/>
+          </a:p>
+        </p:txBody>
+      </p:sp>
+      <p:sp>
+        <p:nvSpPr>
+          <p:cNvPr id="26" name="TextBox 25"/>
+          <p:cNvSpPr txBox="1"/>
+          <p:nvPr/>
+        </p:nvSpPr>
+        <p:spPr>
+          <a:xfrm>
+            <a:off x="640080" y="5120640"/>
+            <a:ext cx="10911535" cy="365760"/>
+          </a:xfrm>
+          <a:prstGeom prst="rect">
+            <a:avLst/>
+          </a:prstGeom>
+          <a:noFill/>
+        </p:spPr>
+        <p:txBody>
+          <a:bodyPr wrap="square" lIns="0" rIns="0" tIns="0" bIns="0" anchor="t">
+            <a:spAutoFit/>
+          </a:bodyPr>
+          <a:lstStyle/>
+          <a:p>
+            <a:pPr algn="l"/>
+            <a:r>
+              <a:rPr sz="1500" b="1" i="0">
+                <a:solidFill>
+                  <a:srgbClr val="1F2933"/>
+                </a:solidFill>
+                <a:latin typeface="Calibri"/>
+              </a:rPr>
+              <a:t>A premium brand advertising on 22 reviews is not using proof. It is exposing itself.</a:t>
             </a:r>
           </a:p>
         </p:txBody>
@@ -8200,7 +8705,7 @@
 </p:sld>
 </file>
 
-<file path=ppt/slides/slide8.xml><?xml version="1.0" encoding="utf-8"?>
+<file path=ppt/slides/slide7.xml><?xml version="1.0" encoding="utf-8"?>
 <p:sld xmlns:a="http://schemas.openxmlformats.org/drawingml/2006/main" xmlns:p="http://schemas.openxmlformats.org/presentationml/2006/main" xmlns:r="http://schemas.openxmlformats.org/officeDocument/2006/relationships">
   <p:cSld>
     <p:bg>
@@ -8244,11 +8749,11 @@
             <a:r>
               <a:rPr sz="1100" b="1" i="0">
                 <a:solidFill>
-                  <a:srgbClr val="E8562A"/>
-                </a:solidFill>
-                <a:latin typeface="Calibri"/>
-              </a:rPr>
-              <a:t>WHAT WE LEARNED</a:t>
+                  <a:srgbClr val="C2410C"/>
+                </a:solidFill>
+                <a:latin typeface="Calibri"/>
+              </a:rPr>
+              <a:t>THE OPENING</a:t>
             </a:r>
           </a:p>
         </p:txBody>
@@ -8279,11 +8784,11 @@
             <a:r>
               <a:rPr sz="3600" b="1" i="0">
                 <a:solidFill>
-                  <a:srgbClr val="14181C"/>
+                  <a:srgbClr val="1F2933"/>
                 </a:solidFill>
                 <a:latin typeface="Cambria"/>
               </a:rPr>
-              <a:t>Five things the workbook does not show</a:t>
+              <a:t>Nobody has made belonging measurable</a:t>
             </a:r>
           </a:p>
         </p:txBody>
@@ -8296,29 +8801,537 @@
         </p:nvSpPr>
         <p:spPr>
           <a:xfrm>
-            <a:off x="640080" y="1993392"/>
-            <a:ext cx="548640" cy="320040"/>
-          </a:xfrm>
-          <a:prstGeom prst="rect">
-            <a:avLst/>
-          </a:prstGeom>
-          <a:noFill/>
-        </p:spPr>
-        <p:txBody>
-          <a:bodyPr wrap="square" lIns="0" rIns="0" tIns="0" bIns="0" anchor="t">
-            <a:spAutoFit/>
-          </a:bodyPr>
-          <a:lstStyle/>
-          <a:p>
-            <a:pPr algn="l"/>
-            <a:r>
-              <a:rPr sz="1600" b="1" i="0">
-                <a:solidFill>
-                  <a:srgbClr val="E8562A"/>
+            <a:off x="640080" y="1938528"/>
+            <a:ext cx="10911535" cy="411480"/>
+          </a:xfrm>
+          <a:prstGeom prst="rect">
+            <a:avLst/>
+          </a:prstGeom>
+          <a:noFill/>
+        </p:spPr>
+        <p:txBody>
+          <a:bodyPr wrap="square" lIns="0" rIns="0" tIns="0" bIns="0" anchor="t">
+            <a:spAutoFit/>
+          </a:bodyPr>
+          <a:lstStyle/>
+          <a:p>
+            <a:pPr algn="l"/>
+            <a:r>
+              <a:rPr sz="1700" b="1" i="0">
+                <a:solidFill>
+                  <a:srgbClr val="C2410C"/>
+                </a:solidFill>
+                <a:latin typeface="Calibri"/>
+              </a:rPr>
+              <a:t>Community is not unclaimed. It is unproven.</a:t>
+            </a:r>
+          </a:p>
+        </p:txBody>
+      </p:sp>
+      <p:sp>
+        <p:nvSpPr>
+          <p:cNvPr id="5" name="Rectangle 4"/>
+          <p:cNvSpPr/>
+          <p:nvPr/>
+        </p:nvSpPr>
+        <p:spPr>
+          <a:xfrm>
+            <a:off x="640080" y="2578608"/>
+            <a:ext cx="3429000" cy="2560320"/>
+          </a:xfrm>
+          <a:prstGeom prst="rect">
+            <a:avLst/>
+          </a:prstGeom>
+          <a:solidFill>
+            <a:srgbClr val="F4F6F8"/>
+          </a:solidFill>
+          <a:ln>
+            <a:noFill/>
+          </a:ln>
+          <a:effectLst/>
+        </p:spPr>
+        <p:style>
+          <a:lnRef idx="1">
+            <a:schemeClr val="accent1"/>
+          </a:lnRef>
+          <a:fillRef idx="3">
+            <a:schemeClr val="accent1"/>
+          </a:fillRef>
+          <a:effectRef idx="2">
+            <a:schemeClr val="accent1"/>
+          </a:effectRef>
+          <a:fontRef idx="minor">
+            <a:schemeClr val="lt1"/>
+          </a:fontRef>
+        </p:style>
+        <p:txBody>
+          <a:bodyPr rtlCol="0" anchor="ctr"/>
+          <a:lstStyle/>
+          <a:p>
+            <a:pPr algn="ctr"/>
+          </a:p>
+        </p:txBody>
+      </p:sp>
+      <p:sp>
+        <p:nvSpPr>
+          <p:cNvPr id="6" name="TextBox 5"/>
+          <p:cNvSpPr txBox="1"/>
+          <p:nvPr/>
+        </p:nvSpPr>
+        <p:spPr>
+          <a:xfrm>
+            <a:off x="914400" y="2816352"/>
+            <a:ext cx="2880360" cy="365760"/>
+          </a:xfrm>
+          <a:prstGeom prst="rect">
+            <a:avLst/>
+          </a:prstGeom>
+          <a:noFill/>
+        </p:spPr>
+        <p:txBody>
+          <a:bodyPr wrap="square" lIns="0" rIns="0" tIns="0" bIns="0" anchor="t">
+            <a:spAutoFit/>
+          </a:bodyPr>
+          <a:lstStyle/>
+          <a:p>
+            <a:pPr algn="l"/>
+            <a:r>
+              <a:rPr sz="1500" b="1" i="0">
+                <a:solidFill>
+                  <a:srgbClr val="1F2933"/>
+                </a:solidFill>
+                <a:latin typeface="Calibri"/>
+              </a:rPr>
+              <a:t>What exists</a:t>
+            </a:r>
+          </a:p>
+        </p:txBody>
+      </p:sp>
+      <p:sp>
+        <p:nvSpPr>
+          <p:cNvPr id="7" name="TextBox 6"/>
+          <p:cNvSpPr txBox="1"/>
+          <p:nvPr/>
+        </p:nvSpPr>
+        <p:spPr>
+          <a:xfrm>
+            <a:off x="914400" y="3273552"/>
+            <a:ext cx="2880360" cy="1737360"/>
+          </a:xfrm>
+          <a:prstGeom prst="rect">
+            <a:avLst/>
+          </a:prstGeom>
+          <a:noFill/>
+        </p:spPr>
+        <p:txBody>
+          <a:bodyPr wrap="square" lIns="0" rIns="0" tIns="0" bIns="0" anchor="t">
+            <a:spAutoFit/>
+          </a:bodyPr>
+          <a:lstStyle/>
+          <a:p>
+            <a:pPr algn="l"/>
+            <a:r>
+              <a:rPr sz="1250" b="0" i="0">
+                <a:solidFill>
+                  <a:srgbClr val="44515F"/>
+                </a:solidFill>
+                <a:latin typeface="Calibri"/>
+              </a:rPr>
+              <a:t>Gymshark runs couch-to-5K and half-marathon coaching. Alo has a membership tier. Tracksmith sells Boston running heritage.</a:t>
+            </a:r>
+          </a:p>
+        </p:txBody>
+      </p:sp>
+      <p:sp>
+        <p:nvSpPr>
+          <p:cNvPr id="8" name="Rectangle 7"/>
+          <p:cNvSpPr/>
+          <p:nvPr/>
+        </p:nvSpPr>
+        <p:spPr>
+          <a:xfrm>
+            <a:off x="4315968" y="2578608"/>
+            <a:ext cx="3429000" cy="2560320"/>
+          </a:xfrm>
+          <a:prstGeom prst="rect">
+            <a:avLst/>
+          </a:prstGeom>
+          <a:solidFill>
+            <a:srgbClr val="F4F6F8"/>
+          </a:solidFill>
+          <a:ln>
+            <a:noFill/>
+          </a:ln>
+          <a:effectLst/>
+        </p:spPr>
+        <p:style>
+          <a:lnRef idx="1">
+            <a:schemeClr val="accent1"/>
+          </a:lnRef>
+          <a:fillRef idx="3">
+            <a:schemeClr val="accent1"/>
+          </a:fillRef>
+          <a:effectRef idx="2">
+            <a:schemeClr val="accent1"/>
+          </a:effectRef>
+          <a:fontRef idx="minor">
+            <a:schemeClr val="lt1"/>
+          </a:fontRef>
+        </p:style>
+        <p:txBody>
+          <a:bodyPr rtlCol="0" anchor="ctr"/>
+          <a:lstStyle/>
+          <a:p>
+            <a:pPr algn="ctr"/>
+          </a:p>
+        </p:txBody>
+      </p:sp>
+      <p:sp>
+        <p:nvSpPr>
+          <p:cNvPr id="9" name="TextBox 8"/>
+          <p:cNvSpPr txBox="1"/>
+          <p:nvPr/>
+        </p:nvSpPr>
+        <p:spPr>
+          <a:xfrm>
+            <a:off x="4590288" y="2816352"/>
+            <a:ext cx="2880360" cy="365760"/>
+          </a:xfrm>
+          <a:prstGeom prst="rect">
+            <a:avLst/>
+          </a:prstGeom>
+          <a:noFill/>
+        </p:spPr>
+        <p:txBody>
+          <a:bodyPr wrap="square" lIns="0" rIns="0" tIns="0" bIns="0" anchor="t">
+            <a:spAutoFit/>
+          </a:bodyPr>
+          <a:lstStyle/>
+          <a:p>
+            <a:pPr algn="l"/>
+            <a:r>
+              <a:rPr sz="1500" b="1" i="0">
+                <a:solidFill>
+                  <a:srgbClr val="1F2933"/>
+                </a:solidFill>
+                <a:latin typeface="Calibri"/>
+              </a:rPr>
+              <a:t>What is missing</a:t>
+            </a:r>
+          </a:p>
+        </p:txBody>
+      </p:sp>
+      <p:sp>
+        <p:nvSpPr>
+          <p:cNvPr id="10" name="TextBox 9"/>
+          <p:cNvSpPr txBox="1"/>
+          <p:nvPr/>
+        </p:nvSpPr>
+        <p:spPr>
+          <a:xfrm>
+            <a:off x="4590288" y="3273552"/>
+            <a:ext cx="2880360" cy="1737360"/>
+          </a:xfrm>
+          <a:prstGeom prst="rect">
+            <a:avLst/>
+          </a:prstGeom>
+          <a:noFill/>
+        </p:spPr>
+        <p:txBody>
+          <a:bodyPr wrap="square" lIns="0" rIns="0" tIns="0" bIns="0" anchor="t">
+            <a:spAutoFit/>
+          </a:bodyPr>
+          <a:lstStyle/>
+          <a:p>
+            <a:pPr algn="l"/>
+            <a:r>
+              <a:rPr sz="1250" b="0" i="0">
+                <a:solidFill>
+                  <a:srgbClr val="44515F"/>
+                </a:solidFill>
+                <a:latin typeface="Calibri"/>
+              </a:rPr>
+              <a:t>Not one publishes a participation number, a completion rate or a member count. Belonging is tone of voice, not evidence.</a:t>
+            </a:r>
+          </a:p>
+        </p:txBody>
+      </p:sp>
+      <p:sp>
+        <p:nvSpPr>
+          <p:cNvPr id="11" name="Rectangle 10"/>
+          <p:cNvSpPr/>
+          <p:nvPr/>
+        </p:nvSpPr>
+        <p:spPr>
+          <a:xfrm>
+            <a:off x="7991855" y="2578608"/>
+            <a:ext cx="3429000" cy="2560320"/>
+          </a:xfrm>
+          <a:prstGeom prst="rect">
+            <a:avLst/>
+          </a:prstGeom>
+          <a:solidFill>
+            <a:srgbClr val="FDECE2"/>
+          </a:solidFill>
+          <a:ln>
+            <a:noFill/>
+          </a:ln>
+          <a:effectLst/>
+        </p:spPr>
+        <p:style>
+          <a:lnRef idx="1">
+            <a:schemeClr val="accent1"/>
+          </a:lnRef>
+          <a:fillRef idx="3">
+            <a:schemeClr val="accent1"/>
+          </a:fillRef>
+          <a:effectRef idx="2">
+            <a:schemeClr val="accent1"/>
+          </a:effectRef>
+          <a:fontRef idx="minor">
+            <a:schemeClr val="lt1"/>
+          </a:fontRef>
+        </p:style>
+        <p:txBody>
+          <a:bodyPr rtlCol="0" anchor="ctr"/>
+          <a:lstStyle/>
+          <a:p>
+            <a:pPr algn="ctr"/>
+          </a:p>
+        </p:txBody>
+      </p:sp>
+      <p:sp>
+        <p:nvSpPr>
+          <p:cNvPr id="12" name="TextBox 11"/>
+          <p:cNvSpPr txBox="1"/>
+          <p:nvPr/>
+        </p:nvSpPr>
+        <p:spPr>
+          <a:xfrm>
+            <a:off x="8266175" y="2816352"/>
+            <a:ext cx="2880360" cy="365760"/>
+          </a:xfrm>
+          <a:prstGeom prst="rect">
+            <a:avLst/>
+          </a:prstGeom>
+          <a:noFill/>
+        </p:spPr>
+        <p:txBody>
+          <a:bodyPr wrap="square" lIns="0" rIns="0" tIns="0" bIns="0" anchor="t">
+            <a:spAutoFit/>
+          </a:bodyPr>
+          <a:lstStyle/>
+          <a:p>
+            <a:pPr algn="l"/>
+            <a:r>
+              <a:rPr sz="1500" b="1" i="0">
+                <a:solidFill>
+                  <a:srgbClr val="C2410C"/>
+                </a:solidFill>
+                <a:latin typeface="Calibri"/>
+              </a:rPr>
+              <a:t>The move</a:t>
+            </a:r>
+          </a:p>
+        </p:txBody>
+      </p:sp>
+      <p:sp>
+        <p:nvSpPr>
+          <p:cNvPr id="13" name="TextBox 12"/>
+          <p:cNvSpPr txBox="1"/>
+          <p:nvPr/>
+        </p:nvSpPr>
+        <p:spPr>
+          <a:xfrm>
+            <a:off x="8266175" y="3273552"/>
+            <a:ext cx="2880360" cy="1737360"/>
+          </a:xfrm>
+          <a:prstGeom prst="rect">
+            <a:avLst/>
+          </a:prstGeom>
+          <a:noFill/>
+        </p:spPr>
+        <p:txBody>
+          <a:bodyPr wrap="square" lIns="0" rIns="0" tIns="0" bIns="0" anchor="t">
+            <a:spAutoFit/>
+          </a:bodyPr>
+          <a:lstStyle/>
+          <a:p>
+            <a:pPr algn="l"/>
+            <a:r>
+              <a:rPr sz="1250" b="0" i="0">
+                <a:solidFill>
+                  <a:srgbClr val="C2410C"/>
+                </a:solidFill>
+                <a:latin typeface="Calibri"/>
+              </a:rPr>
+              <a:t>A named programme with published numbers, placed where competitors put discount percentages. The one claim a rival cannot copy by reformulating a fabric.</a:t>
+            </a:r>
+          </a:p>
+        </p:txBody>
+      </p:sp>
+      <p:sp>
+        <p:nvSpPr>
+          <p:cNvPr id="14" name="TextBox 13"/>
+          <p:cNvSpPr txBox="1"/>
+          <p:nvPr/>
+        </p:nvSpPr>
+        <p:spPr>
+          <a:xfrm>
+            <a:off x="640080" y="5440680"/>
+            <a:ext cx="10911535" cy="457200"/>
+          </a:xfrm>
+          <a:prstGeom prst="rect">
+            <a:avLst/>
+          </a:prstGeom>
+          <a:noFill/>
+        </p:spPr>
+        <p:txBody>
+          <a:bodyPr wrap="square" lIns="0" rIns="0" tIns="0" bIns="0" anchor="t">
+            <a:spAutoFit/>
+          </a:bodyPr>
+          <a:lstStyle/>
+          <a:p>
+            <a:pPr algn="l"/>
+            <a:r>
+              <a:rPr sz="1400" b="0" i="0">
+                <a:solidFill>
+                  <a:srgbClr val="44515F"/>
+                </a:solidFill>
+                <a:latin typeface="Calibri"/>
+              </a:rPr>
+              <a:t>Spend against runners and gym training, not the everyday athleisure block where lululemon, Vuori and Fabletics are stacked.</a:t>
+            </a:r>
+          </a:p>
+        </p:txBody>
+      </p:sp>
+    </p:spTree>
+  </p:cSld>
+  <p:clrMapOvr>
+    <a:masterClrMapping/>
+  </p:clrMapOvr>
+</p:sld>
+</file>
+
+<file path=ppt/slides/slide8.xml><?xml version="1.0" encoding="utf-8"?>
+<p:sld xmlns:a="http://schemas.openxmlformats.org/drawingml/2006/main" xmlns:p="http://schemas.openxmlformats.org/presentationml/2006/main" xmlns:r="http://schemas.openxmlformats.org/officeDocument/2006/relationships">
+  <p:cSld>
+    <p:bg>
+      <p:bgPr>
+        <a:solidFill>
+          <a:srgbClr val="ECF1F6"/>
+        </a:solidFill>
+        <a:effectLst/>
+      </p:bgPr>
+    </p:bg>
+    <p:spTree>
+      <p:nvGrpSpPr>
+        <p:cNvPr id="1" name=""/>
+        <p:cNvGrpSpPr/>
+        <p:nvPr/>
+      </p:nvGrpSpPr>
+      <p:grpSpPr/>
+      <p:sp>
+        <p:nvSpPr>
+          <p:cNvPr id="2" name="TextBox 1"/>
+          <p:cNvSpPr txBox="1"/>
+          <p:nvPr/>
+        </p:nvSpPr>
+        <p:spPr>
+          <a:xfrm>
+            <a:off x="640080" y="310896"/>
+            <a:ext cx="10911535" cy="256032"/>
+          </a:xfrm>
+          <a:prstGeom prst="rect">
+            <a:avLst/>
+          </a:prstGeom>
+          <a:noFill/>
+        </p:spPr>
+        <p:txBody>
+          <a:bodyPr wrap="square" lIns="0" rIns="0" tIns="0" bIns="0" anchor="t">
+            <a:spAutoFit/>
+          </a:bodyPr>
+          <a:lstStyle/>
+          <a:p>
+            <a:pPr algn="l"/>
+            <a:r>
+              <a:rPr sz="1100" b="1" i="0">
+                <a:solidFill>
+                  <a:srgbClr val="C2410C"/>
+                </a:solidFill>
+                <a:latin typeface="Calibri"/>
+              </a:rPr>
+              <a:t>WHAT WE GOT WRONG</a:t>
+            </a:r>
+          </a:p>
+        </p:txBody>
+      </p:sp>
+      <p:sp>
+        <p:nvSpPr>
+          <p:cNvPr id="3" name="TextBox 2"/>
+          <p:cNvSpPr txBox="1"/>
+          <p:nvPr/>
+        </p:nvSpPr>
+        <p:spPr>
+          <a:xfrm>
+            <a:off x="640080" y="566928"/>
+            <a:ext cx="10911535" cy="960120"/>
+          </a:xfrm>
+          <a:prstGeom prst="rect">
+            <a:avLst/>
+          </a:prstGeom>
+          <a:noFill/>
+        </p:spPr>
+        <p:txBody>
+          <a:bodyPr wrap="square" lIns="0" rIns="0" tIns="0" bIns="0" anchor="t">
+            <a:spAutoFit/>
+          </a:bodyPr>
+          <a:lstStyle/>
+          <a:p>
+            <a:pPr algn="l"/>
+            <a:r>
+              <a:rPr sz="3600" b="1" i="0">
+                <a:solidFill>
+                  <a:srgbClr val="1F2933"/>
                 </a:solidFill>
                 <a:latin typeface="Cambria"/>
               </a:rPr>
-              <a:t>01</a:t>
+              <a:t>Our first answer was confident and false</a:t>
+            </a:r>
+          </a:p>
+        </p:txBody>
+      </p:sp>
+      <p:sp>
+        <p:nvSpPr>
+          <p:cNvPr id="4" name="TextBox 3"/>
+          <p:cNvSpPr txBox="1"/>
+          <p:nvPr/>
+        </p:nvSpPr>
+        <p:spPr>
+          <a:xfrm>
+            <a:off x="640080" y="1920240"/>
+            <a:ext cx="10911535" cy="411480"/>
+          </a:xfrm>
+          <a:prstGeom prst="rect">
+            <a:avLst/>
+          </a:prstGeom>
+          <a:noFill/>
+        </p:spPr>
+        <p:txBody>
+          <a:bodyPr wrap="square" lIns="0" rIns="0" tIns="0" bIns="0" anchor="t">
+            <a:spAutoFit/>
+          </a:bodyPr>
+          <a:lstStyle/>
+          <a:p>
+            <a:pPr algn="l"/>
+            <a:r>
+              <a:rPr sz="1700" b="0" i="0">
+                <a:solidFill>
+                  <a:srgbClr val="C2410C"/>
+                </a:solidFill>
+                <a:latin typeface="Calibri"/>
+              </a:rPr>
+              <a:t>At 42 ads we concluded three brands cited no proof at all. That was wrong.</a:t>
             </a:r>
           </a:p>
         </p:txBody>
@@ -8331,29 +9344,29 @@
         </p:nvSpPr>
         <p:spPr>
           <a:xfrm>
-            <a:off x="1353312" y="1965960"/>
-            <a:ext cx="5669280" cy="384048"/>
-          </a:xfrm>
-          <a:prstGeom prst="rect">
-            <a:avLst/>
-          </a:prstGeom>
-          <a:noFill/>
-        </p:spPr>
-        <p:txBody>
-          <a:bodyPr wrap="square" lIns="0" rIns="0" tIns="0" bIns="0" anchor="t">
-            <a:spAutoFit/>
-          </a:bodyPr>
-          <a:lstStyle/>
-          <a:p>
-            <a:pPr algn="l"/>
-            <a:r>
-              <a:rPr sz="1500" b="1" i="0">
-                <a:solidFill>
-                  <a:srgbClr val="14181C"/>
-                </a:solidFill>
-                <a:latin typeface="Calibri"/>
-              </a:rPr>
-              <a:t>The bottleneck was collection, not intelligence</a:t>
+            <a:off x="640080" y="2633472"/>
+            <a:ext cx="2011680" cy="274320"/>
+          </a:xfrm>
+          <a:prstGeom prst="rect">
+            <a:avLst/>
+          </a:prstGeom>
+          <a:noFill/>
+        </p:spPr>
+        <p:txBody>
+          <a:bodyPr wrap="square" lIns="0" rIns="0" tIns="0" bIns="0" anchor="t">
+            <a:spAutoFit/>
+          </a:bodyPr>
+          <a:lstStyle/>
+          <a:p>
+            <a:pPr algn="l"/>
+            <a:r>
+              <a:rPr sz="1000" b="1" i="0">
+                <a:solidFill>
+                  <a:srgbClr val="697482"/>
+                </a:solidFill>
+                <a:latin typeface="Calibri"/>
+              </a:rPr>
+              <a:t>BRAND</a:t>
             </a:r>
           </a:p>
         </p:txBody>
@@ -8366,29 +9379,29 @@
         </p:nvSpPr>
         <p:spPr>
           <a:xfrm>
-            <a:off x="7132320" y="1984248"/>
-            <a:ext cx="4480560" cy="566928"/>
-          </a:xfrm>
-          <a:prstGeom prst="rect">
-            <a:avLst/>
-          </a:prstGeom>
-          <a:noFill/>
-        </p:spPr>
-        <p:txBody>
-          <a:bodyPr wrap="square" lIns="0" rIns="0" tIns="0" bIns="0" anchor="t">
-            <a:spAutoFit/>
-          </a:bodyPr>
-          <a:lstStyle/>
-          <a:p>
-            <a:pPr algn="l"/>
-            <a:r>
-              <a:rPr sz="1250" b="0" i="0">
-                <a:solidFill>
-                  <a:srgbClr val="6B7280"/>
-                </a:solidFill>
-                <a:latin typeface="Calibri"/>
-              </a:rPr>
-              <a:t>Classifying 101 ads took ninety seconds. Collecting them took hours.</a:t>
+            <a:off x="2743200" y="2633472"/>
+            <a:ext cx="4023360" cy="274320"/>
+          </a:xfrm>
+          <a:prstGeom prst="rect">
+            <a:avLst/>
+          </a:prstGeom>
+          <a:noFill/>
+        </p:spPr>
+        <p:txBody>
+          <a:bodyPr wrap="square" lIns="0" rIns="0" tIns="0" bIns="0" anchor="t">
+            <a:spAutoFit/>
+          </a:bodyPr>
+          <a:lstStyle/>
+          <a:p>
+            <a:pPr algn="l"/>
+            <a:r>
+              <a:rPr sz="1000" b="1" i="0">
+                <a:solidFill>
+                  <a:srgbClr val="697482"/>
+                </a:solidFill>
+                <a:latin typeface="Calibri"/>
+              </a:rPr>
+              <a:t>WHAT WE SAID</a:t>
             </a:r>
           </a:p>
         </p:txBody>
@@ -8401,29 +9414,29 @@
         </p:nvSpPr>
         <p:spPr>
           <a:xfrm>
-            <a:off x="640080" y="2834640"/>
-            <a:ext cx="548640" cy="320040"/>
-          </a:xfrm>
-          <a:prstGeom prst="rect">
-            <a:avLst/>
-          </a:prstGeom>
-          <a:noFill/>
-        </p:spPr>
-        <p:txBody>
-          <a:bodyPr wrap="square" lIns="0" rIns="0" tIns="0" bIns="0" anchor="t">
-            <a:spAutoFit/>
-          </a:bodyPr>
-          <a:lstStyle/>
-          <a:p>
-            <a:pPr algn="l"/>
-            <a:r>
-              <a:rPr sz="1600" b="1" i="0">
-                <a:solidFill>
-                  <a:srgbClr val="E8562A"/>
-                </a:solidFill>
-                <a:latin typeface="Cambria"/>
-              </a:rPr>
-              <a:t>02</a:t>
+            <a:off x="7040880" y="2633472"/>
+            <a:ext cx="4206240" cy="274320"/>
+          </a:xfrm>
+          <a:prstGeom prst="rect">
+            <a:avLst/>
+          </a:prstGeom>
+          <a:noFill/>
+        </p:spPr>
+        <p:txBody>
+          <a:bodyPr wrap="square" lIns="0" rIns="0" tIns="0" bIns="0" anchor="t">
+            <a:spAutoFit/>
+          </a:bodyPr>
+          <a:lstStyle/>
+          <a:p>
+            <a:pPr algn="l"/>
+            <a:r>
+              <a:rPr sz="1000" b="1" i="0">
+                <a:solidFill>
+                  <a:srgbClr val="697482"/>
+                </a:solidFill>
+                <a:latin typeface="Calibri"/>
+              </a:rPr>
+              <a:t>WHAT THEY ACTUALLY RUN</a:t>
             </a:r>
           </a:p>
         </p:txBody>
@@ -8436,29 +9449,29 @@
         </p:nvSpPr>
         <p:spPr>
           <a:xfrm>
-            <a:off x="1353312" y="2807208"/>
-            <a:ext cx="5669280" cy="384048"/>
-          </a:xfrm>
-          <a:prstGeom prst="rect">
-            <a:avLst/>
-          </a:prstGeom>
-          <a:noFill/>
-        </p:spPr>
-        <p:txBody>
-          <a:bodyPr wrap="square" lIns="0" rIns="0" tIns="0" bIns="0" anchor="t">
-            <a:spAutoFit/>
-          </a:bodyPr>
-          <a:lstStyle/>
-          <a:p>
-            <a:pPr algn="l"/>
-            <a:r>
-              <a:rPr sz="1500" b="1" i="0">
-                <a:solidFill>
-                  <a:srgbClr val="14181C"/>
-                </a:solidFill>
-                <a:latin typeface="Calibri"/>
-              </a:rPr>
-              <a:t>A shallow sample gives a confident wrong answer</a:t>
+            <a:off x="640080" y="3035808"/>
+            <a:ext cx="2011680" cy="411480"/>
+          </a:xfrm>
+          <a:prstGeom prst="rect">
+            <a:avLst/>
+          </a:prstGeom>
+          <a:noFill/>
+        </p:spPr>
+        <p:txBody>
+          <a:bodyPr wrap="square" lIns="0" rIns="0" tIns="0" bIns="0" anchor="t">
+            <a:spAutoFit/>
+          </a:bodyPr>
+          <a:lstStyle/>
+          <a:p>
+            <a:pPr algn="l"/>
+            <a:r>
+              <a:rPr sz="1400" b="1" i="0">
+                <a:solidFill>
+                  <a:srgbClr val="1F2933"/>
+                </a:solidFill>
+                <a:latin typeface="Calibri"/>
+              </a:rPr>
+              <a:t>Vuori</a:t>
             </a:r>
           </a:p>
         </p:txBody>
@@ -8471,29 +9484,29 @@
         </p:nvSpPr>
         <p:spPr>
           <a:xfrm>
-            <a:off x="7132320" y="2825496"/>
-            <a:ext cx="4480560" cy="566928"/>
-          </a:xfrm>
-          <a:prstGeom prst="rect">
-            <a:avLst/>
-          </a:prstGeom>
-          <a:noFill/>
-        </p:spPr>
-        <p:txBody>
-          <a:bodyPr wrap="square" lIns="0" rIns="0" tIns="0" bIns="0" anchor="t">
-            <a:spAutoFit/>
-          </a:bodyPr>
-          <a:lstStyle/>
-          <a:p>
-            <a:pPr algn="l"/>
-            <a:r>
-              <a:rPr sz="1250" b="0" i="0">
-                <a:solidFill>
-                  <a:srgbClr val="6B7280"/>
-                </a:solidFill>
-                <a:latin typeface="Calibri"/>
-              </a:rPr>
-              <a:t>Not a vague one. That is far more dangerous.</a:t>
+            <a:off x="2743200" y="3035808"/>
+            <a:ext cx="4023360" cy="548640"/>
+          </a:xfrm>
+          <a:prstGeom prst="rect">
+            <a:avLst/>
+          </a:prstGeom>
+          <a:noFill/>
+        </p:spPr>
+        <p:txBody>
+          <a:bodyPr wrap="square" lIns="0" rIns="0" tIns="0" bIns="0" anchor="t">
+            <a:spAutoFit/>
+          </a:bodyPr>
+          <a:lstStyle/>
+          <a:p>
+            <a:pPr algn="l"/>
+            <a:r>
+              <a:rPr sz="1250" b="0" i="1">
+                <a:solidFill>
+                  <a:srgbClr val="697482"/>
+                </a:solidFill>
+                <a:latin typeface="Calibri"/>
+              </a:rPr>
+              <a:t>“The biggest proof gap in the group”</a:t>
             </a:r>
           </a:p>
         </p:txBody>
@@ -8506,65 +9519,74 @@
         </p:nvSpPr>
         <p:spPr>
           <a:xfrm>
-            <a:off x="640080" y="3675888"/>
-            <a:ext cx="548640" cy="320040"/>
-          </a:xfrm>
-          <a:prstGeom prst="rect">
-            <a:avLst/>
-          </a:prstGeom>
-          <a:noFill/>
-        </p:spPr>
-        <p:txBody>
-          <a:bodyPr wrap="square" lIns="0" rIns="0" tIns="0" bIns="0" anchor="t">
-            <a:spAutoFit/>
-          </a:bodyPr>
-          <a:lstStyle/>
-          <a:p>
-            <a:pPr algn="l"/>
-            <a:r>
-              <a:rPr sz="1600" b="1" i="0">
-                <a:solidFill>
-                  <a:srgbClr val="E8562A"/>
-                </a:solidFill>
-                <a:latin typeface="Cambria"/>
-              </a:rPr>
-              <a:t>03</a:t>
-            </a:r>
-          </a:p>
-        </p:txBody>
-      </p:sp>
-      <p:sp>
-        <p:nvSpPr>
-          <p:cNvPr id="11" name="TextBox 10"/>
-          <p:cNvSpPr txBox="1"/>
-          <p:nvPr/>
-        </p:nvSpPr>
-        <p:spPr>
-          <a:xfrm>
-            <a:off x="1353312" y="3648456"/>
-            <a:ext cx="5669280" cy="384048"/>
-          </a:xfrm>
-          <a:prstGeom prst="rect">
-            <a:avLst/>
-          </a:prstGeom>
-          <a:noFill/>
-        </p:spPr>
-        <p:txBody>
-          <a:bodyPr wrap="square" lIns="0" rIns="0" tIns="0" bIns="0" anchor="t">
-            <a:spAutoFit/>
-          </a:bodyPr>
-          <a:lstStyle/>
-          <a:p>
-            <a:pPr algn="l"/>
-            <a:r>
-              <a:rPr sz="1500" b="1" i="0">
-                <a:solidFill>
-                  <a:srgbClr val="14181C"/>
-                </a:solidFill>
-                <a:latin typeface="Calibri"/>
-              </a:rPr>
-              <a:t>Model output drifts unless you freeze it</a:t>
-            </a:r>
+            <a:off x="7040880" y="3035808"/>
+            <a:ext cx="4206240" cy="640080"/>
+          </a:xfrm>
+          <a:prstGeom prst="rect">
+            <a:avLst/>
+          </a:prstGeom>
+          <a:noFill/>
+        </p:spPr>
+        <p:txBody>
+          <a:bodyPr wrap="square" lIns="0" rIns="0" tIns="0" bIns="0" anchor="t">
+            <a:spAutoFit/>
+          </a:bodyPr>
+          <a:lstStyle/>
+          <a:p>
+            <a:pPr algn="l"/>
+            <a:r>
+              <a:rPr sz="1250" b="1" i="0">
+                <a:solidFill>
+                  <a:srgbClr val="C2410C"/>
+                </a:solidFill>
+                <a:latin typeface="Calibri"/>
+              </a:rPr>
+              <a:t>4.6 from 13,593 reviews, 100% product guarantee</a:t>
+            </a:r>
+          </a:p>
+        </p:txBody>
+      </p:sp>
+      <p:sp>
+        <p:nvSpPr>
+          <p:cNvPr id="11" name="Rectangle 10"/>
+          <p:cNvSpPr/>
+          <p:nvPr/>
+        </p:nvSpPr>
+        <p:spPr>
+          <a:xfrm>
+            <a:off x="640080" y="3675887"/>
+            <a:ext cx="10911535" cy="7315"/>
+          </a:xfrm>
+          <a:prstGeom prst="rect">
+            <a:avLst/>
+          </a:prstGeom>
+          <a:solidFill>
+            <a:srgbClr val="DFE7EF"/>
+          </a:solidFill>
+          <a:ln>
+            <a:noFill/>
+          </a:ln>
+          <a:effectLst/>
+        </p:spPr>
+        <p:style>
+          <a:lnRef idx="1">
+            <a:schemeClr val="accent1"/>
+          </a:lnRef>
+          <a:fillRef idx="3">
+            <a:schemeClr val="accent1"/>
+          </a:fillRef>
+          <a:effectRef idx="2">
+            <a:schemeClr val="accent1"/>
+          </a:effectRef>
+          <a:fontRef idx="minor">
+            <a:schemeClr val="lt1"/>
+          </a:fontRef>
+        </p:style>
+        <p:txBody>
+          <a:bodyPr rtlCol="0" anchor="ctr"/>
+          <a:lstStyle/>
+          <a:p>
+            <a:pPr algn="ctr"/>
           </a:p>
         </p:txBody>
       </p:sp>
@@ -8576,29 +9598,29 @@
         </p:nvSpPr>
         <p:spPr>
           <a:xfrm>
-            <a:off x="7132320" y="3666744"/>
-            <a:ext cx="4480560" cy="566928"/>
-          </a:xfrm>
-          <a:prstGeom prst="rect">
-            <a:avLst/>
-          </a:prstGeom>
-          <a:noFill/>
-        </p:spPr>
-        <p:txBody>
-          <a:bodyPr wrap="square" lIns="0" rIns="0" tIns="0" bIns="0" anchor="t">
-            <a:spAutoFit/>
-          </a:bodyPr>
-          <a:lstStyle/>
-          <a:p>
-            <a:pPr algn="l"/>
-            <a:r>
-              <a:rPr sz="1250" b="0" i="0">
-                <a:solidFill>
-                  <a:srgbClr val="6B7280"/>
-                </a:solidFill>
-                <a:latin typeface="Calibri"/>
-              </a:rPr>
-              <a:t>Two runs on identical data moved 14 tags and rewrote the headline.</a:t>
+            <a:off x="640080" y="3822191"/>
+            <a:ext cx="2011680" cy="411480"/>
+          </a:xfrm>
+          <a:prstGeom prst="rect">
+            <a:avLst/>
+          </a:prstGeom>
+          <a:noFill/>
+        </p:spPr>
+        <p:txBody>
+          <a:bodyPr wrap="square" lIns="0" rIns="0" tIns="0" bIns="0" anchor="t">
+            <a:spAutoFit/>
+          </a:bodyPr>
+          <a:lstStyle/>
+          <a:p>
+            <a:pPr algn="l"/>
+            <a:r>
+              <a:rPr sz="1400" b="1" i="0">
+                <a:solidFill>
+                  <a:srgbClr val="1F2933"/>
+                </a:solidFill>
+                <a:latin typeface="Calibri"/>
+              </a:rPr>
+              <a:t>Gymshark</a:t>
             </a:r>
           </a:p>
         </p:txBody>
@@ -8611,29 +9633,29 @@
         </p:nvSpPr>
         <p:spPr>
           <a:xfrm>
-            <a:off x="640080" y="4517136"/>
-            <a:ext cx="548640" cy="320040"/>
-          </a:xfrm>
-          <a:prstGeom prst="rect">
-            <a:avLst/>
-          </a:prstGeom>
-          <a:noFill/>
-        </p:spPr>
-        <p:txBody>
-          <a:bodyPr wrap="square" lIns="0" rIns="0" tIns="0" bIns="0" anchor="t">
-            <a:spAutoFit/>
-          </a:bodyPr>
-          <a:lstStyle/>
-          <a:p>
-            <a:pPr algn="l"/>
-            <a:r>
-              <a:rPr sz="1600" b="1" i="0">
-                <a:solidFill>
-                  <a:srgbClr val="E8562A"/>
-                </a:solidFill>
-                <a:latin typeface="Cambria"/>
-              </a:rPr>
-              <a:t>04</a:t>
+            <a:off x="2743200" y="3822191"/>
+            <a:ext cx="4023360" cy="548640"/>
+          </a:xfrm>
+          <a:prstGeom prst="rect">
+            <a:avLst/>
+          </a:prstGeom>
+          <a:noFill/>
+        </p:spPr>
+        <p:txBody>
+          <a:bodyPr wrap="square" lIns="0" rIns="0" tIns="0" bIns="0" anchor="t">
+            <a:spAutoFit/>
+          </a:bodyPr>
+          <a:lstStyle/>
+          <a:p>
+            <a:pPr algn="l"/>
+            <a:r>
+              <a:rPr sz="1250" b="0" i="1">
+                <a:solidFill>
+                  <a:srgbClr val="697482"/>
+                </a:solidFill>
+                <a:latin typeface="Calibri"/>
+              </a:rPr>
+              <a:t>“Free returns only”</a:t>
             </a:r>
           </a:p>
         </p:txBody>
@@ -8646,65 +9668,74 @@
         </p:nvSpPr>
         <p:spPr>
           <a:xfrm>
-            <a:off x="1353312" y="4489704"/>
-            <a:ext cx="5669280" cy="384048"/>
-          </a:xfrm>
-          <a:prstGeom prst="rect">
-            <a:avLst/>
-          </a:prstGeom>
-          <a:noFill/>
-        </p:spPr>
-        <p:txBody>
-          <a:bodyPr wrap="square" lIns="0" rIns="0" tIns="0" bIns="0" anchor="t">
-            <a:spAutoFit/>
-          </a:bodyPr>
-          <a:lstStyle/>
-          <a:p>
-            <a:pPr algn="l"/>
-            <a:r>
-              <a:rPr sz="1500" b="1" i="0">
-                <a:solidFill>
-                  <a:srgbClr val="14181C"/>
-                </a:solidFill>
-                <a:latin typeface="Calibri"/>
-              </a:rPr>
-              <a:t>Most search advertising is not positioning</a:t>
-            </a:r>
-          </a:p>
-        </p:txBody>
-      </p:sp>
-      <p:sp>
-        <p:nvSpPr>
-          <p:cNvPr id="15" name="TextBox 14"/>
-          <p:cNvSpPr txBox="1"/>
-          <p:nvPr/>
-        </p:nvSpPr>
-        <p:spPr>
-          <a:xfrm>
-            <a:off x="7132320" y="4507992"/>
-            <a:ext cx="4480560" cy="566928"/>
-          </a:xfrm>
-          <a:prstGeom prst="rect">
-            <a:avLst/>
-          </a:prstGeom>
-          <a:noFill/>
-        </p:spPr>
-        <p:txBody>
-          <a:bodyPr wrap="square" lIns="0" rIns="0" tIns="0" bIns="0" anchor="t">
-            <a:spAutoFit/>
-          </a:bodyPr>
-          <a:lstStyle/>
-          <a:p>
-            <a:pPr algn="l"/>
-            <a:r>
-              <a:rPr sz="1250" b="0" i="0">
-                <a:solidFill>
-                  <a:srgbClr val="6B7280"/>
-                </a:solidFill>
-                <a:latin typeface="Calibri"/>
-              </a:rPr>
-              <a:t>Only 16 of 101 ads were brand-level. The rest is product feed.</a:t>
-            </a:r>
+            <a:off x="7040880" y="3822191"/>
+            <a:ext cx="4206240" cy="640080"/>
+          </a:xfrm>
+          <a:prstGeom prst="rect">
+            <a:avLst/>
+          </a:prstGeom>
+          <a:noFill/>
+        </p:spPr>
+        <p:txBody>
+          <a:bodyPr wrap="square" lIns="0" rIns="0" tIns="0" bIns="0" anchor="t">
+            <a:spAutoFit/>
+          </a:bodyPr>
+          <a:lstStyle/>
+          <a:p>
+            <a:pPr algn="l"/>
+            <a:r>
+              <a:rPr sz="1250" b="1" i="0">
+                <a:solidFill>
+                  <a:srgbClr val="C2410C"/>
+                </a:solidFill>
+                <a:latin typeface="Calibri"/>
+              </a:rPr>
+              <a:t>4.6 from 200 reviews</a:t>
+            </a:r>
+          </a:p>
+        </p:txBody>
+      </p:sp>
+      <p:sp>
+        <p:nvSpPr>
+          <p:cNvPr id="15" name="Rectangle 14"/>
+          <p:cNvSpPr/>
+          <p:nvPr/>
+        </p:nvSpPr>
+        <p:spPr>
+          <a:xfrm>
+            <a:off x="640080" y="4462272"/>
+            <a:ext cx="10911535" cy="7315"/>
+          </a:xfrm>
+          <a:prstGeom prst="rect">
+            <a:avLst/>
+          </a:prstGeom>
+          <a:solidFill>
+            <a:srgbClr val="DFE7EF"/>
+          </a:solidFill>
+          <a:ln>
+            <a:noFill/>
+          </a:ln>
+          <a:effectLst/>
+        </p:spPr>
+        <p:style>
+          <a:lnRef idx="1">
+            <a:schemeClr val="accent1"/>
+          </a:lnRef>
+          <a:fillRef idx="3">
+            <a:schemeClr val="accent1"/>
+          </a:fillRef>
+          <a:effectRef idx="2">
+            <a:schemeClr val="accent1"/>
+          </a:effectRef>
+          <a:fontRef idx="minor">
+            <a:schemeClr val="lt1"/>
+          </a:fontRef>
+        </p:style>
+        <p:txBody>
+          <a:bodyPr rtlCol="0" anchor="ctr"/>
+          <a:lstStyle/>
+          <a:p>
+            <a:pPr algn="ctr"/>
           </a:p>
         </p:txBody>
       </p:sp>
@@ -8716,29 +9747,29 @@
         </p:nvSpPr>
         <p:spPr>
           <a:xfrm>
-            <a:off x="640080" y="5358384"/>
-            <a:ext cx="548640" cy="320040"/>
-          </a:xfrm>
-          <a:prstGeom prst="rect">
-            <a:avLst/>
-          </a:prstGeom>
-          <a:noFill/>
-        </p:spPr>
-        <p:txBody>
-          <a:bodyPr wrap="square" lIns="0" rIns="0" tIns="0" bIns="0" anchor="t">
-            <a:spAutoFit/>
-          </a:bodyPr>
-          <a:lstStyle/>
-          <a:p>
-            <a:pPr algn="l"/>
-            <a:r>
-              <a:rPr sz="1600" b="1" i="0">
-                <a:solidFill>
-                  <a:srgbClr val="E8562A"/>
-                </a:solidFill>
-                <a:latin typeface="Cambria"/>
-              </a:rPr>
-              <a:t>05</a:t>
+            <a:off x="640080" y="4608576"/>
+            <a:ext cx="2011680" cy="411480"/>
+          </a:xfrm>
+          <a:prstGeom prst="rect">
+            <a:avLst/>
+          </a:prstGeom>
+          <a:noFill/>
+        </p:spPr>
+        <p:txBody>
+          <a:bodyPr wrap="square" lIns="0" rIns="0" tIns="0" bIns="0" anchor="t">
+            <a:spAutoFit/>
+          </a:bodyPr>
+          <a:lstStyle/>
+          <a:p>
+            <a:pPr algn="l"/>
+            <a:r>
+              <a:rPr sz="1400" b="1" i="0">
+                <a:solidFill>
+                  <a:srgbClr val="1F2933"/>
+                </a:solidFill>
+                <a:latin typeface="Calibri"/>
+              </a:rPr>
+              <a:t>lululemon</a:t>
             </a:r>
           </a:p>
         </p:txBody>
@@ -8751,29 +9782,29 @@
         </p:nvSpPr>
         <p:spPr>
           <a:xfrm>
-            <a:off x="1353312" y="5330952"/>
-            <a:ext cx="5669280" cy="384048"/>
-          </a:xfrm>
-          <a:prstGeom prst="rect">
-            <a:avLst/>
-          </a:prstGeom>
-          <a:noFill/>
-        </p:spPr>
-        <p:txBody>
-          <a:bodyPr wrap="square" lIns="0" rIns="0" tIns="0" bIns="0" anchor="t">
-            <a:spAutoFit/>
-          </a:bodyPr>
-          <a:lstStyle/>
-          <a:p>
-            <a:pPr algn="l"/>
-            <a:r>
-              <a:rPr sz="1500" b="1" i="0">
-                <a:solidFill>
-                  <a:srgbClr val="14181C"/>
-                </a:solidFill>
-                <a:latin typeface="Calibri"/>
-              </a:rPr>
-              <a:t>The valuable output was the empty column</a:t>
+            <a:off x="2743200" y="4608576"/>
+            <a:ext cx="4023360" cy="548640"/>
+          </a:xfrm>
+          <a:prstGeom prst="rect">
+            <a:avLst/>
+          </a:prstGeom>
+          <a:noFill/>
+        </p:spPr>
+        <p:txBody>
+          <a:bodyPr wrap="square" lIns="0" rIns="0" tIns="0" bIns="0" anchor="t">
+            <a:spAutoFit/>
+          </a:bodyPr>
+          <a:lstStyle/>
+          <a:p>
+            <a:pPr algn="l"/>
+            <a:r>
+              <a:rPr sz="1250" b="0" i="1">
+                <a:solidFill>
+                  <a:srgbClr val="697482"/>
+                </a:solidFill>
+                <a:latin typeface="Calibri"/>
+              </a:rPr>
+              <a:t>“Fabric adjectives only”</a:t>
             </a:r>
           </a:p>
         </p:txBody>
@@ -8786,29 +9817,108 @@
         </p:nvSpPr>
         <p:spPr>
           <a:xfrm>
-            <a:off x="7132320" y="5349240"/>
-            <a:ext cx="4480560" cy="566928"/>
-          </a:xfrm>
-          <a:prstGeom prst="rect">
-            <a:avLst/>
-          </a:prstGeom>
-          <a:noFill/>
-        </p:spPr>
-        <p:txBody>
-          <a:bodyPr wrap="square" lIns="0" rIns="0" tIns="0" bIns="0" anchor="t">
-            <a:spAutoFit/>
-          </a:bodyPr>
-          <a:lstStyle/>
-          <a:p>
-            <a:pPr algn="l"/>
-            <a:r>
-              <a:rPr sz="1250" b="0" i="0">
-                <a:solidFill>
-                  <a:srgbClr val="6B7280"/>
-                </a:solidFill>
-                <a:latin typeface="Calibri"/>
-              </a:rPr>
-              <a:t>Every recommendation came from what nobody said.</a:t>
+            <a:off x="7040880" y="4608576"/>
+            <a:ext cx="4206240" cy="640080"/>
+          </a:xfrm>
+          <a:prstGeom prst="rect">
+            <a:avLst/>
+          </a:prstGeom>
+          <a:noFill/>
+        </p:spPr>
+        <p:txBody>
+          <a:bodyPr wrap="square" lIns="0" rIns="0" tIns="0" bIns="0" anchor="t">
+            <a:spAutoFit/>
+          </a:bodyPr>
+          <a:lstStyle/>
+          <a:p>
+            <a:pPr algn="l"/>
+            <a:r>
+              <a:rPr sz="1250" b="1" i="0">
+                <a:solidFill>
+                  <a:srgbClr val="C2410C"/>
+                </a:solidFill>
+                <a:latin typeface="Calibri"/>
+              </a:rPr>
+              <a:t>Three separate ratings</a:t>
+            </a:r>
+          </a:p>
+        </p:txBody>
+      </p:sp>
+      <p:sp>
+        <p:nvSpPr>
+          <p:cNvPr id="19" name="Rectangle 18"/>
+          <p:cNvSpPr/>
+          <p:nvPr/>
+        </p:nvSpPr>
+        <p:spPr>
+          <a:xfrm>
+            <a:off x="640080" y="5248656"/>
+            <a:ext cx="10911535" cy="7315"/>
+          </a:xfrm>
+          <a:prstGeom prst="rect">
+            <a:avLst/>
+          </a:prstGeom>
+          <a:solidFill>
+            <a:srgbClr val="DFE7EF"/>
+          </a:solidFill>
+          <a:ln>
+            <a:noFill/>
+          </a:ln>
+          <a:effectLst/>
+        </p:spPr>
+        <p:style>
+          <a:lnRef idx="1">
+            <a:schemeClr val="accent1"/>
+          </a:lnRef>
+          <a:fillRef idx="3">
+            <a:schemeClr val="accent1"/>
+          </a:fillRef>
+          <a:effectRef idx="2">
+            <a:schemeClr val="accent1"/>
+          </a:effectRef>
+          <a:fontRef idx="minor">
+            <a:schemeClr val="lt1"/>
+          </a:fontRef>
+        </p:style>
+        <p:txBody>
+          <a:bodyPr rtlCol="0" anchor="ctr"/>
+          <a:lstStyle/>
+          <a:p>
+            <a:pPr algn="ctr"/>
+          </a:p>
+        </p:txBody>
+      </p:sp>
+      <p:sp>
+        <p:nvSpPr>
+          <p:cNvPr id="20" name="TextBox 19"/>
+          <p:cNvSpPr txBox="1"/>
+          <p:nvPr/>
+        </p:nvSpPr>
+        <p:spPr>
+          <a:xfrm>
+            <a:off x="640080" y="5623560"/>
+            <a:ext cx="10911535" cy="640080"/>
+          </a:xfrm>
+          <a:prstGeom prst="rect">
+            <a:avLst/>
+          </a:prstGeom>
+          <a:noFill/>
+        </p:spPr>
+        <p:txBody>
+          <a:bodyPr wrap="square" lIns="0" rIns="0" tIns="0" bIns="0" anchor="t">
+            <a:spAutoFit/>
+          </a:bodyPr>
+          <a:lstStyle/>
+          <a:p>
+            <a:pPr algn="l"/>
+            <a:r>
+              <a:rPr sz="1300" b="0" i="0">
+                <a:solidFill>
+                  <a:srgbClr val="44515F"/>
+                </a:solidFill>
+                <a:latin typeface="Calibri"/>
+              </a:rPr>
+              <a:t>The Transparency Center shows four ads until you click “See all ads.” Those four skew to product listings, which carry no ratings. We went back and collected the full lists.</a:t>
             </a:r>
           </a:p>
         </p:txBody>
@@ -8827,7 +9937,7 @@
     <p:bg>
       <p:bgPr>
         <a:solidFill>
-          <a:srgbClr val="14181C"/>
+          <a:srgbClr val="FFFFFF"/>
         </a:solidFill>
         <a:effectLst/>
       </p:bgPr>
@@ -8847,128 +9957,99 @@
         </p:nvSpPr>
         <p:spPr>
           <a:xfrm>
-            <a:off x="640080" y="1783080"/>
-            <a:ext cx="10607040" cy="1920240"/>
-          </a:xfrm>
-          <a:prstGeom prst="rect">
-            <a:avLst/>
-          </a:prstGeom>
-          <a:noFill/>
-        </p:spPr>
-        <p:txBody>
-          <a:bodyPr wrap="square" lIns="0" rIns="0" tIns="0" bIns="0" anchor="t">
-            <a:spAutoFit/>
-          </a:bodyPr>
-          <a:lstStyle/>
-          <a:p>
-            <a:pPr algn="l">
-              <a:lnSpc>
-                <a:spcPts val="4600"/>
-              </a:lnSpc>
-            </a:pPr>
-            <a:r>
-              <a:rPr sz="3800" b="1" i="0">
-                <a:solidFill>
-                  <a:srgbClr val="FFFFFF"/>
+            <a:off x="640080" y="310896"/>
+            <a:ext cx="10911535" cy="256032"/>
+          </a:xfrm>
+          <a:prstGeom prst="rect">
+            <a:avLst/>
+          </a:prstGeom>
+          <a:noFill/>
+        </p:spPr>
+        <p:txBody>
+          <a:bodyPr wrap="square" lIns="0" rIns="0" tIns="0" bIns="0" anchor="t">
+            <a:spAutoFit/>
+          </a:bodyPr>
+          <a:lstStyle/>
+          <a:p>
+            <a:pPr algn="l"/>
+            <a:r>
+              <a:rPr sz="1100" b="1" i="0">
+                <a:solidFill>
+                  <a:srgbClr val="C2410C"/>
+                </a:solidFill>
+                <a:latin typeface="Calibri"/>
+              </a:rPr>
+              <a:t>WHAT WE LEARNED</a:t>
+            </a:r>
+          </a:p>
+        </p:txBody>
+      </p:sp>
+      <p:sp>
+        <p:nvSpPr>
+          <p:cNvPr id="3" name="TextBox 2"/>
+          <p:cNvSpPr txBox="1"/>
+          <p:nvPr/>
+        </p:nvSpPr>
+        <p:spPr>
+          <a:xfrm>
+            <a:off x="640080" y="566928"/>
+            <a:ext cx="10911535" cy="960120"/>
+          </a:xfrm>
+          <a:prstGeom prst="rect">
+            <a:avLst/>
+          </a:prstGeom>
+          <a:noFill/>
+        </p:spPr>
+        <p:txBody>
+          <a:bodyPr wrap="square" lIns="0" rIns="0" tIns="0" bIns="0" anchor="t">
+            <a:spAutoFit/>
+          </a:bodyPr>
+          <a:lstStyle/>
+          <a:p>
+            <a:pPr algn="l"/>
+            <a:r>
+              <a:rPr sz="3600" b="1" i="0">
+                <a:solidFill>
+                  <a:srgbClr val="1F2933"/>
                 </a:solidFill>
                 <a:latin typeface="Cambria"/>
               </a:rPr>
-              <a:t>Everyone is selling the same fabric.</a:t>
-            </a:r>
-          </a:p>
-          <a:p>
-            <a:pPr algn="l">
-              <a:lnSpc>
-                <a:spcPts val="4600"/>
-              </a:lnSpc>
-            </a:pPr>
-            <a:r>
-              <a:rPr sz="3800" b="1" i="0">
-                <a:solidFill>
-                  <a:srgbClr val="FFFFFF"/>
+              <a:t>Five things the workbook does not show</a:t>
+            </a:r>
+          </a:p>
+        </p:txBody>
+      </p:sp>
+      <p:sp>
+        <p:nvSpPr>
+          <p:cNvPr id="4" name="TextBox 3"/>
+          <p:cNvSpPr txBox="1"/>
+          <p:nvPr/>
+        </p:nvSpPr>
+        <p:spPr>
+          <a:xfrm>
+            <a:off x="640080" y="1993392"/>
+            <a:ext cx="548640" cy="320040"/>
+          </a:xfrm>
+          <a:prstGeom prst="rect">
+            <a:avLst/>
+          </a:prstGeom>
+          <a:noFill/>
+        </p:spPr>
+        <p:txBody>
+          <a:bodyPr wrap="square" lIns="0" rIns="0" tIns="0" bIns="0" anchor="t">
+            <a:spAutoFit/>
+          </a:bodyPr>
+          <a:lstStyle/>
+          <a:p>
+            <a:pPr algn="l"/>
+            <a:r>
+              <a:rPr sz="1600" b="1" i="0">
+                <a:solidFill>
+                  <a:srgbClr val="C2410C"/>
                 </a:solidFill>
                 <a:latin typeface="Cambria"/>
               </a:rPr>
-              <a:t>Nobody is selling belonging with proof.</a:t>
-            </a:r>
-          </a:p>
-        </p:txBody>
-      </p:sp>
-      <p:sp>
-        <p:nvSpPr>
-          <p:cNvPr id="3" name="Rectangle 2"/>
-          <p:cNvSpPr/>
-          <p:nvPr/>
-        </p:nvSpPr>
-        <p:spPr>
-          <a:xfrm>
-            <a:off x="640080" y="3840480"/>
-            <a:ext cx="1371600" cy="36576"/>
-          </a:xfrm>
-          <a:prstGeom prst="rect">
-            <a:avLst/>
-          </a:prstGeom>
-          <a:solidFill>
-            <a:srgbClr val="E8562A"/>
-          </a:solidFill>
-          <a:ln>
-            <a:noFill/>
-          </a:ln>
-          <a:effectLst/>
-        </p:spPr>
-        <p:style>
-          <a:lnRef idx="1">
-            <a:schemeClr val="accent1"/>
-          </a:lnRef>
-          <a:fillRef idx="3">
-            <a:schemeClr val="accent1"/>
-          </a:fillRef>
-          <a:effectRef idx="2">
-            <a:schemeClr val="accent1"/>
-          </a:effectRef>
-          <a:fontRef idx="minor">
-            <a:schemeClr val="lt1"/>
-          </a:fontRef>
-        </p:style>
-        <p:txBody>
-          <a:bodyPr rtlCol="0" anchor="ctr"/>
-          <a:lstStyle/>
-          <a:p>
-            <a:pPr algn="ctr"/>
-          </a:p>
-        </p:txBody>
-      </p:sp>
-      <p:sp>
-        <p:nvSpPr>
-          <p:cNvPr id="4" name="TextBox 3"/>
-          <p:cNvSpPr txBox="1"/>
-          <p:nvPr/>
-        </p:nvSpPr>
-        <p:spPr>
-          <a:xfrm>
-            <a:off x="640080" y="4114800"/>
-            <a:ext cx="7315200" cy="457200"/>
-          </a:xfrm>
-          <a:prstGeom prst="rect">
-            <a:avLst/>
-          </a:prstGeom>
-          <a:noFill/>
-        </p:spPr>
-        <p:txBody>
-          <a:bodyPr wrap="square" lIns="0" rIns="0" tIns="0" bIns="0" anchor="t">
-            <a:spAutoFit/>
-          </a:bodyPr>
-          <a:lstStyle/>
-          <a:p>
-            <a:pPr algn="l"/>
-            <a:r>
-              <a:rPr sz="2000" b="0" i="0">
-                <a:solidFill>
-                  <a:srgbClr val="FF7A4D"/>
-                </a:solidFill>
-                <a:latin typeface="Calibri"/>
-              </a:rPr>
-              <a:t>That is the lane.</a:t>
+              <a:t>01</a:t>
             </a:r>
           </a:p>
         </p:txBody>
@@ -8981,29 +10062,29 @@
         </p:nvSpPr>
         <p:spPr>
           <a:xfrm>
-            <a:off x="640080" y="5074920"/>
-            <a:ext cx="8229600" cy="274320"/>
-          </a:xfrm>
-          <a:prstGeom prst="rect">
-            <a:avLst/>
-          </a:prstGeom>
-          <a:noFill/>
-        </p:spPr>
-        <p:txBody>
-          <a:bodyPr wrap="square" lIns="0" rIns="0" tIns="0" bIns="0" anchor="t">
-            <a:spAutoFit/>
-          </a:bodyPr>
-          <a:lstStyle/>
-          <a:p>
-            <a:pPr algn="l"/>
-            <a:r>
-              <a:rPr sz="1200" b="0" i="0">
-                <a:solidFill>
-                  <a:srgbClr val="7A828C"/>
-                </a:solidFill>
-                <a:latin typeface="Calibri"/>
-              </a:rPr>
-              <a:t>Workbook, data, tagging and full write-up:</a:t>
+            <a:off x="1353312" y="1965960"/>
+            <a:ext cx="5669280" cy="384048"/>
+          </a:xfrm>
+          <a:prstGeom prst="rect">
+            <a:avLst/>
+          </a:prstGeom>
+          <a:noFill/>
+        </p:spPr>
+        <p:txBody>
+          <a:bodyPr wrap="square" lIns="0" rIns="0" tIns="0" bIns="0" anchor="t">
+            <a:spAutoFit/>
+          </a:bodyPr>
+          <a:lstStyle/>
+          <a:p>
+            <a:pPr algn="l"/>
+            <a:r>
+              <a:rPr sz="1500" b="1" i="0">
+                <a:solidFill>
+                  <a:srgbClr val="1F2933"/>
+                </a:solidFill>
+                <a:latin typeface="Calibri"/>
+              </a:rPr>
+              <a:t>The bottleneck was collection, not intelligence</a:t>
             </a:r>
           </a:p>
         </p:txBody>
@@ -9016,29 +10097,29 @@
         </p:nvSpPr>
         <p:spPr>
           <a:xfrm>
-            <a:off x="640080" y="5367528"/>
-            <a:ext cx="8686800" cy="320040"/>
-          </a:xfrm>
-          <a:prstGeom prst="rect">
-            <a:avLst/>
-          </a:prstGeom>
-          <a:noFill/>
-        </p:spPr>
-        <p:txBody>
-          <a:bodyPr wrap="square" lIns="0" rIns="0" tIns="0" bIns="0" anchor="t">
-            <a:spAutoFit/>
-          </a:bodyPr>
-          <a:lstStyle/>
-          <a:p>
-            <a:pPr algn="l"/>
-            <a:r>
-              <a:rPr sz="1400" b="1" i="0">
-                <a:solidFill>
-                  <a:srgbClr val="FFFFFF"/>
-                </a:solidFill>
-                <a:latin typeface="Calibri"/>
-              </a:rPr>
-              <a:t>github.com/spdooley5949/Creative-Teardown-Marketing</a:t>
+            <a:off x="7132320" y="1984248"/>
+            <a:ext cx="4480560" cy="566928"/>
+          </a:xfrm>
+          <a:prstGeom prst="rect">
+            <a:avLst/>
+          </a:prstGeom>
+          <a:noFill/>
+        </p:spPr>
+        <p:txBody>
+          <a:bodyPr wrap="square" lIns="0" rIns="0" tIns="0" bIns="0" anchor="t">
+            <a:spAutoFit/>
+          </a:bodyPr>
+          <a:lstStyle/>
+          <a:p>
+            <a:pPr algn="l"/>
+            <a:r>
+              <a:rPr sz="1250" b="0" i="0">
+                <a:solidFill>
+                  <a:srgbClr val="44515F"/>
+                </a:solidFill>
+                <a:latin typeface="Calibri"/>
+              </a:rPr>
+              <a:t>Classifying 101 ads took ninety seconds. Collecting them took hours.</a:t>
             </a:r>
           </a:p>
         </p:txBody>
@@ -9051,29 +10132,414 @@
         </p:nvSpPr>
         <p:spPr>
           <a:xfrm>
-            <a:off x="640080" y="6035040"/>
-            <a:ext cx="10607040" cy="274320"/>
-          </a:xfrm>
-          <a:prstGeom prst="rect">
-            <a:avLst/>
-          </a:prstGeom>
-          <a:noFill/>
-        </p:spPr>
-        <p:txBody>
-          <a:bodyPr wrap="square" lIns="0" rIns="0" tIns="0" bIns="0" anchor="t">
-            <a:spAutoFit/>
-          </a:bodyPr>
-          <a:lstStyle/>
-          <a:p>
-            <a:pPr algn="l"/>
-            <a:r>
-              <a:rPr sz="1100" b="0" i="0">
-                <a:solidFill>
-                  <a:srgbClr val="6B7280"/>
-                </a:solidFill>
-                <a:latin typeface="Calibri"/>
-              </a:rPr>
-              <a:t>Shane Dooley   ·   with Andrew Silver, Catherine Chambers, Jessica Smith, Jesse Padilla and William Levine</a:t>
+            <a:off x="640080" y="2834640"/>
+            <a:ext cx="548640" cy="320040"/>
+          </a:xfrm>
+          <a:prstGeom prst="rect">
+            <a:avLst/>
+          </a:prstGeom>
+          <a:noFill/>
+        </p:spPr>
+        <p:txBody>
+          <a:bodyPr wrap="square" lIns="0" rIns="0" tIns="0" bIns="0" anchor="t">
+            <a:spAutoFit/>
+          </a:bodyPr>
+          <a:lstStyle/>
+          <a:p>
+            <a:pPr algn="l"/>
+            <a:r>
+              <a:rPr sz="1600" b="1" i="0">
+                <a:solidFill>
+                  <a:srgbClr val="C2410C"/>
+                </a:solidFill>
+                <a:latin typeface="Cambria"/>
+              </a:rPr>
+              <a:t>02</a:t>
+            </a:r>
+          </a:p>
+        </p:txBody>
+      </p:sp>
+      <p:sp>
+        <p:nvSpPr>
+          <p:cNvPr id="8" name="TextBox 7"/>
+          <p:cNvSpPr txBox="1"/>
+          <p:nvPr/>
+        </p:nvSpPr>
+        <p:spPr>
+          <a:xfrm>
+            <a:off x="1353312" y="2807208"/>
+            <a:ext cx="5669280" cy="384048"/>
+          </a:xfrm>
+          <a:prstGeom prst="rect">
+            <a:avLst/>
+          </a:prstGeom>
+          <a:noFill/>
+        </p:spPr>
+        <p:txBody>
+          <a:bodyPr wrap="square" lIns="0" rIns="0" tIns="0" bIns="0" anchor="t">
+            <a:spAutoFit/>
+          </a:bodyPr>
+          <a:lstStyle/>
+          <a:p>
+            <a:pPr algn="l"/>
+            <a:r>
+              <a:rPr sz="1500" b="1" i="0">
+                <a:solidFill>
+                  <a:srgbClr val="1F2933"/>
+                </a:solidFill>
+                <a:latin typeface="Calibri"/>
+              </a:rPr>
+              <a:t>A shallow sample gives a confident wrong answer</a:t>
+            </a:r>
+          </a:p>
+        </p:txBody>
+      </p:sp>
+      <p:sp>
+        <p:nvSpPr>
+          <p:cNvPr id="9" name="TextBox 8"/>
+          <p:cNvSpPr txBox="1"/>
+          <p:nvPr/>
+        </p:nvSpPr>
+        <p:spPr>
+          <a:xfrm>
+            <a:off x="7132320" y="2825496"/>
+            <a:ext cx="4480560" cy="566928"/>
+          </a:xfrm>
+          <a:prstGeom prst="rect">
+            <a:avLst/>
+          </a:prstGeom>
+          <a:noFill/>
+        </p:spPr>
+        <p:txBody>
+          <a:bodyPr wrap="square" lIns="0" rIns="0" tIns="0" bIns="0" anchor="t">
+            <a:spAutoFit/>
+          </a:bodyPr>
+          <a:lstStyle/>
+          <a:p>
+            <a:pPr algn="l"/>
+            <a:r>
+              <a:rPr sz="1250" b="0" i="0">
+                <a:solidFill>
+                  <a:srgbClr val="44515F"/>
+                </a:solidFill>
+                <a:latin typeface="Calibri"/>
+              </a:rPr>
+              <a:t>Not a vague one. That is far more dangerous.</a:t>
+            </a:r>
+          </a:p>
+        </p:txBody>
+      </p:sp>
+      <p:sp>
+        <p:nvSpPr>
+          <p:cNvPr id="10" name="TextBox 9"/>
+          <p:cNvSpPr txBox="1"/>
+          <p:nvPr/>
+        </p:nvSpPr>
+        <p:spPr>
+          <a:xfrm>
+            <a:off x="640080" y="3675888"/>
+            <a:ext cx="548640" cy="320040"/>
+          </a:xfrm>
+          <a:prstGeom prst="rect">
+            <a:avLst/>
+          </a:prstGeom>
+          <a:noFill/>
+        </p:spPr>
+        <p:txBody>
+          <a:bodyPr wrap="square" lIns="0" rIns="0" tIns="0" bIns="0" anchor="t">
+            <a:spAutoFit/>
+          </a:bodyPr>
+          <a:lstStyle/>
+          <a:p>
+            <a:pPr algn="l"/>
+            <a:r>
+              <a:rPr sz="1600" b="1" i="0">
+                <a:solidFill>
+                  <a:srgbClr val="C2410C"/>
+                </a:solidFill>
+                <a:latin typeface="Cambria"/>
+              </a:rPr>
+              <a:t>03</a:t>
+            </a:r>
+          </a:p>
+        </p:txBody>
+      </p:sp>
+      <p:sp>
+        <p:nvSpPr>
+          <p:cNvPr id="11" name="TextBox 10"/>
+          <p:cNvSpPr txBox="1"/>
+          <p:nvPr/>
+        </p:nvSpPr>
+        <p:spPr>
+          <a:xfrm>
+            <a:off x="1353312" y="3648456"/>
+            <a:ext cx="5669280" cy="384048"/>
+          </a:xfrm>
+          <a:prstGeom prst="rect">
+            <a:avLst/>
+          </a:prstGeom>
+          <a:noFill/>
+        </p:spPr>
+        <p:txBody>
+          <a:bodyPr wrap="square" lIns="0" rIns="0" tIns="0" bIns="0" anchor="t">
+            <a:spAutoFit/>
+          </a:bodyPr>
+          <a:lstStyle/>
+          <a:p>
+            <a:pPr algn="l"/>
+            <a:r>
+              <a:rPr sz="1500" b="1" i="0">
+                <a:solidFill>
+                  <a:srgbClr val="1F2933"/>
+                </a:solidFill>
+                <a:latin typeface="Calibri"/>
+              </a:rPr>
+              <a:t>Model output drifts unless you freeze it</a:t>
+            </a:r>
+          </a:p>
+        </p:txBody>
+      </p:sp>
+      <p:sp>
+        <p:nvSpPr>
+          <p:cNvPr id="12" name="TextBox 11"/>
+          <p:cNvSpPr txBox="1"/>
+          <p:nvPr/>
+        </p:nvSpPr>
+        <p:spPr>
+          <a:xfrm>
+            <a:off x="7132320" y="3666744"/>
+            <a:ext cx="4480560" cy="566928"/>
+          </a:xfrm>
+          <a:prstGeom prst="rect">
+            <a:avLst/>
+          </a:prstGeom>
+          <a:noFill/>
+        </p:spPr>
+        <p:txBody>
+          <a:bodyPr wrap="square" lIns="0" rIns="0" tIns="0" bIns="0" anchor="t">
+            <a:spAutoFit/>
+          </a:bodyPr>
+          <a:lstStyle/>
+          <a:p>
+            <a:pPr algn="l"/>
+            <a:r>
+              <a:rPr sz="1250" b="0" i="0">
+                <a:solidFill>
+                  <a:srgbClr val="44515F"/>
+                </a:solidFill>
+                <a:latin typeface="Calibri"/>
+              </a:rPr>
+              <a:t>Two runs on identical data moved 14 tags and rewrote the headline.</a:t>
+            </a:r>
+          </a:p>
+        </p:txBody>
+      </p:sp>
+      <p:sp>
+        <p:nvSpPr>
+          <p:cNvPr id="13" name="TextBox 12"/>
+          <p:cNvSpPr txBox="1"/>
+          <p:nvPr/>
+        </p:nvSpPr>
+        <p:spPr>
+          <a:xfrm>
+            <a:off x="640080" y="4517136"/>
+            <a:ext cx="548640" cy="320040"/>
+          </a:xfrm>
+          <a:prstGeom prst="rect">
+            <a:avLst/>
+          </a:prstGeom>
+          <a:noFill/>
+        </p:spPr>
+        <p:txBody>
+          <a:bodyPr wrap="square" lIns="0" rIns="0" tIns="0" bIns="0" anchor="t">
+            <a:spAutoFit/>
+          </a:bodyPr>
+          <a:lstStyle/>
+          <a:p>
+            <a:pPr algn="l"/>
+            <a:r>
+              <a:rPr sz="1600" b="1" i="0">
+                <a:solidFill>
+                  <a:srgbClr val="C2410C"/>
+                </a:solidFill>
+                <a:latin typeface="Cambria"/>
+              </a:rPr>
+              <a:t>04</a:t>
+            </a:r>
+          </a:p>
+        </p:txBody>
+      </p:sp>
+      <p:sp>
+        <p:nvSpPr>
+          <p:cNvPr id="14" name="TextBox 13"/>
+          <p:cNvSpPr txBox="1"/>
+          <p:nvPr/>
+        </p:nvSpPr>
+        <p:spPr>
+          <a:xfrm>
+            <a:off x="1353312" y="4489704"/>
+            <a:ext cx="5669280" cy="384048"/>
+          </a:xfrm>
+          <a:prstGeom prst="rect">
+            <a:avLst/>
+          </a:prstGeom>
+          <a:noFill/>
+        </p:spPr>
+        <p:txBody>
+          <a:bodyPr wrap="square" lIns="0" rIns="0" tIns="0" bIns="0" anchor="t">
+            <a:spAutoFit/>
+          </a:bodyPr>
+          <a:lstStyle/>
+          <a:p>
+            <a:pPr algn="l"/>
+            <a:r>
+              <a:rPr sz="1500" b="1" i="0">
+                <a:solidFill>
+                  <a:srgbClr val="1F2933"/>
+                </a:solidFill>
+                <a:latin typeface="Calibri"/>
+              </a:rPr>
+              <a:t>Most search advertising is not positioning</a:t>
+            </a:r>
+          </a:p>
+        </p:txBody>
+      </p:sp>
+      <p:sp>
+        <p:nvSpPr>
+          <p:cNvPr id="15" name="TextBox 14"/>
+          <p:cNvSpPr txBox="1"/>
+          <p:nvPr/>
+        </p:nvSpPr>
+        <p:spPr>
+          <a:xfrm>
+            <a:off x="7132320" y="4507992"/>
+            <a:ext cx="4480560" cy="566928"/>
+          </a:xfrm>
+          <a:prstGeom prst="rect">
+            <a:avLst/>
+          </a:prstGeom>
+          <a:noFill/>
+        </p:spPr>
+        <p:txBody>
+          <a:bodyPr wrap="square" lIns="0" rIns="0" tIns="0" bIns="0" anchor="t">
+            <a:spAutoFit/>
+          </a:bodyPr>
+          <a:lstStyle/>
+          <a:p>
+            <a:pPr algn="l"/>
+            <a:r>
+              <a:rPr sz="1250" b="0" i="0">
+                <a:solidFill>
+                  <a:srgbClr val="44515F"/>
+                </a:solidFill>
+                <a:latin typeface="Calibri"/>
+              </a:rPr>
+              <a:t>Only 16 of 101 ads were brand-level. The rest is product feed.</a:t>
+            </a:r>
+          </a:p>
+        </p:txBody>
+      </p:sp>
+      <p:sp>
+        <p:nvSpPr>
+          <p:cNvPr id="16" name="TextBox 15"/>
+          <p:cNvSpPr txBox="1"/>
+          <p:nvPr/>
+        </p:nvSpPr>
+        <p:spPr>
+          <a:xfrm>
+            <a:off x="640080" y="5358384"/>
+            <a:ext cx="548640" cy="320040"/>
+          </a:xfrm>
+          <a:prstGeom prst="rect">
+            <a:avLst/>
+          </a:prstGeom>
+          <a:noFill/>
+        </p:spPr>
+        <p:txBody>
+          <a:bodyPr wrap="square" lIns="0" rIns="0" tIns="0" bIns="0" anchor="t">
+            <a:spAutoFit/>
+          </a:bodyPr>
+          <a:lstStyle/>
+          <a:p>
+            <a:pPr algn="l"/>
+            <a:r>
+              <a:rPr sz="1600" b="1" i="0">
+                <a:solidFill>
+                  <a:srgbClr val="C2410C"/>
+                </a:solidFill>
+                <a:latin typeface="Cambria"/>
+              </a:rPr>
+              <a:t>05</a:t>
+            </a:r>
+          </a:p>
+        </p:txBody>
+      </p:sp>
+      <p:sp>
+        <p:nvSpPr>
+          <p:cNvPr id="17" name="TextBox 16"/>
+          <p:cNvSpPr txBox="1"/>
+          <p:nvPr/>
+        </p:nvSpPr>
+        <p:spPr>
+          <a:xfrm>
+            <a:off x="1353312" y="5330952"/>
+            <a:ext cx="5669280" cy="384048"/>
+          </a:xfrm>
+          <a:prstGeom prst="rect">
+            <a:avLst/>
+          </a:prstGeom>
+          <a:noFill/>
+        </p:spPr>
+        <p:txBody>
+          <a:bodyPr wrap="square" lIns="0" rIns="0" tIns="0" bIns="0" anchor="t">
+            <a:spAutoFit/>
+          </a:bodyPr>
+          <a:lstStyle/>
+          <a:p>
+            <a:pPr algn="l"/>
+            <a:r>
+              <a:rPr sz="1500" b="1" i="0">
+                <a:solidFill>
+                  <a:srgbClr val="1F2933"/>
+                </a:solidFill>
+                <a:latin typeface="Calibri"/>
+              </a:rPr>
+              <a:t>The valuable output was the empty column</a:t>
+            </a:r>
+          </a:p>
+        </p:txBody>
+      </p:sp>
+      <p:sp>
+        <p:nvSpPr>
+          <p:cNvPr id="18" name="TextBox 17"/>
+          <p:cNvSpPr txBox="1"/>
+          <p:nvPr/>
+        </p:nvSpPr>
+        <p:spPr>
+          <a:xfrm>
+            <a:off x="7132320" y="5349240"/>
+            <a:ext cx="4480560" cy="566928"/>
+          </a:xfrm>
+          <a:prstGeom prst="rect">
+            <a:avLst/>
+          </a:prstGeom>
+          <a:noFill/>
+        </p:spPr>
+        <p:txBody>
+          <a:bodyPr wrap="square" lIns="0" rIns="0" tIns="0" bIns="0" anchor="t">
+            <a:spAutoFit/>
+          </a:bodyPr>
+          <a:lstStyle/>
+          <a:p>
+            <a:pPr algn="l"/>
+            <a:r>
+              <a:rPr sz="1250" b="0" i="0">
+                <a:solidFill>
+                  <a:srgbClr val="44515F"/>
+                </a:solidFill>
+                <a:latin typeface="Calibri"/>
+              </a:rPr>
+              <a:t>Every recommendation came from what nobody said.</a:t>
             </a:r>
           </a:p>
         </p:txBody>

--- a/output/Dooley_Creative_Teardown_Findings.pptx
+++ b/output/Dooley_Creative_Teardown_Findings.pptx
@@ -215,10 +215,10 @@
                   <c:v>Sustainability</c:v>
                 </c:pt>
                 <c:pt idx="2">
-                  <c:v>Price / Value</c:v>
+                  <c:v>Innovation</c:v>
                 </c:pt>
                 <c:pt idx="3">
-                  <c:v>Innovation</c:v>
+                  <c:v>Price / Value</c:v>
                 </c:pt>
                 <c:pt idx="4">
                   <c:v>Style</c:v>
@@ -242,22 +242,22 @@
                 <c:formatCode>General</c:formatCode>
                 <c:ptCount val="8"/>
                 <c:pt idx="0">
-                  <c:v>5</c:v>
+                  <c:v>6</c:v>
                 </c:pt>
                 <c:pt idx="1">
-                  <c:v>9</c:v>
+                  <c:v>7</c:v>
                 </c:pt>
                 <c:pt idx="2">
-                  <c:v>15</c:v>
+                  <c:v>14</c:v>
                 </c:pt>
                 <c:pt idx="3">
-                  <c:v>16</c:v>
+                  <c:v>34</c:v>
                 </c:pt>
                 <c:pt idx="4">
-                  <c:v>37</c:v>
+                  <c:v>36</c:v>
                 </c:pt>
                 <c:pt idx="5">
-                  <c:v>53</c:v>
+                  <c:v>51</c:v>
                 </c:pt>
                 <c:pt idx="6">
                   <c:v>58</c:v>
@@ -901,7 +901,7 @@
           <a:lstStyle/>
           <a:p>
             <a:r>
-              <a:t>Lead here. Three saturated claims, then the cliff. Do not explain method yet.</a:t>
+              <a:t>Lead here. Three saturated claims, then the cliff. Community is 6 ads, 5 of them Gymshark. Do not explain method yet.</a:t>
             </a:r>
           </a:p>
         </p:txBody>
@@ -1181,7 +1181,7 @@
           <a:lstStyle/>
           <a:p>
             <a:r>
-              <a:t>Arguably the stronger finding. Ratings are the category default proof, which makes review volume a competitive asset rather than hygiene.</a:t>
+              <a:t>67% carry no hard evidence after the audited proof cleanup. Also in the corrected data: Under Armour runs price language in 86% of its ads. Ratings are the category default proof.</a:t>
             </a:r>
           </a:p>
         </p:txBody>
@@ -1251,7 +1251,7 @@
           <a:lstStyle/>
           <a:p>
             <a:r>
-              <a:t>Hostile question to expect: why has Gymshark not already won this? Answer: they treat it as voice, not proof. Nobody publishes numbers.</a:t>
+              <a:t>Hostile question: has Gymshark not already won this? Answer: it owns the claim, not the proof — no numbers published, framed narrowly around the weight room, and ten brands ceded the lane.</a:t>
             </a:r>
           </a:p>
         </p:txBody>
@@ -5319,7 +5319,7 @@
                 </a:solidFill>
                 <a:latin typeface="Cambria"/>
               </a:rPr>
-              <a:t>53%</a:t>
+              <a:t>51%</a:t>
             </a:r>
           </a:p>
         </p:txBody>
@@ -5445,7 +5445,7 @@
                 </a:solidFill>
                 <a:latin typeface="Cambria"/>
               </a:rPr>
-              <a:t>5%</a:t>
+              <a:t>6%</a:t>
             </a:r>
           </a:p>
         </p:txBody>
@@ -5562,7 +5562,7 @@
                 </a:solidFill>
                 <a:latin typeface="Calibri"/>
               </a:rPr>
-              <a:t>Community and belonging is five ads in the entire set.</a:t>
+              <a:t>Community and belonging is six ads in the entire set. Five of them are Gymshark’s.</a:t>
             </a:r>
           </a:p>
         </p:txBody>
@@ -5956,7 +5956,7 @@
                 </a:solidFill>
                 <a:latin typeface="Calibri"/>
               </a:rPr>
-              <a:t>Claude tags each ad by claim theme, audience, ad type and any concrete proof it cites. Tags are frozen to a file so numbers reproduce exactly.</a:t>
+              <a:t>Claude tags each ad; tags are frozen to a file so numbers reproduce exactly. A teammate then audited all 101 rows and 42 corrections were applied.</a:t>
             </a:r>
           </a:p>
         </p:txBody>
@@ -7824,7 +7824,7 @@
                 </a:solidFill>
                 <a:latin typeface="Cambria"/>
               </a:rPr>
-              <a:t>Six in ten ads make a claim and prove nothing</a:t>
+              <a:t>Two in three ads make a claim and prove nothing</a:t>
             </a:r>
           </a:p>
         </p:txBody>
@@ -7903,7 +7903,7 @@
                 </a:solidFill>
                 <a:latin typeface="Cambria"/>
               </a:rPr>
-              <a:t>61%</a:t>
+              <a:t>67%</a:t>
             </a:r>
           </a:p>
         </p:txBody>
@@ -7938,7 +7938,7 @@
                 </a:solidFill>
                 <a:latin typeface="Calibri"/>
               </a:rPr>
-              <a:t>of ads cite no rating, guarantee, statistic or offer of any kind</a:t>
+              <a:t>of ads carry no hard evidence: no rating, review count, price or guarantee</a:t>
             </a:r>
           </a:p>
         </p:txBody>
@@ -8788,7 +8788,7 @@
                 </a:solidFill>
                 <a:latin typeface="Cambria"/>
               </a:rPr>
-              <a:t>Nobody has made belonging measurable</a:t>
+              <a:t>One brand owns belonging. Nobody else contests it.</a:t>
             </a:r>
           </a:p>
         </p:txBody>
@@ -8823,7 +8823,7 @@
                 </a:solidFill>
                 <a:latin typeface="Calibri"/>
               </a:rPr>
-              <a:t>Community is not unclaimed. It is unproven.</a:t>
+              <a:t>Community is uncontested territory, and even its owner does not prove it.</a:t>
             </a:r>
           </a:p>
         </p:txBody>
@@ -8937,7 +8937,7 @@
                 </a:solidFill>
                 <a:latin typeface="Calibri"/>
               </a:rPr>
-              <a:t>Gymshark runs couch-to-5K and half-marathon coaching. Alo has a membership tier. Tracksmith sells Boston running heritage.</a:t>
+              <a:t>Gymshark has made belonging half its message: coached couch-to-5K and half-marathon programmes. Alo has ALO Access. Everyone else: zero.</a:t>
             </a:r>
           </a:p>
         </p:txBody>
@@ -9051,7 +9051,7 @@
                 </a:solidFill>
                 <a:latin typeface="Calibri"/>
               </a:rPr>
-              <a:t>Not one publishes a participation number, a completion rate or a member count. Belonging is tone of voice, not evidence.</a:t>
+              <a:t>Neither publishes a participation number, a completion rate or a member count. The claim exists; the proof does not.</a:t>
             </a:r>
           </a:p>
         </p:txBody>
@@ -9165,7 +9165,7 @@
                 </a:solidFill>
                 <a:latin typeface="Calibri"/>
               </a:rPr>
-              <a:t>A named programme with published numbers, placed where competitors put discount percentages. The one claim a rival cannot copy by reformulating a fabric.</a:t>
+              <a:t>A named programme with published numbers, placed where competitors put discount percentages. Ten brands have left this lane to one competitor who is not defending it with evidence.</a:t>
             </a:r>
           </a:p>
         </p:txBody>
@@ -9918,7 +9918,7 @@
                 </a:solidFill>
                 <a:latin typeface="Calibri"/>
               </a:rPr>
-              <a:t>The Transparency Center shows four ads until you click “See all ads.” Those four skew to product listings, which carry no ratings. We went back and collected the full lists.</a:t>
+              <a:t>The Transparency Center shows four ads until you click “See all ads.” We went back and collected the full lists. Then a teammate audited every tag and found 42 more errors, including in our own headline count. All corrected before this presentation.</a:t>
             </a:r>
           </a:p>
         </p:txBody>
